--- a/outputs/calmmm_demo_walkthrough.pptx
+++ b/outputs/calmmm_demo_walkthrough.pptx
@@ -13,6 +13,7 @@
     <p:sldId xmlns:r="http://schemas.openxmlformats.org/officeDocument/2006/relationships" id="258" r:id="R4d88c29b80024741"/>
     <p:sldId xmlns:r="http://schemas.openxmlformats.org/officeDocument/2006/relationships" id="259" r:id="R890197644f544c45"/>
     <p:sldId xmlns:r="http://schemas.openxmlformats.org/officeDocument/2006/relationships" id="260" r:id="R7831d9e030bd4bee"/>
+    <p:sldId xmlns:ns0="http://schemas.openxmlformats.org/officeDocument/2006/relationships" id="263" ns0:id="rId13"/>
     <p:sldId xmlns:r="http://schemas.openxmlformats.org/officeDocument/2006/relationships" id="261" r:id="R848c3746d6354194"/>
     <p:sldId xmlns:r="http://schemas.openxmlformats.org/officeDocument/2006/relationships" id="262" r:id="R6a6fd7eaef614032"/>
   </p:sldIdLst>
@@ -1711,7 +1712,15 @@
           <c:idx val="0"/>
           <c:order val="0"/>
           <c:tx>
-            <c:v>Example RMSE index</c:v>
+            <c:strRef>
+              <c:f>Sheet1!$B$1</c:f>
+              <c:strCache>
+                <c:ptCount val="1"/>
+                <c:pt idx="0">
+                  <c:v>calibration z-score</c:v>
+                </c:pt>
+              </c:strCache>
+            </c:strRef>
           </c:tx>
           <c:spPr>
             <a:solidFill xmlns:a="http://schemas.openxmlformats.org/drawingml/2006/main">
@@ -1728,39 +1737,33 @@
             <c:showLeaderLines val="0"/>
           </c:dLbls>
           <c:cat>
-            <c:strLit>
-              <c:ptCount val="4"/>
-              <c:pt idx="0">
-                <c:v>visits</c:v>
-              </c:pt>
-              <c:pt idx="1">
-                <c:v>applications</c:v>
-              </c:pt>
-              <c:pt idx="2">
-                <c:v>approvals</c:v>
-              </c:pt>
-              <c:pt idx="3">
-                <c:v>funded revenue</c:v>
-              </c:pt>
-            </c:strLit>
+            <c:strRef>
+              <c:f>Sheet1!$A$2:$A$3</c:f>
+              <c:strCache>
+                <c:ptCount val="2"/>
+                <c:pt idx="0">
+                  <c:v>search_geo_holdout_q2</c:v>
+                </c:pt>
+                <c:pt idx="1">
+                  <c:v>direct_mail_match_q3</c:v>
+                </c:pt>
+              </c:strCache>
+            </c:strRef>
           </c:cat>
           <c:val>
-            <c:numLit>
-              <c:formatCode>General</c:formatCode>
-              <c:ptCount val="4"/>
-              <c:pt idx="0">
-                <c:v>86</c:v>
-              </c:pt>
-              <c:pt idx="1">
-                <c:v>104</c:v>
-              </c:pt>
-              <c:pt idx="2">
-                <c:v>112</c:v>
-              </c:pt>
-              <c:pt idx="3">
-                <c:v>97</c:v>
-              </c:pt>
-            </c:numLit>
+            <c:numRef>
+              <c:f>Sheet1!$B$2:$B$3</c:f>
+              <c:numCache>
+                <c:formatCode>General</c:formatCode>
+                <c:ptCount val="2"/>
+                <c:pt idx="0">
+                  <c:v>0.48</c:v>
+                </c:pt>
+                <c:pt idx="1">
+                  <c:v>-3.02</c:v>
+                </c:pt>
+              </c:numCache>
+            </c:numRef>
           </c:val>
         </c:ser>
         <c:dLbls>
@@ -1817,6 +1820,8 @@
         <c:axId val="48672768"/>
         <c:scaling>
           <c:orientation val="minMax"/>
+          <c:max val="1.0"/>
+          <c:min val="-4.0"/>
         </c:scaling>
         <c:delete val="0"/>
         <c:axPos val="l"/>
@@ -1857,10 +1862,14 @@
         <c:crossAx val="48650112"/>
         <c:crosses val="autoZero"/>
         <c:crossBetween val="between"/>
+        <c:majorUnit val="1.0"/>
       </c:valAx>
     </c:plotArea>
     <c:plotVisOnly val="1"/>
   </c:chart>
+  <c:externalData xmlns:ns0="http://schemas.openxmlformats.org/officeDocument/2006/relationships" ns0:id="rId1">
+    <c:autoUpdate val="0"/>
+  </c:externalData>
 </c:chartSpace>
 </file>
 
@@ -2232,6 +2241,10 @@
             <a:prstDash val="solid"/>
           </a:ln>
         </p:spPr>
+        <p:txBody xmlns:a="http://schemas.openxmlformats.org/drawingml/2006/main">
+          <a:bodyPr/>
+          <a:p/>
+        </p:txBody>
       </p:sp>
       <p:sp>
         <p:nvSpPr>
@@ -2265,6 +2278,10 @@
             <a:prstDash val="solid"/>
           </a:ln>
         </p:spPr>
+        <p:txBody xmlns:a="http://schemas.openxmlformats.org/drawingml/2006/main">
+          <a:bodyPr/>
+          <a:p/>
+        </p:txBody>
       </p:sp>
       <p:sp>
         <p:nvSpPr>
@@ -2448,6 +2465,10 @@
             <a:prstDash val="solid"/>
           </a:ln>
         </p:spPr>
+        <p:txBody xmlns:a="http://schemas.openxmlformats.org/drawingml/2006/main">
+          <a:bodyPr/>
+          <a:p/>
+        </p:txBody>
       </p:sp>
       <p:sp>
         <p:nvSpPr>
@@ -2631,6 +2652,10 @@
             <a:prstDash val="solid"/>
           </a:ln>
         </p:spPr>
+        <p:txBody xmlns:a="http://schemas.openxmlformats.org/drawingml/2006/main">
+          <a:bodyPr/>
+          <a:p/>
+        </p:txBody>
       </p:sp>
       <p:sp>
         <p:nvSpPr>
@@ -2814,6 +2839,10 @@
             <a:prstDash val="solid"/>
           </a:ln>
         </p:spPr>
+        <p:txBody xmlns:a="http://schemas.openxmlformats.org/drawingml/2006/main">
+          <a:bodyPr/>
+          <a:p/>
+        </p:txBody>
       </p:sp>
       <p:sp>
         <p:nvSpPr>
@@ -2995,6 +3024,10 @@
             <a:prstDash val="solid"/>
           </a:ln>
         </p:spPr>
+        <p:txBody xmlns:a="http://schemas.openxmlformats.org/drawingml/2006/main">
+          <a:bodyPr/>
+          <a:p/>
+        </p:txBody>
       </p:sp>
       <p:sp>
         <p:nvSpPr>
@@ -3076,6 +3109,10 @@
             <a:prstDash val="solid"/>
           </a:ln>
         </p:spPr>
+        <p:txBody xmlns:a="http://schemas.openxmlformats.org/drawingml/2006/main">
+          <a:bodyPr/>
+          <a:p/>
+        </p:txBody>
       </p:sp>
       <p:sp>
         <p:nvSpPr>
@@ -3157,6 +3194,10 @@
             <a:prstDash val="solid"/>
           </a:ln>
         </p:spPr>
+        <p:txBody xmlns:a="http://schemas.openxmlformats.org/drawingml/2006/main">
+          <a:bodyPr/>
+          <a:p/>
+        </p:txBody>
       </p:sp>
       <p:sp>
         <p:nvSpPr>
@@ -3469,6 +3510,10 @@
             <a:prstDash val="solid"/>
           </a:ln>
         </p:spPr>
+        <p:txBody xmlns:a="http://schemas.openxmlformats.org/drawingml/2006/main">
+          <a:bodyPr/>
+          <a:p/>
+        </p:txBody>
       </p:sp>
       <p:sp>
         <p:nvSpPr>
@@ -4347,6 +4392,10 @@
             <a:prstDash val="solid"/>
           </a:ln>
         </p:spPr>
+        <p:txBody xmlns:a="http://schemas.openxmlformats.org/drawingml/2006/main">
+          <a:bodyPr/>
+          <a:p/>
+        </p:txBody>
       </p:sp>
       <p:sp>
         <p:nvSpPr>
@@ -4380,6 +4429,10 @@
             <a:prstDash val="solid"/>
           </a:ln>
         </p:spPr>
+        <p:txBody xmlns:a="http://schemas.openxmlformats.org/drawingml/2006/main">
+          <a:bodyPr/>
+          <a:p/>
+        </p:txBody>
       </p:sp>
       <p:sp>
         <p:nvSpPr>
@@ -4613,6 +4666,10 @@
             <a:prstDash val="solid"/>
           </a:ln>
         </p:spPr>
+        <p:txBody xmlns:a="http://schemas.openxmlformats.org/drawingml/2006/main">
+          <a:bodyPr/>
+          <a:p/>
+        </p:txBody>
       </p:sp>
       <p:sp>
         <p:nvSpPr>
@@ -4846,6 +4903,10 @@
             <a:prstDash val="solid"/>
           </a:ln>
         </p:spPr>
+        <p:txBody xmlns:a="http://schemas.openxmlformats.org/drawingml/2006/main">
+          <a:bodyPr/>
+          <a:p/>
+        </p:txBody>
       </p:sp>
       <p:sp>
         <p:nvSpPr>
@@ -5079,6 +5140,10 @@
             <a:prstDash val="solid"/>
           </a:ln>
         </p:spPr>
+        <p:txBody xmlns:a="http://schemas.openxmlformats.org/drawingml/2006/main">
+          <a:bodyPr/>
+          <a:p/>
+        </p:txBody>
       </p:sp>
       <p:sp>
         <p:nvSpPr>
@@ -5312,6 +5377,10 @@
             <a:prstDash val="solid"/>
           </a:ln>
         </p:spPr>
+        <p:txBody xmlns:a="http://schemas.openxmlformats.org/drawingml/2006/main">
+          <a:bodyPr/>
+          <a:p/>
+        </p:txBody>
       </p:sp>
       <p:sp>
         <p:nvSpPr>
@@ -5824,6 +5893,10 @@
             <a:prstDash val="solid"/>
           </a:ln>
         </p:spPr>
+        <p:txBody xmlns:a="http://schemas.openxmlformats.org/drawingml/2006/main">
+          <a:bodyPr/>
+          <a:p/>
+        </p:txBody>
       </p:sp>
       <p:sp>
         <p:nvSpPr>
@@ -5857,6 +5930,10 @@
             <a:prstDash val="solid"/>
           </a:ln>
         </p:spPr>
+        <p:txBody xmlns:a="http://schemas.openxmlformats.org/drawingml/2006/main">
+          <a:bodyPr/>
+          <a:p/>
+        </p:txBody>
       </p:sp>
       <p:sp>
         <p:nvSpPr>
@@ -6103,7 +6180,7 @@
                   <a:srgbClr val="000000"/>
                 </a:solidFill>
               </a:rPr>
-              <a:t>Observed lift: 1,180 +/- 260</a:t>
+              <a:t>Observed lift: 1,180 +/- 2,600</a:t>
             </a:r>
           </a:p>
         </p:txBody>
@@ -6140,6 +6217,10 @@
             <a:prstDash val="solid"/>
           </a:ln>
         </p:spPr>
+        <p:txBody xmlns:a="http://schemas.openxmlformats.org/drawingml/2006/main">
+          <a:bodyPr/>
+          <a:p/>
+        </p:txBody>
       </p:sp>
       <p:sp>
         <p:nvSpPr>
@@ -6615,7 +6696,7 @@
                   <a:srgbClr val="555555"/>
                 </a:solidFill>
               </a:rPr>
-              <a:t>MAP is enough for walkthroughs; MCMC/VI should be used when uncertainty is decision-critical.</a:t>
+              <a:t>Fit on the full 78-week panel with the lift tests' real dates; MAP maxeval raised to 2000 so it actually converges.</a:t>
             </a:r>
           </a:p>
         </p:txBody>
@@ -6652,6 +6733,10 @@
             <a:prstDash val="solid"/>
           </a:ln>
         </p:spPr>
+        <p:txBody xmlns:a="http://schemas.openxmlformats.org/drawingml/2006/main">
+          <a:bodyPr/>
+          <a:p/>
+        </p:txBody>
       </p:sp>
       <p:sp>
         <p:nvSpPr>
@@ -6685,6 +6770,10 @@
             <a:prstDash val="solid"/>
           </a:ln>
         </p:spPr>
+        <p:txBody xmlns:a="http://schemas.openxmlformats.org/drawingml/2006/main">
+          <a:bodyPr/>
+          <a:p/>
+        </p:txBody>
       </p:sp>
       <p:sp>
         <p:nvSpPr>
@@ -6831,7 +6920,7 @@
                   <a:srgbClr val="555555"/>
                 </a:solidFill>
               </a:rPr>
-              <a:t>fast API smoke test</a:t>
+              <a:t>maxeval=2000, full panel</a:t>
             </a:r>
           </a:p>
         </p:txBody>
@@ -6868,6 +6957,10 @@
             <a:prstDash val="solid"/>
           </a:ln>
         </p:spPr>
+        <p:txBody xmlns:a="http://schemas.openxmlformats.org/drawingml/2006/main">
+          <a:bodyPr/>
+          <a:p/>
+        </p:txBody>
       </p:sp>
       <p:sp>
         <p:nvSpPr>
@@ -7051,6 +7144,10 @@
             <a:prstDash val="solid"/>
           </a:ln>
         </p:spPr>
+        <p:txBody xmlns:a="http://schemas.openxmlformats.org/drawingml/2006/main">
+          <a:bodyPr/>
+          <a:p/>
+        </p:txBody>
       </p:sp>
       <p:sp>
         <p:nvSpPr>
@@ -7097,7 +7194,7 @@
                   <a:srgbClr val="555555"/>
                 </a:solidFill>
               </a:rPr>
-              <a:t>RMSE CHECKS</a:t>
+              <a:t>FIT QUALITY (R2)</a:t>
             </a:r>
           </a:p>
         </p:txBody>
@@ -7147,7 +7244,7 @@
                   <a:srgbClr val="000000"/>
                 </a:solidFill>
               </a:rPr>
-              <a:t>per KPI</a:t>
+              <a:t>0.96 / 0.97</a:t>
             </a:r>
           </a:p>
         </p:txBody>
@@ -7197,7 +7294,7 @@
                   <a:srgbClr val="555555"/>
                 </a:solidFill>
               </a:rPr>
-              <a:t>visits, apps, approvals, revenue</a:t>
+              <a:t>applications / funded revenue</a:t>
             </a:r>
           </a:p>
         </p:txBody>
@@ -7234,6 +7331,10 @@
             <a:prstDash val="solid"/>
           </a:ln>
         </p:spPr>
+        <p:txBody xmlns:a="http://schemas.openxmlformats.org/drawingml/2006/main">
+          <a:bodyPr/>
+          <a:p/>
+        </p:txBody>
       </p:sp>
       <p:sp>
         <p:nvSpPr>
@@ -7385,22 +7486,6 @@
           </a:p>
         </p:txBody>
       </p:sp>
-      <p:graphicFrame>
-        <p:nvGraphicFramePr>
-          <p:cNvPr id="43" name="Chart"/>
-          <p:cNvGraphicFramePr/>
-          <p:nvPr/>
-        </p:nvGraphicFramePr>
-        <p:xfrm>
-          <a:off xmlns:a="http://schemas.openxmlformats.org/drawingml/2006/main" x="1619250" y="4495800"/>
-          <a:ext xmlns:a="http://schemas.openxmlformats.org/drawingml/2006/main" cx="8334375" cy="1295400"/>
-        </p:xfrm>
-        <a:graphic xmlns:a="http://schemas.openxmlformats.org/drawingml/2006/main">
-          <a:graphicData uri="http://schemas.openxmlformats.org/drawingml/2006/chart">
-            <c:chart xmlns:r="http://schemas.openxmlformats.org/officeDocument/2006/relationships" xmlns:c="http://schemas.openxmlformats.org/drawingml/2006/chart" r:id="Rc5f8f1db10514595"/>
-          </a:graphicData>
-        </a:graphic>
-      </p:graphicFrame>
       <p:sp>
         <p:nvSpPr>
           <p:cNvPr id="22" name="">
@@ -7447,6 +7532,386 @@
                 </a:solidFill>
               </a:rPr>
               <a:t>calmmm demo package / 5</a:t>
+            </a:r>
+          </a:p>
+        </p:txBody>
+      </p:sp>
+      <p:sp xmlns:a="http://schemas.openxmlformats.org/drawingml/2006/main">
+        <p:nvSpPr>
+          <p:cNvPr id="23" name="Rectangle 22"/>
+          <p:cNvSpPr/>
+          <p:nvPr/>
+        </p:nvSpPr>
+        <p:spPr>
+          <a:xfrm>
+            <a:off x="3048000" y="4572000"/>
+            <a:ext cx="2381250" cy="1123950"/>
+          </a:xfrm>
+          <a:prstGeom prst="rect">
+            <a:avLst/>
+          </a:prstGeom>
+          <a:solidFill>
+            <a:srgbClr val="EDEDED"/>
+          </a:solidFill>
+          <a:ln>
+            <a:noFill/>
+          </a:ln>
+        </p:spPr>
+        <p:style>
+          <a:lnRef idx="1">
+            <a:schemeClr val="accent1"/>
+          </a:lnRef>
+          <a:fillRef idx="3">
+            <a:schemeClr val="accent1"/>
+          </a:fillRef>
+          <a:effectRef idx="2">
+            <a:schemeClr val="accent1"/>
+          </a:effectRef>
+          <a:fontRef idx="minor">
+            <a:schemeClr val="lt1"/>
+          </a:fontRef>
+        </p:style>
+        <p:txBody>
+          <a:bodyPr rtlCol="0" anchor="ctr"/>
+          <a:lstStyle/>
+          <a:p>
+            <a:pPr algn="ctr"/>
+          </a:p>
+        </p:txBody>
+      </p:sp>
+      <p:sp xmlns:a="http://schemas.openxmlformats.org/drawingml/2006/main">
+        <p:nvSpPr>
+          <p:cNvPr id="24" name="Rectangle 23"/>
+          <p:cNvSpPr/>
+          <p:nvPr/>
+        </p:nvSpPr>
+        <p:spPr>
+          <a:xfrm>
+            <a:off x="3219450" y="4724400"/>
+            <a:ext cx="2038350" cy="209550"/>
+          </a:xfrm>
+          <a:prstGeom prst="rect">
+            <a:avLst/>
+          </a:prstGeom>
+          <a:noFill/>
+          <a:ln>
+            <a:noFill/>
+          </a:ln>
+        </p:spPr>
+        <p:style>
+          <a:lnRef idx="1">
+            <a:schemeClr val="accent1"/>
+          </a:lnRef>
+          <a:fillRef idx="3">
+            <a:schemeClr val="accent1"/>
+          </a:fillRef>
+          <a:effectRef idx="2">
+            <a:schemeClr val="accent1"/>
+          </a:effectRef>
+          <a:fontRef idx="minor">
+            <a:schemeClr val="lt1"/>
+          </a:fontRef>
+        </p:style>
+        <p:txBody>
+          <a:bodyPr rtlCol="0" anchor="ctr"/>
+          <a:lstStyle/>
+          <a:p>
+            <a:pPr algn="l"/>
+            <a:r>
+              <a:rPr sz="900" b="1">
+                <a:solidFill>
+                  <a:srgbClr val="555555"/>
+                </a:solidFill>
+              </a:rPr>
+              <a:t>SEARCH TEST</a:t>
+            </a:r>
+          </a:p>
+        </p:txBody>
+      </p:sp>
+      <p:sp xmlns:a="http://schemas.openxmlformats.org/drawingml/2006/main">
+        <p:nvSpPr>
+          <p:cNvPr id="25" name="Rectangle 24"/>
+          <p:cNvSpPr/>
+          <p:nvPr/>
+        </p:nvSpPr>
+        <p:spPr>
+          <a:xfrm>
+            <a:off x="3219450" y="4981575"/>
+            <a:ext cx="2038350" cy="400050"/>
+          </a:xfrm>
+          <a:prstGeom prst="rect">
+            <a:avLst/>
+          </a:prstGeom>
+          <a:noFill/>
+          <a:ln>
+            <a:noFill/>
+          </a:ln>
+        </p:spPr>
+        <p:style>
+          <a:lnRef idx="1">
+            <a:schemeClr val="accent1"/>
+          </a:lnRef>
+          <a:fillRef idx="3">
+            <a:schemeClr val="accent1"/>
+          </a:fillRef>
+          <a:effectRef idx="2">
+            <a:schemeClr val="accent1"/>
+          </a:effectRef>
+          <a:fontRef idx="minor">
+            <a:schemeClr val="lt1"/>
+          </a:fontRef>
+        </p:style>
+        <p:txBody>
+          <a:bodyPr rtlCol="0" anchor="ctr"/>
+          <a:lstStyle/>
+          <a:p>
+            <a:pPr algn="l"/>
+            <a:r>
+              <a:rPr sz="2550" b="1">
+                <a:solidFill>
+                  <a:srgbClr val="000000"/>
+                </a:solidFill>
+              </a:rPr>
+              <a:t>z = 0.48</a:t>
+            </a:r>
+          </a:p>
+        </p:txBody>
+      </p:sp>
+      <p:sp xmlns:a="http://schemas.openxmlformats.org/drawingml/2006/main">
+        <p:nvSpPr>
+          <p:cNvPr id="26" name="Rectangle 25"/>
+          <p:cNvSpPr/>
+          <p:nvPr/>
+        </p:nvSpPr>
+        <p:spPr>
+          <a:xfrm>
+            <a:off x="3219450" y="5391150"/>
+            <a:ext cx="2038350" cy="209550"/>
+          </a:xfrm>
+          <a:prstGeom prst="rect">
+            <a:avLst/>
+          </a:prstGeom>
+          <a:noFill/>
+          <a:ln>
+            <a:noFill/>
+          </a:ln>
+        </p:spPr>
+        <p:style>
+          <a:lnRef idx="1">
+            <a:schemeClr val="accent1"/>
+          </a:lnRef>
+          <a:fillRef idx="3">
+            <a:schemeClr val="accent1"/>
+          </a:fillRef>
+          <a:effectRef idx="2">
+            <a:schemeClr val="accent1"/>
+          </a:effectRef>
+          <a:fontRef idx="minor">
+            <a:schemeClr val="lt1"/>
+          </a:fontRef>
+        </p:style>
+        <p:txBody>
+          <a:bodyPr rtlCol="0" anchor="ctr"/>
+          <a:lstStyle/>
+          <a:p>
+            <a:pPr algn="l"/>
+            <a:r>
+              <a:rPr sz="975" b="0">
+                <a:solidFill>
+                  <a:srgbClr val="555555"/>
+                </a:solidFill>
+              </a:rPr>
+              <a:t>well within noise</a:t>
+            </a:r>
+          </a:p>
+        </p:txBody>
+      </p:sp>
+      <p:sp xmlns:a="http://schemas.openxmlformats.org/drawingml/2006/main">
+        <p:nvSpPr>
+          <p:cNvPr id="27" name="Rectangle 26"/>
+          <p:cNvSpPr/>
+          <p:nvPr/>
+        </p:nvSpPr>
+        <p:spPr>
+          <a:xfrm>
+            <a:off x="5695950" y="4572000"/>
+            <a:ext cx="2381250" cy="1123950"/>
+          </a:xfrm>
+          <a:prstGeom prst="rect">
+            <a:avLst/>
+          </a:prstGeom>
+          <a:solidFill>
+            <a:srgbClr val="FFE7DD"/>
+          </a:solidFill>
+          <a:ln>
+            <a:noFill/>
+          </a:ln>
+        </p:spPr>
+        <p:style>
+          <a:lnRef idx="1">
+            <a:schemeClr val="accent1"/>
+          </a:lnRef>
+          <a:fillRef idx="3">
+            <a:schemeClr val="accent1"/>
+          </a:fillRef>
+          <a:effectRef idx="2">
+            <a:schemeClr val="accent1"/>
+          </a:effectRef>
+          <a:fontRef idx="minor">
+            <a:schemeClr val="lt1"/>
+          </a:fontRef>
+        </p:style>
+        <p:txBody>
+          <a:bodyPr rtlCol="0" anchor="ctr"/>
+          <a:lstStyle/>
+          <a:p>
+            <a:pPr algn="ctr"/>
+          </a:p>
+        </p:txBody>
+      </p:sp>
+      <p:sp xmlns:a="http://schemas.openxmlformats.org/drawingml/2006/main">
+        <p:nvSpPr>
+          <p:cNvPr id="28" name="Rectangle 27"/>
+          <p:cNvSpPr/>
+          <p:nvPr/>
+        </p:nvSpPr>
+        <p:spPr>
+          <a:xfrm>
+            <a:off x="5867400" y="4724400"/>
+            <a:ext cx="2038350" cy="209550"/>
+          </a:xfrm>
+          <a:prstGeom prst="rect">
+            <a:avLst/>
+          </a:prstGeom>
+          <a:noFill/>
+          <a:ln>
+            <a:noFill/>
+          </a:ln>
+        </p:spPr>
+        <p:style>
+          <a:lnRef idx="1">
+            <a:schemeClr val="accent1"/>
+          </a:lnRef>
+          <a:fillRef idx="3">
+            <a:schemeClr val="accent1"/>
+          </a:fillRef>
+          <a:effectRef idx="2">
+            <a:schemeClr val="accent1"/>
+          </a:effectRef>
+          <a:fontRef idx="minor">
+            <a:schemeClr val="lt1"/>
+          </a:fontRef>
+        </p:style>
+        <p:txBody>
+          <a:bodyPr rtlCol="0" anchor="ctr"/>
+          <a:lstStyle/>
+          <a:p>
+            <a:pPr algn="l"/>
+            <a:r>
+              <a:rPr sz="900" b="1">
+                <a:solidFill>
+                  <a:srgbClr val="555555"/>
+                </a:solidFill>
+              </a:rPr>
+              <a:t>DIRECT MAIL TEST</a:t>
+            </a:r>
+          </a:p>
+        </p:txBody>
+      </p:sp>
+      <p:sp xmlns:a="http://schemas.openxmlformats.org/drawingml/2006/main">
+        <p:nvSpPr>
+          <p:cNvPr id="29" name="Rectangle 28"/>
+          <p:cNvSpPr/>
+          <p:nvPr/>
+        </p:nvSpPr>
+        <p:spPr>
+          <a:xfrm>
+            <a:off x="5867400" y="4981575"/>
+            <a:ext cx="2038350" cy="400050"/>
+          </a:xfrm>
+          <a:prstGeom prst="rect">
+            <a:avLst/>
+          </a:prstGeom>
+          <a:noFill/>
+          <a:ln>
+            <a:noFill/>
+          </a:ln>
+        </p:spPr>
+        <p:style>
+          <a:lnRef idx="1">
+            <a:schemeClr val="accent1"/>
+          </a:lnRef>
+          <a:fillRef idx="3">
+            <a:schemeClr val="accent1"/>
+          </a:fillRef>
+          <a:effectRef idx="2">
+            <a:schemeClr val="accent1"/>
+          </a:effectRef>
+          <a:fontRef idx="minor">
+            <a:schemeClr val="lt1"/>
+          </a:fontRef>
+        </p:style>
+        <p:txBody>
+          <a:bodyPr rtlCol="0" anchor="ctr"/>
+          <a:lstStyle/>
+          <a:p>
+            <a:pPr algn="l"/>
+            <a:r>
+              <a:rPr sz="2550" b="1">
+                <a:solidFill>
+                  <a:srgbClr val="000000"/>
+                </a:solidFill>
+              </a:rPr>
+              <a:t>z = -3.02</a:t>
+            </a:r>
+          </a:p>
+        </p:txBody>
+      </p:sp>
+      <p:sp xmlns:a="http://schemas.openxmlformats.org/drawingml/2006/main">
+        <p:nvSpPr>
+          <p:cNvPr id="30" name="Rectangle 29"/>
+          <p:cNvSpPr/>
+          <p:nvPr/>
+        </p:nvSpPr>
+        <p:spPr>
+          <a:xfrm>
+            <a:off x="5867400" y="5391150"/>
+            <a:ext cx="2038350" cy="209550"/>
+          </a:xfrm>
+          <a:prstGeom prst="rect">
+            <a:avLst/>
+          </a:prstGeom>
+          <a:noFill/>
+          <a:ln>
+            <a:noFill/>
+          </a:ln>
+        </p:spPr>
+        <p:style>
+          <a:lnRef idx="1">
+            <a:schemeClr val="accent1"/>
+          </a:lnRef>
+          <a:fillRef idx="3">
+            <a:schemeClr val="accent1"/>
+          </a:fillRef>
+          <a:effectRef idx="2">
+            <a:schemeClr val="accent1"/>
+          </a:effectRef>
+          <a:fontRef idx="minor">
+            <a:schemeClr val="lt1"/>
+          </a:fontRef>
+        </p:style>
+        <p:txBody>
+          <a:bodyPr rtlCol="0" anchor="ctr"/>
+          <a:lstStyle/>
+          <a:p>
+            <a:pPr algn="l"/>
+            <a:r>
+              <a:rPr sz="975" b="0">
+                <a:solidFill>
+                  <a:srgbClr val="555555"/>
+                </a:solidFill>
+              </a:rPr>
+              <a:t>still open (next slide)</a:t>
             </a:r>
           </a:p>
         </p:txBody>
@@ -7462,704 +7927,597 @@
 </file>
 
 <file path=ppt/slides/slide6.xml><?xml version="1.0" encoding="utf-8"?>
-<p:sld xmlns:p="http://schemas.openxmlformats.org/presentationml/2006/main">
+<p:sld xmlns:a="http://schemas.openxmlformats.org/drawingml/2006/main" xmlns:p="http://schemas.openxmlformats.org/presentationml/2006/main" xmlns:r="http://schemas.openxmlformats.org/officeDocument/2006/relationships">
   <p:cSld>
-    <p:bg>
-      <p:bgPr>
-        <a:solidFill xmlns:a="http://schemas.openxmlformats.org/drawingml/2006/main">
-          <a:srgbClr val="FFFFFF"/>
-        </a:solidFill>
-      </p:bgPr>
-    </p:bg>
     <p:spTree>
       <p:nvGrpSpPr>
         <p:cNvPr id="1" name=""/>
         <p:cNvGrpSpPr/>
         <p:nvPr/>
       </p:nvGrpSpPr>
-      <p:grpSpPr>
-        <a:xfrm xmlns:a="http://schemas.openxmlformats.org/drawingml/2006/main"/>
-      </p:grpSpPr>
-      <p:sp>
-        <p:nvSpPr>
-          <p:cNvPr id="1" name="">
-            <a:extLst xmlns:a="http://schemas.openxmlformats.org/drawingml/2006/main">
-              <a:ext uri="{FF2B5EF4-FFF2-40B4-BE49-F238E27FC236}">
-                <a16:creationId xmlns:a16="http://schemas.microsoft.com/office/drawing/2014/main" id="{A18333A7-5A76-49B6-98DE-D2EFA81D6EBA}"/>
-              </a:ext>
-            </a:extLst>
-          </p:cNvPr>
-          <p:cNvSpPr>
-            <a:spLocks xmlns:a="http://schemas.openxmlformats.org/drawingml/2006/main" noGrp="1"/>
-          </p:cNvSpPr>
-          <p:nvPr/>
-        </p:nvSpPr>
-        <p:spPr>
-          <a:xfrm xmlns:a="http://schemas.openxmlformats.org/drawingml/2006/main">
+      <p:grpSpPr/>
+      <p:sp>
+        <p:nvSpPr>
+          <p:cNvPr id="2" name="Rectangle 1"/>
+          <p:cNvSpPr/>
+          <p:nvPr/>
+        </p:nvSpPr>
+        <p:spPr>
+          <a:xfrm>
             <a:off x="400050" y="361950"/>
             <a:ext cx="4000500" cy="247650"/>
           </a:xfrm>
-          <a:prstGeom xmlns:a="http://schemas.openxmlformats.org/drawingml/2006/main" prst="rect">
-            <a:avLst/>
-          </a:prstGeom>
-          <a:noFill xmlns:a="http://schemas.openxmlformats.org/drawingml/2006/main"/>
-          <a:ln xmlns:a="http://schemas.openxmlformats.org/drawingml/2006/main" w="0">
-            <a:noFill/>
-            <a:prstDash val="solid"/>
-          </a:ln>
-        </p:spPr>
-        <p:txBody>
-          <a:bodyPr xmlns:a="http://schemas.openxmlformats.org/drawingml/2006/main"/>
-          <a:lstStyle xmlns:a="http://schemas.openxmlformats.org/drawingml/2006/main"/>
-          <a:p xmlns:a="http://schemas.openxmlformats.org/drawingml/2006/main">
-            <a:pPr>
-              <a:defRPr sz="1050" b="1">
-                <a:solidFill>
-                  <a:srgbClr val="555555"/>
-                </a:solidFill>
-              </a:defRPr>
-            </a:pPr>
+          <a:prstGeom prst="rect">
+            <a:avLst/>
+          </a:prstGeom>
+          <a:noFill/>
+          <a:ln>
+            <a:noFill/>
+          </a:ln>
+        </p:spPr>
+        <p:style>
+          <a:lnRef idx="1">
+            <a:schemeClr val="accent1"/>
+          </a:lnRef>
+          <a:fillRef idx="3">
+            <a:schemeClr val="accent1"/>
+          </a:fillRef>
+          <a:effectRef idx="2">
+            <a:schemeClr val="accent1"/>
+          </a:effectRef>
+          <a:fontRef idx="minor">
+            <a:schemeClr val="lt1"/>
+          </a:fontRef>
+        </p:style>
+        <p:txBody>
+          <a:bodyPr rtlCol="0" anchor="ctr"/>
+          <a:lstStyle/>
+          <a:p>
+            <a:pPr algn="l"/>
             <a:r>
               <a:rPr sz="1050" b="1">
                 <a:solidFill>
                   <a:srgbClr val="555555"/>
                 </a:solidFill>
               </a:rPr>
-              <a:t>ATTRIBUTION</a:t>
-            </a:r>
-          </a:p>
-        </p:txBody>
-      </p:sp>
-      <p:sp>
-        <p:nvSpPr>
-          <p:cNvPr id="2" name="">
-            <a:extLst xmlns:a="http://schemas.openxmlformats.org/drawingml/2006/main">
-              <a:ext uri="{FF2B5EF4-FFF2-40B4-BE49-F238E27FC236}">
-                <a16:creationId xmlns:a16="http://schemas.microsoft.com/office/drawing/2014/main" id="{A38F75DF-1F3C-477C-99BE-FF359B1B1788}"/>
-              </a:ext>
-            </a:extLst>
-          </p:cNvPr>
-          <p:cNvSpPr>
-            <a:spLocks xmlns:a="http://schemas.openxmlformats.org/drawingml/2006/main" noGrp="1"/>
-          </p:cNvSpPr>
-          <p:nvPr/>
-        </p:nvSpPr>
-        <p:spPr>
-          <a:xfrm xmlns:a="http://schemas.openxmlformats.org/drawingml/2006/main">
+              <a:t>CALIBRATION LESSONS</a:t>
+            </a:r>
+          </a:p>
+        </p:txBody>
+      </p:sp>
+      <p:sp>
+        <p:nvSpPr>
+          <p:cNvPr id="3" name="Rectangle 2"/>
+          <p:cNvSpPr/>
+          <p:nvPr/>
+        </p:nvSpPr>
+        <p:spPr>
+          <a:xfrm>
             <a:off x="400050" y="781050"/>
-            <a:ext cx="8096250" cy="1009650"/>
-          </a:xfrm>
-          <a:prstGeom xmlns:a="http://schemas.openxmlformats.org/drawingml/2006/main" prst="rect">
-            <a:avLst/>
-          </a:prstGeom>
-          <a:noFill xmlns:a="http://schemas.openxmlformats.org/drawingml/2006/main"/>
-          <a:ln xmlns:a="http://schemas.openxmlformats.org/drawingml/2006/main" w="0">
-            <a:noFill/>
-            <a:prstDash val="solid"/>
-          </a:ln>
-        </p:spPr>
-        <p:txBody>
-          <a:bodyPr xmlns:a="http://schemas.openxmlformats.org/drawingml/2006/main"/>
-          <a:lstStyle xmlns:a="http://schemas.openxmlformats.org/drawingml/2006/main"/>
-          <a:p xmlns:a="http://schemas.openxmlformats.org/drawingml/2006/main">
-            <a:pPr>
-              <a:defRPr sz="3150" b="1">
-                <a:solidFill>
-                  <a:srgbClr val="000000"/>
-                </a:solidFill>
-              </a:defRPr>
-            </a:pPr>
+            <a:ext cx="8500000" cy="1009650"/>
+          </a:xfrm>
+          <a:prstGeom prst="rect">
+            <a:avLst/>
+          </a:prstGeom>
+          <a:noFill/>
+          <a:ln>
+            <a:noFill/>
+          </a:ln>
+        </p:spPr>
+        <p:style>
+          <a:lnRef idx="1">
+            <a:schemeClr val="accent1"/>
+          </a:lnRef>
+          <a:fillRef idx="3">
+            <a:schemeClr val="accent1"/>
+          </a:fillRef>
+          <a:effectRef idx="2">
+            <a:schemeClr val="accent1"/>
+          </a:effectRef>
+          <a:fontRef idx="minor">
+            <a:schemeClr val="lt1"/>
+          </a:fontRef>
+        </p:style>
+        <p:txBody>
+          <a:bodyPr rtlCol="0" anchor="ctr"/>
+          <a:lstStyle/>
+          <a:p>
+            <a:pPr algn="l"/>
             <a:r>
               <a:rPr sz="3150" b="1">
                 <a:solidFill>
                   <a:srgbClr val="000000"/>
                 </a:solidFill>
               </a:rPr>
-              <a:t>Outputs translate fit parameters into business decisions</a:t>
-            </a:r>
-          </a:p>
-        </p:txBody>
-      </p:sp>
-      <p:sp>
-        <p:nvSpPr>
-          <p:cNvPr id="3" name="">
-            <a:extLst xmlns:a="http://schemas.openxmlformats.org/drawingml/2006/main">
-              <a:ext uri="{FF2B5EF4-FFF2-40B4-BE49-F238E27FC236}">
-                <a16:creationId xmlns:a16="http://schemas.microsoft.com/office/drawing/2014/main" id="{DB97D747-1CE9-432E-9730-D50DDF8CDA5D}"/>
-              </a:ext>
-            </a:extLst>
-          </p:cNvPr>
-          <p:cNvSpPr>
-            <a:spLocks xmlns:a="http://schemas.openxmlformats.org/drawingml/2006/main" noGrp="1"/>
-          </p:cNvSpPr>
-          <p:nvPr/>
-        </p:nvSpPr>
-        <p:spPr>
-          <a:xfrm xmlns:a="http://schemas.openxmlformats.org/drawingml/2006/main">
+              <a:t>Better R2 took three real fixes, not prior tuning</a:t>
+            </a:r>
+          </a:p>
+        </p:txBody>
+      </p:sp>
+      <p:sp>
+        <p:nvSpPr>
+          <p:cNvPr id="4" name="Rectangle 3"/>
+          <p:cNvSpPr/>
+          <p:nvPr/>
+        </p:nvSpPr>
+        <p:spPr>
+          <a:xfrm>
             <a:off x="400050" y="1885950"/>
-            <a:ext cx="7429500" cy="590550"/>
-          </a:xfrm>
-          <a:prstGeom xmlns:a="http://schemas.openxmlformats.org/drawingml/2006/main" prst="rect">
-            <a:avLst/>
-          </a:prstGeom>
-          <a:noFill xmlns:a="http://schemas.openxmlformats.org/drawingml/2006/main"/>
-          <a:ln xmlns:a="http://schemas.openxmlformats.org/drawingml/2006/main" w="0">
-            <a:noFill/>
-            <a:prstDash val="solid"/>
-          </a:ln>
-        </p:spPr>
-        <p:txBody>
-          <a:bodyPr xmlns:a="http://schemas.openxmlformats.org/drawingml/2006/main"/>
-          <a:lstStyle xmlns:a="http://schemas.openxmlformats.org/drawingml/2006/main"/>
-          <a:p xmlns:a="http://schemas.openxmlformats.org/drawingml/2006/main">
-            <a:pPr>
-              <a:defRPr sz="1500">
-                <a:solidFill>
-                  <a:srgbClr val="555555"/>
-                </a:solidFill>
-              </a:defRPr>
-            </a:pPr>
-            <a:r>
-              <a:rPr sz="1500">
-                <a:solidFill>
-                  <a:srgbClr val="555555"/>
-                </a:solidFill>
-              </a:rPr>
-              <a:t>The demo separates additive reporting contribution from marginal economic contribution.</a:t>
-            </a:r>
-          </a:p>
-        </p:txBody>
-      </p:sp>
-      <p:sp>
-        <p:nvSpPr>
-          <p:cNvPr id="4" name="">
-            <a:extLst xmlns:a="http://schemas.openxmlformats.org/drawingml/2006/main">
-              <a:ext uri="{FF2B5EF4-FFF2-40B4-BE49-F238E27FC236}">
-                <a16:creationId xmlns:a16="http://schemas.microsoft.com/office/drawing/2014/main" id="{F88A267E-BA84-46A6-912E-7D71B31AE352}"/>
-              </a:ext>
-            </a:extLst>
-          </p:cNvPr>
-          <p:cNvSpPr>
-            <a:spLocks xmlns:a="http://schemas.openxmlformats.org/drawingml/2006/main" noGrp="1"/>
-          </p:cNvSpPr>
-          <p:nvPr/>
-        </p:nvSpPr>
-        <p:spPr>
-          <a:xfrm xmlns:a="http://schemas.openxmlformats.org/drawingml/2006/main">
+            <a:ext cx="8300000" cy="590550"/>
+          </a:xfrm>
+          <a:prstGeom prst="rect">
+            <a:avLst/>
+          </a:prstGeom>
+          <a:noFill/>
+          <a:ln>
+            <a:noFill/>
+          </a:ln>
+        </p:spPr>
+        <p:style>
+          <a:lnRef idx="1">
+            <a:schemeClr val="accent1"/>
+          </a:lnRef>
+          <a:fillRef idx="3">
+            <a:schemeClr val="accent1"/>
+          </a:fillRef>
+          <a:effectRef idx="2">
+            <a:schemeClr val="accent1"/>
+          </a:effectRef>
+          <a:fontRef idx="minor">
+            <a:schemeClr val="lt1"/>
+          </a:fontRef>
+        </p:style>
+        <p:txBody>
+          <a:bodyPr rtlCol="0" anchor="ctr"/>
+          <a:lstStyle/>
+          <a:p>
+            <a:pPr algn="l"/>
+            <a:r>
+              <a:rPr sz="1500" b="0">
+                <a:solidFill>
+                  <a:srgbClr val="555555"/>
+                </a:solidFill>
+              </a:rPr>
+              <a:t>search_geo_holdout_q2 and direct_mail_match_q3 exposed gaps in how experiment metadata reached the fitted model.</a:t>
+            </a:r>
+          </a:p>
+        </p:txBody>
+      </p:sp>
+      <p:sp>
+        <p:nvSpPr>
+          <p:cNvPr id="5" name="Rectangle 4"/>
+          <p:cNvSpPr/>
+          <p:nvPr/>
+        </p:nvSpPr>
+        <p:spPr>
+          <a:xfrm>
             <a:off x="400050" y="6286500"/>
             <a:ext cx="11391900" cy="9525"/>
           </a:xfrm>
-          <a:prstGeom xmlns:a="http://schemas.openxmlformats.org/drawingml/2006/main" prst="rect">
-            <a:avLst/>
-          </a:prstGeom>
-          <a:solidFill xmlns:a="http://schemas.openxmlformats.org/drawingml/2006/main">
+          <a:prstGeom prst="rect">
+            <a:avLst/>
+          </a:prstGeom>
+          <a:solidFill>
             <a:srgbClr val="B8BCC4"/>
           </a:solidFill>
-          <a:ln xmlns:a="http://schemas.openxmlformats.org/drawingml/2006/main" w="0">
-            <a:solidFill>
-              <a:srgbClr val="B8BCC4"/>
-            </a:solidFill>
-            <a:prstDash val="solid"/>
-          </a:ln>
-        </p:spPr>
-      </p:sp>
-      <p:graphicFrame>
-        <p:nvGraphicFramePr>
-          <p:cNvPr id="21" name="Chart"/>
-          <p:cNvGraphicFramePr/>
-          <p:nvPr/>
-        </p:nvGraphicFramePr>
-        <p:xfrm>
-          <a:off xmlns:a="http://schemas.openxmlformats.org/drawingml/2006/main" x="495300" y="2800350"/>
-          <a:ext xmlns:a="http://schemas.openxmlformats.org/drawingml/2006/main" cx="4857750" cy="2762250"/>
-        </p:xfrm>
-        <a:graphic xmlns:a="http://schemas.openxmlformats.org/drawingml/2006/main">
-          <a:graphicData uri="http://schemas.openxmlformats.org/drawingml/2006/chart">
-            <c:chart xmlns:r="http://schemas.openxmlformats.org/officeDocument/2006/relationships" xmlns:c="http://schemas.openxmlformats.org/drawingml/2006/chart" r:id="R44f77f93d0a543de"/>
-          </a:graphicData>
-        </a:graphic>
-      </p:graphicFrame>
-      <p:sp>
-        <p:nvSpPr>
-          <p:cNvPr id="6" name="">
-            <a:extLst xmlns:a="http://schemas.openxmlformats.org/drawingml/2006/main">
-              <a:ext uri="{FF2B5EF4-FFF2-40B4-BE49-F238E27FC236}">
-                <a16:creationId xmlns:a16="http://schemas.microsoft.com/office/drawing/2014/main" id="{5514076E-118F-47DC-979E-EEE483645761}"/>
-              </a:ext>
-            </a:extLst>
-          </p:cNvPr>
-          <p:cNvSpPr>
-            <a:spLocks xmlns:a="http://schemas.openxmlformats.org/drawingml/2006/main" noGrp="1"/>
-          </p:cNvSpPr>
-          <p:nvPr/>
-        </p:nvSpPr>
-        <p:spPr>
-          <a:xfrm xmlns:a="http://schemas.openxmlformats.org/drawingml/2006/main">
-            <a:off x="495300" y="2419350"/>
-            <a:ext cx="3714750" cy="285750"/>
-          </a:xfrm>
-          <a:prstGeom xmlns:a="http://schemas.openxmlformats.org/drawingml/2006/main" prst="rect">
-            <a:avLst/>
-          </a:prstGeom>
-          <a:noFill xmlns:a="http://schemas.openxmlformats.org/drawingml/2006/main"/>
-          <a:ln xmlns:a="http://schemas.openxmlformats.org/drawingml/2006/main" w="0">
-            <a:noFill/>
-            <a:prstDash val="solid"/>
-          </a:ln>
-        </p:spPr>
-        <p:txBody>
-          <a:bodyPr xmlns:a="http://schemas.openxmlformats.org/drawingml/2006/main"/>
-          <a:lstStyle xmlns:a="http://schemas.openxmlformats.org/drawingml/2006/main"/>
-          <a:p xmlns:a="http://schemas.openxmlformats.org/drawingml/2006/main">
-            <a:pPr>
-              <a:defRPr sz="1650" b="1">
-                <a:solidFill>
-                  <a:srgbClr val="000000"/>
-                </a:solidFill>
-              </a:defRPr>
-            </a:pPr>
-            <a:r>
-              <a:rPr sz="1650" b="1">
-                <a:solidFill>
-                  <a:srgbClr val="000000"/>
-                </a:solidFill>
-              </a:rPr>
-              <a:t>ROI index by channel</a:t>
-            </a:r>
-          </a:p>
-        </p:txBody>
-      </p:sp>
-      <p:sp>
-        <p:nvSpPr>
-          <p:cNvPr id="7" name="">
-            <a:extLst xmlns:a="http://schemas.openxmlformats.org/drawingml/2006/main">
-              <a:ext uri="{FF2B5EF4-FFF2-40B4-BE49-F238E27FC236}">
-                <a16:creationId xmlns:a16="http://schemas.microsoft.com/office/drawing/2014/main" id="{88574D17-14DE-44BA-A249-3A4388825350}"/>
-              </a:ext>
-            </a:extLst>
-          </p:cNvPr>
-          <p:cNvSpPr>
-            <a:spLocks xmlns:a="http://schemas.openxmlformats.org/drawingml/2006/main" noGrp="1"/>
-          </p:cNvSpPr>
-          <p:nvPr/>
-        </p:nvSpPr>
-        <p:spPr>
-          <a:xfrm xmlns:a="http://schemas.openxmlformats.org/drawingml/2006/main">
-            <a:off x="6191250" y="2609850"/>
-            <a:ext cx="2857500" cy="304800"/>
-          </a:xfrm>
-          <a:prstGeom xmlns:a="http://schemas.openxmlformats.org/drawingml/2006/main" prst="rect">
-            <a:avLst/>
-          </a:prstGeom>
-          <a:noFill xmlns:a="http://schemas.openxmlformats.org/drawingml/2006/main"/>
-          <a:ln xmlns:a="http://schemas.openxmlformats.org/drawingml/2006/main" w="0">
-            <a:noFill/>
-            <a:prstDash val="solid"/>
-          </a:ln>
-        </p:spPr>
-        <p:txBody>
-          <a:bodyPr xmlns:a="http://schemas.openxmlformats.org/drawingml/2006/main"/>
-          <a:lstStyle xmlns:a="http://schemas.openxmlformats.org/drawingml/2006/main"/>
-          <a:p xmlns:a="http://schemas.openxmlformats.org/drawingml/2006/main">
-            <a:pPr>
-              <a:defRPr sz="1800" b="1">
-                <a:solidFill>
-                  <a:srgbClr val="000000"/>
-                </a:solidFill>
-              </a:defRPr>
-            </a:pPr>
-            <a:r>
-              <a:rPr sz="1800" b="1">
-                <a:solidFill>
-                  <a:srgbClr val="000000"/>
-                </a:solidFill>
-              </a:rPr>
-              <a:t>Decision outputs</a:t>
-            </a:r>
-          </a:p>
-        </p:txBody>
-      </p:sp>
-      <p:sp>
-        <p:nvSpPr>
-          <p:cNvPr id="8" name="">
-            <a:extLst xmlns:a="http://schemas.openxmlformats.org/drawingml/2006/main">
-              <a:ext uri="{FF2B5EF4-FFF2-40B4-BE49-F238E27FC236}">
-                <a16:creationId xmlns:a16="http://schemas.microsoft.com/office/drawing/2014/main" id="{2E49447E-6392-4F06-9D62-5E7653706A67}"/>
-              </a:ext>
-            </a:extLst>
-          </p:cNvPr>
-          <p:cNvSpPr>
-            <a:spLocks xmlns:a="http://schemas.openxmlformats.org/drawingml/2006/main" noGrp="1"/>
-          </p:cNvSpPr>
-          <p:nvPr/>
-        </p:nvSpPr>
-        <p:spPr>
-          <a:xfrm xmlns:a="http://schemas.openxmlformats.org/drawingml/2006/main">
-            <a:off x="6191250" y="3219450"/>
+          <a:ln>
+            <a:noFill/>
+          </a:ln>
+        </p:spPr>
+        <p:style>
+          <a:lnRef idx="1">
+            <a:schemeClr val="accent1"/>
+          </a:lnRef>
+          <a:fillRef idx="3">
+            <a:schemeClr val="accent1"/>
+          </a:fillRef>
+          <a:effectRef idx="2">
+            <a:schemeClr val="accent1"/>
+          </a:effectRef>
+          <a:fontRef idx="minor">
+            <a:schemeClr val="lt1"/>
+          </a:fontRef>
+        </p:style>
+        <p:txBody>
+          <a:bodyPr rtlCol="0" anchor="ctr"/>
+          <a:lstStyle/>
+          <a:p>
+            <a:pPr algn="l"/>
+          </a:p>
+        </p:txBody>
+      </p:sp>
+      <p:sp>
+        <p:nvSpPr>
+          <p:cNvPr id="6" name="Rectangle 5"/>
+          <p:cNvSpPr/>
+          <p:nvPr/>
+        </p:nvSpPr>
+        <p:spPr>
+          <a:xfrm>
+            <a:off x="10096500" y="6419850"/>
+            <a:ext cx="1695450" cy="228600"/>
+          </a:xfrm>
+          <a:prstGeom prst="rect">
+            <a:avLst/>
+          </a:prstGeom>
+          <a:noFill/>
+          <a:ln>
+            <a:noFill/>
+          </a:ln>
+        </p:spPr>
+        <p:style>
+          <a:lnRef idx="1">
+            <a:schemeClr val="accent1"/>
+          </a:lnRef>
+          <a:fillRef idx="3">
+            <a:schemeClr val="accent1"/>
+          </a:fillRef>
+          <a:effectRef idx="2">
+            <a:schemeClr val="accent1"/>
+          </a:effectRef>
+          <a:fontRef idx="minor">
+            <a:schemeClr val="lt1"/>
+          </a:fontRef>
+        </p:style>
+        <p:txBody>
+          <a:bodyPr rtlCol="0" anchor="ctr"/>
+          <a:lstStyle/>
+          <a:p>
+            <a:pPr algn="l"/>
+            <a:r>
+              <a:rPr sz="900" b="0">
+                <a:solidFill>
+                  <a:srgbClr val="555555"/>
+                </a:solidFill>
+              </a:rPr>
+              <a:t>calmmm demo package / 6</a:t>
+            </a:r>
+          </a:p>
+        </p:txBody>
+      </p:sp>
+      <p:sp>
+        <p:nvSpPr>
+          <p:cNvPr id="7" name="Rectangle 6"/>
+          <p:cNvSpPr/>
+          <p:nvPr/>
+        </p:nvSpPr>
+        <p:spPr>
+          <a:xfrm>
+            <a:off x="762000" y="2857500"/>
             <a:ext cx="76200" cy="76200"/>
           </a:xfrm>
-          <a:prstGeom xmlns:a="http://schemas.openxmlformats.org/drawingml/2006/main" prst="rect">
-            <a:avLst/>
-          </a:prstGeom>
-          <a:solidFill xmlns:a="http://schemas.openxmlformats.org/drawingml/2006/main">
+          <a:prstGeom prst="rect">
+            <a:avLst/>
+          </a:prstGeom>
+          <a:solidFill>
             <a:srgbClr val="FF6B35"/>
           </a:solidFill>
-          <a:ln xmlns:a="http://schemas.openxmlformats.org/drawingml/2006/main" w="0">
-            <a:noFill/>
-            <a:prstDash val="solid"/>
-          </a:ln>
-        </p:spPr>
-      </p:sp>
-      <p:sp>
-        <p:nvSpPr>
-          <p:cNvPr id="9" name="">
-            <a:extLst xmlns:a="http://schemas.openxmlformats.org/drawingml/2006/main">
-              <a:ext uri="{FF2B5EF4-FFF2-40B4-BE49-F238E27FC236}">
-                <a16:creationId xmlns:a16="http://schemas.microsoft.com/office/drawing/2014/main" id="{356FCD17-DC2E-4A5D-A41A-F3806FE6C1C1}"/>
-              </a:ext>
-            </a:extLst>
-          </p:cNvPr>
-          <p:cNvSpPr>
-            <a:spLocks xmlns:a="http://schemas.openxmlformats.org/drawingml/2006/main" noGrp="1"/>
-          </p:cNvSpPr>
-          <p:nvPr/>
-        </p:nvSpPr>
-        <p:spPr>
-          <a:xfrm xmlns:a="http://schemas.openxmlformats.org/drawingml/2006/main">
-            <a:off x="6400800" y="3143250"/>
-            <a:ext cx="4743450" cy="428625"/>
-          </a:xfrm>
-          <a:prstGeom xmlns:a="http://schemas.openxmlformats.org/drawingml/2006/main" prst="rect">
-            <a:avLst/>
-          </a:prstGeom>
-          <a:noFill xmlns:a="http://schemas.openxmlformats.org/drawingml/2006/main"/>
-          <a:ln xmlns:a="http://schemas.openxmlformats.org/drawingml/2006/main" w="0">
-            <a:noFill/>
-            <a:prstDash val="solid"/>
-          </a:ln>
-        </p:spPr>
-        <p:txBody>
-          <a:bodyPr xmlns:a="http://schemas.openxmlformats.org/drawingml/2006/main"/>
-          <a:lstStyle xmlns:a="http://schemas.openxmlformats.org/drawingml/2006/main"/>
-          <a:p xmlns:a="http://schemas.openxmlformats.org/drawingml/2006/main">
-            <a:pPr>
-              <a:defRPr sz="1350">
-                <a:solidFill>
-                  <a:srgbClr val="000000"/>
-                </a:solidFill>
-              </a:defRPr>
-            </a:pPr>
-            <a:r>
-              <a:rPr sz="1350">
-                <a:solidFill>
-                  <a:srgbClr val="000000"/>
-                </a:solidFill>
-              </a:rPr>
-              <a:t>channel_contributions(fit): additive decomposition for reporting</a:t>
-            </a:r>
-          </a:p>
-        </p:txBody>
-      </p:sp>
-      <p:sp>
-        <p:nvSpPr>
-          <p:cNvPr id="10" name="">
-            <a:extLst xmlns:a="http://schemas.openxmlformats.org/drawingml/2006/main">
-              <a:ext uri="{FF2B5EF4-FFF2-40B4-BE49-F238E27FC236}">
-                <a16:creationId xmlns:a16="http://schemas.microsoft.com/office/drawing/2014/main" id="{4657AEFD-729B-42B2-A5DC-FA4FA620DDE4}"/>
-              </a:ext>
-            </a:extLst>
-          </p:cNvPr>
-          <p:cNvSpPr>
-            <a:spLocks xmlns:a="http://schemas.openxmlformats.org/drawingml/2006/main" noGrp="1"/>
-          </p:cNvSpPr>
-          <p:nvPr/>
-        </p:nvSpPr>
-        <p:spPr>
-          <a:xfrm xmlns:a="http://schemas.openxmlformats.org/drawingml/2006/main">
-            <a:off x="6191250" y="3648075"/>
+          <a:ln>
+            <a:noFill/>
+          </a:ln>
+        </p:spPr>
+        <p:style>
+          <a:lnRef idx="1">
+            <a:schemeClr val="accent1"/>
+          </a:lnRef>
+          <a:fillRef idx="3">
+            <a:schemeClr val="accent1"/>
+          </a:fillRef>
+          <a:effectRef idx="2">
+            <a:schemeClr val="accent1"/>
+          </a:effectRef>
+          <a:fontRef idx="minor">
+            <a:schemeClr val="lt1"/>
+          </a:fontRef>
+        </p:style>
+        <p:txBody>
+          <a:bodyPr rtlCol="0" anchor="ctr"/>
+          <a:lstStyle/>
+          <a:p>
+            <a:pPr algn="l"/>
+          </a:p>
+        </p:txBody>
+      </p:sp>
+      <p:sp>
+        <p:nvSpPr>
+          <p:cNvPr id="8" name="Rectangle 7"/>
+          <p:cNvSpPr/>
+          <p:nvPr/>
+        </p:nvSpPr>
+        <p:spPr>
+          <a:xfrm>
+            <a:off x="971550" y="2781300"/>
+            <a:ext cx="9791700" cy="533400"/>
+          </a:xfrm>
+          <a:prstGeom prst="rect">
+            <a:avLst/>
+          </a:prstGeom>
+          <a:noFill/>
+          <a:ln>
+            <a:noFill/>
+          </a:ln>
+        </p:spPr>
+        <p:style>
+          <a:lnRef idx="1">
+            <a:schemeClr val="accent1"/>
+          </a:lnRef>
+          <a:fillRef idx="3">
+            <a:schemeClr val="accent1"/>
+          </a:fillRef>
+          <a:effectRef idx="2">
+            <a:schemeClr val="accent1"/>
+          </a:effectRef>
+          <a:fontRef idx="minor">
+            <a:schemeClr val="lt1"/>
+          </a:fontRef>
+        </p:style>
+        <p:txBody>
+          <a:bodyPr rtlCol="0" anchor="ctr"/>
+          <a:lstStyle/>
+          <a:p>
+            <a:pPr algn="l"/>
+            <a:r>
+              <a:rPr sz="1350" b="0">
+                <a:solidFill>
+                  <a:srgbClr val="000000"/>
+                </a:solidFill>
+              </a:rPr>
+              <a:t>1. Fit lift tests on their real experiment dates. The default demo fit only used 16 of the panel's 78 weeks and spliced each test's lift onto an unrelated 4-week window inside that subset.</a:t>
+            </a:r>
+          </a:p>
+        </p:txBody>
+      </p:sp>
+      <p:sp>
+        <p:nvSpPr>
+          <p:cNvPr id="9" name="Rectangle 8"/>
+          <p:cNvSpPr/>
+          <p:nvPr/>
+        </p:nvSpPr>
+        <p:spPr>
+          <a:xfrm>
+            <a:off x="762000" y="3543300"/>
             <a:ext cx="76200" cy="76200"/>
           </a:xfrm>
-          <a:prstGeom xmlns:a="http://schemas.openxmlformats.org/drawingml/2006/main" prst="rect">
-            <a:avLst/>
-          </a:prstGeom>
-          <a:solidFill xmlns:a="http://schemas.openxmlformats.org/drawingml/2006/main">
+          <a:prstGeom prst="rect">
+            <a:avLst/>
+          </a:prstGeom>
+          <a:solidFill>
             <a:srgbClr val="000000"/>
           </a:solidFill>
-          <a:ln xmlns:a="http://schemas.openxmlformats.org/drawingml/2006/main" w="0">
-            <a:noFill/>
-            <a:prstDash val="solid"/>
-          </a:ln>
-        </p:spPr>
-      </p:sp>
-      <p:sp>
-        <p:nvSpPr>
-          <p:cNvPr id="11" name="">
-            <a:extLst xmlns:a="http://schemas.openxmlformats.org/drawingml/2006/main">
-              <a:ext uri="{FF2B5EF4-FFF2-40B4-BE49-F238E27FC236}">
-                <a16:creationId xmlns:a16="http://schemas.microsoft.com/office/drawing/2014/main" id="{31ABDDE3-373E-4F2A-ACB6-8D989C2044A4}"/>
-              </a:ext>
-            </a:extLst>
-          </p:cNvPr>
-          <p:cNvSpPr>
-            <a:spLocks xmlns:a="http://schemas.openxmlformats.org/drawingml/2006/main" noGrp="1"/>
-          </p:cNvSpPr>
-          <p:nvPr/>
-        </p:nvSpPr>
-        <p:spPr>
-          <a:xfrm xmlns:a="http://schemas.openxmlformats.org/drawingml/2006/main">
-            <a:off x="6400800" y="3571875"/>
-            <a:ext cx="4743450" cy="428625"/>
-          </a:xfrm>
-          <a:prstGeom xmlns:a="http://schemas.openxmlformats.org/drawingml/2006/main" prst="rect">
-            <a:avLst/>
-          </a:prstGeom>
-          <a:noFill xmlns:a="http://schemas.openxmlformats.org/drawingml/2006/main"/>
-          <a:ln xmlns:a="http://schemas.openxmlformats.org/drawingml/2006/main" w="0">
-            <a:noFill/>
-            <a:prstDash val="solid"/>
-          </a:ln>
-        </p:spPr>
-        <p:txBody>
-          <a:bodyPr xmlns:a="http://schemas.openxmlformats.org/drawingml/2006/main"/>
-          <a:lstStyle xmlns:a="http://schemas.openxmlformats.org/drawingml/2006/main"/>
-          <a:p xmlns:a="http://schemas.openxmlformats.org/drawingml/2006/main">
-            <a:pPr>
-              <a:defRPr sz="1350">
-                <a:solidFill>
-                  <a:srgbClr val="000000"/>
-                </a:solidFill>
-              </a:defRPr>
-            </a:pPr>
-            <a:r>
-              <a:rPr sz="1350">
-                <a:solidFill>
-                  <a:srgbClr val="000000"/>
-                </a:solidFill>
-              </a:rPr>
-              <a:t>marginal_contributions(fit): counterfactual lift for economics</a:t>
-            </a:r>
-          </a:p>
-        </p:txBody>
-      </p:sp>
-      <p:sp>
-        <p:nvSpPr>
-          <p:cNvPr id="12" name="">
-            <a:extLst xmlns:a="http://schemas.openxmlformats.org/drawingml/2006/main">
-              <a:ext uri="{FF2B5EF4-FFF2-40B4-BE49-F238E27FC236}">
-                <a16:creationId xmlns:a16="http://schemas.microsoft.com/office/drawing/2014/main" id="{9570CCA9-4161-45E5-B3DF-C0E37BA8CF76}"/>
-              </a:ext>
-            </a:extLst>
-          </p:cNvPr>
-          <p:cNvSpPr>
-            <a:spLocks xmlns:a="http://schemas.openxmlformats.org/drawingml/2006/main" noGrp="1"/>
-          </p:cNvSpPr>
-          <p:nvPr/>
-        </p:nvSpPr>
-        <p:spPr>
-          <a:xfrm xmlns:a="http://schemas.openxmlformats.org/drawingml/2006/main">
-            <a:off x="6191250" y="4076700"/>
+          <a:ln>
+            <a:noFill/>
+          </a:ln>
+        </p:spPr>
+        <p:style>
+          <a:lnRef idx="1">
+            <a:schemeClr val="accent1"/>
+          </a:lnRef>
+          <a:fillRef idx="3">
+            <a:schemeClr val="accent1"/>
+          </a:fillRef>
+          <a:effectRef idx="2">
+            <a:schemeClr val="accent1"/>
+          </a:effectRef>
+          <a:fontRef idx="minor">
+            <a:schemeClr val="lt1"/>
+          </a:fontRef>
+        </p:style>
+        <p:txBody>
+          <a:bodyPr rtlCol="0" anchor="ctr"/>
+          <a:lstStyle/>
+          <a:p>
+            <a:pPr algn="l"/>
+          </a:p>
+        </p:txBody>
+      </p:sp>
+      <p:sp>
+        <p:nvSpPr>
+          <p:cNvPr id="10" name="Rectangle 9"/>
+          <p:cNvSpPr/>
+          <p:nvPr/>
+        </p:nvSpPr>
+        <p:spPr>
+          <a:xfrm>
+            <a:off x="971550" y="3467100"/>
+            <a:ext cx="9791700" cy="533400"/>
+          </a:xfrm>
+          <a:prstGeom prst="rect">
+            <a:avLst/>
+          </a:prstGeom>
+          <a:noFill/>
+          <a:ln>
+            <a:noFill/>
+          </a:ln>
+        </p:spPr>
+        <p:style>
+          <a:lnRef idx="1">
+            <a:schemeClr val="accent1"/>
+          </a:lnRef>
+          <a:fillRef idx="3">
+            <a:schemeClr val="accent1"/>
+          </a:fillRef>
+          <a:effectRef idx="2">
+            <a:schemeClr val="accent1"/>
+          </a:effectRef>
+          <a:fontRef idx="minor">
+            <a:schemeClr val="lt1"/>
+          </a:fontRef>
+        </p:style>
+        <p:txBody>
+          <a:bodyPr rtlCol="0" anchor="ctr"/>
+          <a:lstStyle/>
+          <a:p>
+            <a:pPr algn="l"/>
+            <a:r>
+              <a:rPr sz="1350" b="0">
+                <a:solidFill>
+                  <a:srgbClr val="000000"/>
+                </a:solidFill>
+              </a:rPr>
+              <a:t>2. Size standard errors to genuine uncertainty. search_geo_holdout_q2's se=260 was far tighter than the gap between its observed and model-implied lift, forcing MAP to distort the search response curve (r2_applications: 0.48 -&gt; 0.96).</a:t>
+            </a:r>
+          </a:p>
+        </p:txBody>
+      </p:sp>
+      <p:sp>
+        <p:nvSpPr>
+          <p:cNvPr id="11" name="Rectangle 10"/>
+          <p:cNvSpPr/>
+          <p:nvPr/>
+        </p:nvSpPr>
+        <p:spPr>
+          <a:xfrm>
+            <a:off x="762000" y="4229100"/>
             <a:ext cx="76200" cy="76200"/>
           </a:xfrm>
-          <a:prstGeom xmlns:a="http://schemas.openxmlformats.org/drawingml/2006/main" prst="rect">
-            <a:avLst/>
-          </a:prstGeom>
-          <a:solidFill xmlns:a="http://schemas.openxmlformats.org/drawingml/2006/main">
+          <a:prstGeom prst="rect">
+            <a:avLst/>
+          </a:prstGeom>
+          <a:solidFill>
             <a:srgbClr val="000000"/>
           </a:solidFill>
-          <a:ln xmlns:a="http://schemas.openxmlformats.org/drawingml/2006/main" w="0">
-            <a:noFill/>
-            <a:prstDash val="solid"/>
-          </a:ln>
-        </p:spPr>
-      </p:sp>
-      <p:sp>
-        <p:nvSpPr>
-          <p:cNvPr id="13" name="">
-            <a:extLst xmlns:a="http://schemas.openxmlformats.org/drawingml/2006/main">
-              <a:ext uri="{FF2B5EF4-FFF2-40B4-BE49-F238E27FC236}">
-                <a16:creationId xmlns:a16="http://schemas.microsoft.com/office/drawing/2014/main" id="{E2651854-3D73-454A-BECB-E7FE0E6CA5E0}"/>
-              </a:ext>
-            </a:extLst>
-          </p:cNvPr>
-          <p:cNvSpPr>
-            <a:spLocks xmlns:a="http://schemas.openxmlformats.org/drawingml/2006/main" noGrp="1"/>
-          </p:cNvSpPr>
-          <p:nvPr/>
-        </p:nvSpPr>
-        <p:spPr>
-          <a:xfrm xmlns:a="http://schemas.openxmlformats.org/drawingml/2006/main">
-            <a:off x="6400800" y="4000500"/>
-            <a:ext cx="4743450" cy="428625"/>
-          </a:xfrm>
-          <a:prstGeom xmlns:a="http://schemas.openxmlformats.org/drawingml/2006/main" prst="rect">
-            <a:avLst/>
-          </a:prstGeom>
-          <a:noFill xmlns:a="http://schemas.openxmlformats.org/drawingml/2006/main"/>
-          <a:ln xmlns:a="http://schemas.openxmlformats.org/drawingml/2006/main" w="0">
-            <a:noFill/>
-            <a:prstDash val="solid"/>
-          </a:ln>
-        </p:spPr>
-        <p:txBody>
-          <a:bodyPr xmlns:a="http://schemas.openxmlformats.org/drawingml/2006/main"/>
-          <a:lstStyle xmlns:a="http://schemas.openxmlformats.org/drawingml/2006/main"/>
-          <a:p xmlns:a="http://schemas.openxmlformats.org/drawingml/2006/main">
-            <a:pPr>
-              <a:defRPr sz="1350">
-                <a:solidFill>
-                  <a:srgbClr val="000000"/>
-                </a:solidFill>
-              </a:defRPr>
-            </a:pPr>
-            <a:r>
-              <a:rPr sz="1350">
-                <a:solidFill>
-                  <a:srgbClr val="000000"/>
-                </a:solidFill>
-              </a:rPr>
-              <a:t>compute_roi(fit): incremental outcome divided by spend</a:t>
-            </a:r>
-          </a:p>
-        </p:txBody>
-      </p:sp>
-      <p:sp>
-        <p:nvSpPr>
-          <p:cNvPr id="14" name="">
-            <a:extLst xmlns:a="http://schemas.openxmlformats.org/drawingml/2006/main">
-              <a:ext uri="{FF2B5EF4-FFF2-40B4-BE49-F238E27FC236}">
-                <a16:creationId xmlns:a16="http://schemas.microsoft.com/office/drawing/2014/main" id="{E273F19C-13A9-4932-974B-25A82C1B6FE2}"/>
-              </a:ext>
-            </a:extLst>
-          </p:cNvPr>
-          <p:cNvSpPr>
-            <a:spLocks xmlns:a="http://schemas.openxmlformats.org/drawingml/2006/main" noGrp="1"/>
-          </p:cNvSpPr>
-          <p:nvPr/>
-        </p:nvSpPr>
-        <p:spPr>
-          <a:xfrm xmlns:a="http://schemas.openxmlformats.org/drawingml/2006/main">
-            <a:off x="6191250" y="4505325"/>
-            <a:ext cx="76200" cy="76200"/>
-          </a:xfrm>
-          <a:prstGeom xmlns:a="http://schemas.openxmlformats.org/drawingml/2006/main" prst="rect">
-            <a:avLst/>
-          </a:prstGeom>
-          <a:solidFill xmlns:a="http://schemas.openxmlformats.org/drawingml/2006/main">
-            <a:srgbClr val="000000"/>
+          <a:ln>
+            <a:noFill/>
+          </a:ln>
+        </p:spPr>
+        <p:style>
+          <a:lnRef idx="1">
+            <a:schemeClr val="accent1"/>
+          </a:lnRef>
+          <a:fillRef idx="3">
+            <a:schemeClr val="accent1"/>
+          </a:fillRef>
+          <a:effectRef idx="2">
+            <a:schemeClr val="accent1"/>
+          </a:effectRef>
+          <a:fontRef idx="minor">
+            <a:schemeClr val="lt1"/>
+          </a:fontRef>
+        </p:style>
+        <p:txBody>
+          <a:bodyPr rtlCol="0" anchor="ctr"/>
+          <a:lstStyle/>
+          <a:p>
+            <a:pPr algn="l"/>
+          </a:p>
+        </p:txBody>
+      </p:sp>
+      <p:sp>
+        <p:nvSpPr>
+          <p:cNvPr id="12" name="Rectangle 11"/>
+          <p:cNvSpPr/>
+          <p:nvPr/>
+        </p:nvSpPr>
+        <p:spPr>
+          <a:xfrm>
+            <a:off x="971550" y="4152900"/>
+            <a:ext cx="9791700" cy="533400"/>
+          </a:xfrm>
+          <a:prstGeom prst="rect">
+            <a:avLst/>
+          </a:prstGeom>
+          <a:noFill/>
+          <a:ln>
+            <a:noFill/>
+          </a:ln>
+        </p:spPr>
+        <p:style>
+          <a:lnRef idx="1">
+            <a:schemeClr val="accent1"/>
+          </a:lnRef>
+          <a:fillRef idx="3">
+            <a:schemeClr val="accent1"/>
+          </a:fillRef>
+          <a:effectRef idx="2">
+            <a:schemeClr val="accent1"/>
+          </a:effectRef>
+          <a:fontRef idx="minor">
+            <a:schemeClr val="lt1"/>
+          </a:fontRef>
+        </p:style>
+        <p:txBody>
+          <a:bodyPr rtlCol="0" anchor="ctr"/>
+          <a:lstStyle/>
+          <a:p>
+            <a:pPr algn="l"/>
+            <a:r>
+              <a:rPr sz="1350" b="0">
+                <a:solidFill>
+                  <a:srgbClr val="000000"/>
+                </a:solidFill>
+              </a:rPr>
+              <a:t>3. Wire calibration_likelihood per test. from_dataframe() silently ignored the CSV's per-row column, so direct_mail_match_q3's student_t setting was never actually applied until fixed (z: -3.75 -&gt; -3.02).</a:t>
+            </a:r>
+          </a:p>
+        </p:txBody>
+      </p:sp>
+      <p:sp>
+        <p:nvSpPr>
+          <p:cNvPr id="13" name="Rectangle 12"/>
+          <p:cNvSpPr/>
+          <p:nvPr/>
+        </p:nvSpPr>
+        <p:spPr>
+          <a:xfrm>
+            <a:off x="723900" y="4991100"/>
+            <a:ext cx="9791700" cy="838200"/>
+          </a:xfrm>
+          <a:prstGeom prst="rect">
+            <a:avLst/>
+          </a:prstGeom>
+          <a:solidFill>
+            <a:srgbClr val="FFE7DD"/>
           </a:solidFill>
-          <a:ln xmlns:a="http://schemas.openxmlformats.org/drawingml/2006/main" w="0">
-            <a:noFill/>
-            <a:prstDash val="solid"/>
-          </a:ln>
-        </p:spPr>
-      </p:sp>
-      <p:sp>
-        <p:nvSpPr>
-          <p:cNvPr id="15" name="">
-            <a:extLst xmlns:a="http://schemas.openxmlformats.org/drawingml/2006/main">
-              <a:ext uri="{FF2B5EF4-FFF2-40B4-BE49-F238E27FC236}">
-                <a16:creationId xmlns:a16="http://schemas.microsoft.com/office/drawing/2014/main" id="{5D071911-3567-4736-901C-3F7CAFAA9E45}"/>
-              </a:ext>
-            </a:extLst>
-          </p:cNvPr>
-          <p:cNvSpPr>
-            <a:spLocks xmlns:a="http://schemas.openxmlformats.org/drawingml/2006/main" noGrp="1"/>
-          </p:cNvSpPr>
-          <p:nvPr/>
-        </p:nvSpPr>
-        <p:spPr>
-          <a:xfrm xmlns:a="http://schemas.openxmlformats.org/drawingml/2006/main">
-            <a:off x="6400800" y="4429125"/>
-            <a:ext cx="4743450" cy="428625"/>
-          </a:xfrm>
-          <a:prstGeom xmlns:a="http://schemas.openxmlformats.org/drawingml/2006/main" prst="rect">
-            <a:avLst/>
-          </a:prstGeom>
-          <a:noFill xmlns:a="http://schemas.openxmlformats.org/drawingml/2006/main"/>
-          <a:ln xmlns:a="http://schemas.openxmlformats.org/drawingml/2006/main" w="0">
-            <a:noFill/>
-            <a:prstDash val="solid"/>
-          </a:ln>
-        </p:spPr>
-        <p:txBody>
-          <a:bodyPr xmlns:a="http://schemas.openxmlformats.org/drawingml/2006/main"/>
-          <a:lstStyle xmlns:a="http://schemas.openxmlformats.org/drawingml/2006/main"/>
-          <a:p xmlns:a="http://schemas.openxmlformats.org/drawingml/2006/main">
-            <a:pPr>
-              <a:defRPr sz="1350">
-                <a:solidFill>
-                  <a:srgbClr val="000000"/>
-                </a:solidFill>
-              </a:defRPr>
-            </a:pPr>
-            <a:r>
-              <a:rPr sz="1350">
-                <a:solidFill>
-                  <a:srgbClr val="000000"/>
-                </a:solidFill>
-              </a:rPr>
-              <a:t>saturation_curve(fit, channel): diminishing returns view</a:t>
-            </a:r>
-          </a:p>
-        </p:txBody>
-      </p:sp>
-      <p:sp>
-        <p:nvSpPr>
-          <p:cNvPr id="16" name="">
-            <a:extLst xmlns:a="http://schemas.openxmlformats.org/drawingml/2006/main">
-              <a:ext uri="{FF2B5EF4-FFF2-40B4-BE49-F238E27FC236}">
-                <a16:creationId xmlns:a16="http://schemas.microsoft.com/office/drawing/2014/main" id="{1360F165-6689-4E94-874D-F8C2FE76C758}"/>
-              </a:ext>
-            </a:extLst>
-          </p:cNvPr>
-          <p:cNvSpPr>
-            <a:spLocks xmlns:a="http://schemas.openxmlformats.org/drawingml/2006/main" noGrp="1"/>
-          </p:cNvSpPr>
-          <p:nvPr/>
-        </p:nvSpPr>
-        <p:spPr>
-          <a:xfrm xmlns:a="http://schemas.openxmlformats.org/drawingml/2006/main">
-            <a:off x="10096500" y="6419850"/>
-            <a:ext cx="1695450" cy="228600"/>
-          </a:xfrm>
-          <a:prstGeom xmlns:a="http://schemas.openxmlformats.org/drawingml/2006/main" prst="rect">
-            <a:avLst/>
-          </a:prstGeom>
-          <a:noFill xmlns:a="http://schemas.openxmlformats.org/drawingml/2006/main"/>
-          <a:ln xmlns:a="http://schemas.openxmlformats.org/drawingml/2006/main" w="0">
-            <a:noFill/>
-            <a:prstDash val="solid"/>
-          </a:ln>
-        </p:spPr>
-        <p:txBody>
-          <a:bodyPr xmlns:a="http://schemas.openxmlformats.org/drawingml/2006/main"/>
-          <a:lstStyle xmlns:a="http://schemas.openxmlformats.org/drawingml/2006/main"/>
-          <a:p xmlns:a="http://schemas.openxmlformats.org/drawingml/2006/main">
-            <a:pPr algn="r">
-              <a:defRPr sz="900">
-                <a:solidFill>
-                  <a:srgbClr val="555555"/>
-                </a:solidFill>
-              </a:defRPr>
-            </a:pPr>
-            <a:r>
-              <a:rPr sz="900">
-                <a:solidFill>
-                  <a:srgbClr val="555555"/>
-                </a:solidFill>
-              </a:rPr>
-              <a:t>calmmm demo package / 6</a:t>
+          <a:ln>
+            <a:noFill/>
+          </a:ln>
+        </p:spPr>
+        <p:style>
+          <a:lnRef idx="1">
+            <a:schemeClr val="accent1"/>
+          </a:lnRef>
+          <a:fillRef idx="3">
+            <a:schemeClr val="accent1"/>
+          </a:fillRef>
+          <a:effectRef idx="2">
+            <a:schemeClr val="accent1"/>
+          </a:effectRef>
+          <a:fontRef idx="minor">
+            <a:schemeClr val="lt1"/>
+          </a:fontRef>
+        </p:style>
+        <p:txBody>
+          <a:bodyPr rtlCol="0" anchor="ctr" wrap="square"/>
+          <a:lstStyle/>
+          <a:p>
+            <a:pPr algn="l"/>
+            <a:r>
+              <a:rPr sz="1350" b="1">
+                <a:solidFill>
+                  <a:srgbClr val="000000"/>
+                </a:solidFill>
+              </a:rPr>
+              <a:t>Still open: direct_mail_match_q3 z = -3.02</a:t>
+            </a:r>
+          </a:p>
+          <a:p>
+            <a:pPr algn="l"/>
+            <a:r>
+              <a:rPr sz="1100">
+                <a:solidFill>
+                  <a:srgbClr val="555555"/>
+                </a:solidFill>
+              </a:rPr>
+              <a:t>The unconstrained model credits more funded_revenue to search than the experiment found for direct_mail -- a genuine attribution question, not a plumbing bug. Not forced to zero; flagged for follow-up.</a:t>
             </a:r>
           </a:p>
         </p:txBody>
       </p:sp>
     </p:spTree>
-    <p:extLst>
-      <p:ext uri="{BB962C8B-B14F-4D97-AF65-F5344CB8AC3E}">
-        <p14:creationId xmlns:p14="http://schemas.microsoft.com/office/powerpoint/2010/main" val="1583208939"/>
-      </p:ext>
-    </p:extLst>
   </p:cSld>
+  <p:clrMapOvr>
+    <a:masterClrMapping/>
+  </p:clrMapOvr>
 </p:sld>
 </file>
 
@@ -8187,7 +8545,7 @@
           <p:cNvPr id="1" name="">
             <a:extLst xmlns:a="http://schemas.openxmlformats.org/drawingml/2006/main">
               <a:ext uri="{FF2B5EF4-FFF2-40B4-BE49-F238E27FC236}">
-                <a16:creationId xmlns:a16="http://schemas.microsoft.com/office/drawing/2014/main" id="{5EC4BFE9-F746-4ACC-9D1A-278C52725355}"/>
+                <a16:creationId xmlns:a16="http://schemas.microsoft.com/office/drawing/2014/main" id="{A18333A7-5A76-49B6-98DE-D2EFA81D6EBA}"/>
               </a:ext>
             </a:extLst>
           </p:cNvPr>
@@ -8227,7 +8585,7 @@
                   <a:srgbClr val="555555"/>
                 </a:solidFill>
               </a:rPr>
-              <a:t>RUNBOOK</a:t>
+              <a:t>ATTRIBUTION</a:t>
             </a:r>
           </a:p>
         </p:txBody>
@@ -8237,7 +8595,7 @@
           <p:cNvPr id="2" name="">
             <a:extLst xmlns:a="http://schemas.openxmlformats.org/drawingml/2006/main">
               <a:ext uri="{FF2B5EF4-FFF2-40B4-BE49-F238E27FC236}">
-                <a16:creationId xmlns:a16="http://schemas.microsoft.com/office/drawing/2014/main" id="{D76EC6F5-DBF0-4956-BFF0-3EDA0B82E384}"/>
+                <a16:creationId xmlns:a16="http://schemas.microsoft.com/office/drawing/2014/main" id="{A38F75DF-1F3C-477C-99BE-FF359B1B1788}"/>
               </a:ext>
             </a:extLst>
           </p:cNvPr>
@@ -8277,7 +8635,7 @@
                   <a:srgbClr val="000000"/>
                 </a:solidFill>
               </a:rPr>
-              <a:t>Swap synthetic inputs for production data</a:t>
+              <a:t>Outputs translate fit parameters into business decisions</a:t>
             </a:r>
           </a:p>
         </p:txBody>
@@ -8287,7 +8645,7 @@
           <p:cNvPr id="3" name="">
             <a:extLst xmlns:a="http://schemas.openxmlformats.org/drawingml/2006/main">
               <a:ext uri="{FF2B5EF4-FFF2-40B4-BE49-F238E27FC236}">
-                <a16:creationId xmlns:a16="http://schemas.microsoft.com/office/drawing/2014/main" id="{D006137E-58A5-4469-9A71-B8E7DB0D0F04}"/>
+                <a16:creationId xmlns:a16="http://schemas.microsoft.com/office/drawing/2014/main" id="{DB97D747-1CE9-432E-9730-D50DDF8CDA5D}"/>
               </a:ext>
             </a:extLst>
           </p:cNvPr>
@@ -8327,7 +8685,7 @@
                   <a:srgbClr val="555555"/>
                 </a:solidFill>
               </a:rPr>
-              <a:t>The same package path works once your weekly panel and experiment metadata conform to the schema.</a:t>
+              <a:t>The demo separates additive reporting contribution from marginal economic contribution.</a:t>
             </a:r>
           </a:p>
         </p:txBody>
@@ -8337,7 +8695,7 @@
           <p:cNvPr id="4" name="">
             <a:extLst xmlns:a="http://schemas.openxmlformats.org/drawingml/2006/main">
               <a:ext uri="{FF2B5EF4-FFF2-40B4-BE49-F238E27FC236}">
-                <a16:creationId xmlns:a16="http://schemas.microsoft.com/office/drawing/2014/main" id="{E0C2D191-CB1F-4563-B50A-072FCF04919D}"/>
+                <a16:creationId xmlns:a16="http://schemas.microsoft.com/office/drawing/2014/main" id="{F88A267E-BA84-46A6-912E-7D71B31AE352}"/>
               </a:ext>
             </a:extLst>
           </p:cNvPr>
@@ -8364,24 +8722,144 @@
             <a:prstDash val="solid"/>
           </a:ln>
         </p:spPr>
-      </p:sp>
-      <p:sp>
-        <p:nvSpPr>
-          <p:cNvPr id="5" name="">
-            <a:extLst xmlns:a="http://schemas.openxmlformats.org/drawingml/2006/main">
-              <a:ext uri="{FF2B5EF4-FFF2-40B4-BE49-F238E27FC236}">
-                <a16:creationId xmlns:a16="http://schemas.microsoft.com/office/drawing/2014/main" id="{248641E5-56C9-43DC-BA6A-7E28B1E6753D}"/>
-              </a:ext>
-            </a:extLst>
-          </p:cNvPr>
-          <p:cNvSpPr>
-            <a:spLocks xmlns:a="http://schemas.openxmlformats.org/drawingml/2006/main" noGrp="1"/>
-          </p:cNvSpPr>
-          <p:nvPr/>
-        </p:nvSpPr>
-        <p:spPr>
-          <a:xfrm xmlns:a="http://schemas.openxmlformats.org/drawingml/2006/main">
-            <a:off x="762000" y="2857500"/>
+        <p:txBody xmlns:a="http://schemas.openxmlformats.org/drawingml/2006/main">
+          <a:bodyPr/>
+          <a:p/>
+        </p:txBody>
+      </p:sp>
+      <p:graphicFrame>
+        <p:nvGraphicFramePr>
+          <p:cNvPr id="21" name="Chart"/>
+          <p:cNvGraphicFramePr/>
+          <p:nvPr/>
+        </p:nvGraphicFramePr>
+        <p:xfrm>
+          <a:off xmlns:a="http://schemas.openxmlformats.org/drawingml/2006/main" x="495300" y="2800350"/>
+          <a:ext xmlns:a="http://schemas.openxmlformats.org/drawingml/2006/main" cx="4857750" cy="2762250"/>
+        </p:xfrm>
+        <a:graphic xmlns:a="http://schemas.openxmlformats.org/drawingml/2006/main">
+          <a:graphicData uri="http://schemas.openxmlformats.org/drawingml/2006/chart">
+            <c:chart xmlns:r="http://schemas.openxmlformats.org/officeDocument/2006/relationships" xmlns:c="http://schemas.openxmlformats.org/drawingml/2006/chart" r:id="R44f77f93d0a543de"/>
+          </a:graphicData>
+        </a:graphic>
+      </p:graphicFrame>
+      <p:sp>
+        <p:nvSpPr>
+          <p:cNvPr id="6" name="">
+            <a:extLst xmlns:a="http://schemas.openxmlformats.org/drawingml/2006/main">
+              <a:ext uri="{FF2B5EF4-FFF2-40B4-BE49-F238E27FC236}">
+                <a16:creationId xmlns:a16="http://schemas.microsoft.com/office/drawing/2014/main" id="{5514076E-118F-47DC-979E-EEE483645761}"/>
+              </a:ext>
+            </a:extLst>
+          </p:cNvPr>
+          <p:cNvSpPr>
+            <a:spLocks xmlns:a="http://schemas.openxmlformats.org/drawingml/2006/main" noGrp="1"/>
+          </p:cNvSpPr>
+          <p:nvPr/>
+        </p:nvSpPr>
+        <p:spPr>
+          <a:xfrm xmlns:a="http://schemas.openxmlformats.org/drawingml/2006/main">
+            <a:off x="495300" y="2419350"/>
+            <a:ext cx="3714750" cy="285750"/>
+          </a:xfrm>
+          <a:prstGeom xmlns:a="http://schemas.openxmlformats.org/drawingml/2006/main" prst="rect">
+            <a:avLst/>
+          </a:prstGeom>
+          <a:noFill xmlns:a="http://schemas.openxmlformats.org/drawingml/2006/main"/>
+          <a:ln xmlns:a="http://schemas.openxmlformats.org/drawingml/2006/main" w="0">
+            <a:noFill/>
+            <a:prstDash val="solid"/>
+          </a:ln>
+        </p:spPr>
+        <p:txBody>
+          <a:bodyPr xmlns:a="http://schemas.openxmlformats.org/drawingml/2006/main"/>
+          <a:lstStyle xmlns:a="http://schemas.openxmlformats.org/drawingml/2006/main"/>
+          <a:p xmlns:a="http://schemas.openxmlformats.org/drawingml/2006/main">
+            <a:pPr>
+              <a:defRPr sz="1650" b="1">
+                <a:solidFill>
+                  <a:srgbClr val="000000"/>
+                </a:solidFill>
+              </a:defRPr>
+            </a:pPr>
+            <a:r>
+              <a:rPr sz="1650" b="1">
+                <a:solidFill>
+                  <a:srgbClr val="000000"/>
+                </a:solidFill>
+              </a:rPr>
+              <a:t>ROI index by channel</a:t>
+            </a:r>
+          </a:p>
+        </p:txBody>
+      </p:sp>
+      <p:sp>
+        <p:nvSpPr>
+          <p:cNvPr id="7" name="">
+            <a:extLst xmlns:a="http://schemas.openxmlformats.org/drawingml/2006/main">
+              <a:ext uri="{FF2B5EF4-FFF2-40B4-BE49-F238E27FC236}">
+                <a16:creationId xmlns:a16="http://schemas.microsoft.com/office/drawing/2014/main" id="{88574D17-14DE-44BA-A249-3A4388825350}"/>
+              </a:ext>
+            </a:extLst>
+          </p:cNvPr>
+          <p:cNvSpPr>
+            <a:spLocks xmlns:a="http://schemas.openxmlformats.org/drawingml/2006/main" noGrp="1"/>
+          </p:cNvSpPr>
+          <p:nvPr/>
+        </p:nvSpPr>
+        <p:spPr>
+          <a:xfrm xmlns:a="http://schemas.openxmlformats.org/drawingml/2006/main">
+            <a:off x="6191250" y="2609850"/>
+            <a:ext cx="2857500" cy="304800"/>
+          </a:xfrm>
+          <a:prstGeom xmlns:a="http://schemas.openxmlformats.org/drawingml/2006/main" prst="rect">
+            <a:avLst/>
+          </a:prstGeom>
+          <a:noFill xmlns:a="http://schemas.openxmlformats.org/drawingml/2006/main"/>
+          <a:ln xmlns:a="http://schemas.openxmlformats.org/drawingml/2006/main" w="0">
+            <a:noFill/>
+            <a:prstDash val="solid"/>
+          </a:ln>
+        </p:spPr>
+        <p:txBody>
+          <a:bodyPr xmlns:a="http://schemas.openxmlformats.org/drawingml/2006/main"/>
+          <a:lstStyle xmlns:a="http://schemas.openxmlformats.org/drawingml/2006/main"/>
+          <a:p xmlns:a="http://schemas.openxmlformats.org/drawingml/2006/main">
+            <a:pPr>
+              <a:defRPr sz="1800" b="1">
+                <a:solidFill>
+                  <a:srgbClr val="000000"/>
+                </a:solidFill>
+              </a:defRPr>
+            </a:pPr>
+            <a:r>
+              <a:rPr sz="1800" b="1">
+                <a:solidFill>
+                  <a:srgbClr val="000000"/>
+                </a:solidFill>
+              </a:rPr>
+              <a:t>Decision outputs</a:t>
+            </a:r>
+          </a:p>
+        </p:txBody>
+      </p:sp>
+      <p:sp>
+        <p:nvSpPr>
+          <p:cNvPr id="8" name="">
+            <a:extLst xmlns:a="http://schemas.openxmlformats.org/drawingml/2006/main">
+              <a:ext uri="{FF2B5EF4-FFF2-40B4-BE49-F238E27FC236}">
+                <a16:creationId xmlns:a16="http://schemas.microsoft.com/office/drawing/2014/main" id="{2E49447E-6392-4F06-9D62-5E7653706A67}"/>
+              </a:ext>
+            </a:extLst>
+          </p:cNvPr>
+          <p:cNvSpPr>
+            <a:spLocks xmlns:a="http://schemas.openxmlformats.org/drawingml/2006/main" noGrp="1"/>
+          </p:cNvSpPr>
+          <p:nvPr/>
+        </p:nvSpPr>
+        <p:spPr>
+          <a:xfrm xmlns:a="http://schemas.openxmlformats.org/drawingml/2006/main">
+            <a:off x="6191250" y="3219450"/>
             <a:ext cx="76200" cy="76200"/>
           </a:xfrm>
           <a:prstGeom xmlns:a="http://schemas.openxmlformats.org/drawingml/2006/main" prst="rect">
@@ -8395,25 +8873,29 @@
             <a:prstDash val="solid"/>
           </a:ln>
         </p:spPr>
-      </p:sp>
-      <p:sp>
-        <p:nvSpPr>
-          <p:cNvPr id="6" name="">
-            <a:extLst xmlns:a="http://schemas.openxmlformats.org/drawingml/2006/main">
-              <a:ext uri="{FF2B5EF4-FFF2-40B4-BE49-F238E27FC236}">
-                <a16:creationId xmlns:a16="http://schemas.microsoft.com/office/drawing/2014/main" id="{D94D2B57-FAEA-4FE9-8F61-7F65A0EC7DA4}"/>
-              </a:ext>
-            </a:extLst>
-          </p:cNvPr>
-          <p:cNvSpPr>
-            <a:spLocks xmlns:a="http://schemas.openxmlformats.org/drawingml/2006/main" noGrp="1"/>
-          </p:cNvSpPr>
-          <p:nvPr/>
-        </p:nvSpPr>
-        <p:spPr>
-          <a:xfrm xmlns:a="http://schemas.openxmlformats.org/drawingml/2006/main">
-            <a:off x="971550" y="2781300"/>
-            <a:ext cx="9791700" cy="457200"/>
+        <p:txBody xmlns:a="http://schemas.openxmlformats.org/drawingml/2006/main">
+          <a:bodyPr/>
+          <a:p/>
+        </p:txBody>
+      </p:sp>
+      <p:sp>
+        <p:nvSpPr>
+          <p:cNvPr id="9" name="">
+            <a:extLst xmlns:a="http://schemas.openxmlformats.org/drawingml/2006/main">
+              <a:ext uri="{FF2B5EF4-FFF2-40B4-BE49-F238E27FC236}">
+                <a16:creationId xmlns:a16="http://schemas.microsoft.com/office/drawing/2014/main" id="{356FCD17-DC2E-4A5D-A41A-F3806FE6C1C1}"/>
+              </a:ext>
+            </a:extLst>
+          </p:cNvPr>
+          <p:cNvSpPr>
+            <a:spLocks xmlns:a="http://schemas.openxmlformats.org/drawingml/2006/main" noGrp="1"/>
+          </p:cNvSpPr>
+          <p:nvPr/>
+        </p:nvSpPr>
+        <p:spPr>
+          <a:xfrm xmlns:a="http://schemas.openxmlformats.org/drawingml/2006/main">
+            <a:off x="6400800" y="3143250"/>
+            <a:ext cx="4743450" cy="428625"/>
           </a:xfrm>
           <a:prstGeom xmlns:a="http://schemas.openxmlformats.org/drawingml/2006/main" prst="rect">
             <a:avLst/>
@@ -8441,28 +8923,28 @@
                   <a:srgbClr val="000000"/>
                 </a:solidFill>
               </a:rPr>
-              <a:t>1. Validate one row per week x geo and stable KPI definitions.</a:t>
-            </a:r>
-          </a:p>
-        </p:txBody>
-      </p:sp>
-      <p:sp>
-        <p:nvSpPr>
-          <p:cNvPr id="7" name="">
-            <a:extLst xmlns:a="http://schemas.openxmlformats.org/drawingml/2006/main">
-              <a:ext uri="{FF2B5EF4-FFF2-40B4-BE49-F238E27FC236}">
-                <a16:creationId xmlns:a16="http://schemas.microsoft.com/office/drawing/2014/main" id="{DBE59FF7-1921-475F-B8D7-4FB1EA1D7FF5}"/>
-              </a:ext>
-            </a:extLst>
-          </p:cNvPr>
-          <p:cNvSpPr>
-            <a:spLocks xmlns:a="http://schemas.openxmlformats.org/drawingml/2006/main" noGrp="1"/>
-          </p:cNvSpPr>
-          <p:nvPr/>
-        </p:nvSpPr>
-        <p:spPr>
-          <a:xfrm xmlns:a="http://schemas.openxmlformats.org/drawingml/2006/main">
-            <a:off x="762000" y="3314700"/>
+              <a:t>channel_contributions(fit): additive decomposition for reporting</a:t>
+            </a:r>
+          </a:p>
+        </p:txBody>
+      </p:sp>
+      <p:sp>
+        <p:nvSpPr>
+          <p:cNvPr id="10" name="">
+            <a:extLst xmlns:a="http://schemas.openxmlformats.org/drawingml/2006/main">
+              <a:ext uri="{FF2B5EF4-FFF2-40B4-BE49-F238E27FC236}">
+                <a16:creationId xmlns:a16="http://schemas.microsoft.com/office/drawing/2014/main" id="{4657AEFD-729B-42B2-A5DC-FA4FA620DDE4}"/>
+              </a:ext>
+            </a:extLst>
+          </p:cNvPr>
+          <p:cNvSpPr>
+            <a:spLocks xmlns:a="http://schemas.openxmlformats.org/drawingml/2006/main" noGrp="1"/>
+          </p:cNvSpPr>
+          <p:nvPr/>
+        </p:nvSpPr>
+        <p:spPr>
+          <a:xfrm xmlns:a="http://schemas.openxmlformats.org/drawingml/2006/main">
+            <a:off x="6191250" y="3648075"/>
             <a:ext cx="76200" cy="76200"/>
           </a:xfrm>
           <a:prstGeom xmlns:a="http://schemas.openxmlformats.org/drawingml/2006/main" prst="rect">
@@ -8476,25 +8958,29 @@
             <a:prstDash val="solid"/>
           </a:ln>
         </p:spPr>
-      </p:sp>
-      <p:sp>
-        <p:nvSpPr>
-          <p:cNvPr id="8" name="">
-            <a:extLst xmlns:a="http://schemas.openxmlformats.org/drawingml/2006/main">
-              <a:ext uri="{FF2B5EF4-FFF2-40B4-BE49-F238E27FC236}">
-                <a16:creationId xmlns:a16="http://schemas.microsoft.com/office/drawing/2014/main" id="{123CB052-AFD7-487F-A323-AAB380969306}"/>
-              </a:ext>
-            </a:extLst>
-          </p:cNvPr>
-          <p:cNvSpPr>
-            <a:spLocks xmlns:a="http://schemas.openxmlformats.org/drawingml/2006/main" noGrp="1"/>
-          </p:cNvSpPr>
-          <p:nvPr/>
-        </p:nvSpPr>
-        <p:spPr>
-          <a:xfrm xmlns:a="http://schemas.openxmlformats.org/drawingml/2006/main">
-            <a:off x="971550" y="3238500"/>
-            <a:ext cx="9791700" cy="457200"/>
+        <p:txBody xmlns:a="http://schemas.openxmlformats.org/drawingml/2006/main">
+          <a:bodyPr/>
+          <a:p/>
+        </p:txBody>
+      </p:sp>
+      <p:sp>
+        <p:nvSpPr>
+          <p:cNvPr id="11" name="">
+            <a:extLst xmlns:a="http://schemas.openxmlformats.org/drawingml/2006/main">
+              <a:ext uri="{FF2B5EF4-FFF2-40B4-BE49-F238E27FC236}">
+                <a16:creationId xmlns:a16="http://schemas.microsoft.com/office/drawing/2014/main" id="{31ABDDE3-373E-4F2A-ACB6-8D989C2044A4}"/>
+              </a:ext>
+            </a:extLst>
+          </p:cNvPr>
+          <p:cNvSpPr>
+            <a:spLocks xmlns:a="http://schemas.openxmlformats.org/drawingml/2006/main" noGrp="1"/>
+          </p:cNvSpPr>
+          <p:nvPr/>
+        </p:nvSpPr>
+        <p:spPr>
+          <a:xfrm xmlns:a="http://schemas.openxmlformats.org/drawingml/2006/main">
+            <a:off x="6400800" y="3571875"/>
+            <a:ext cx="4743450" cy="428625"/>
           </a:xfrm>
           <a:prstGeom xmlns:a="http://schemas.openxmlformats.org/drawingml/2006/main" prst="rect">
             <a:avLst/>
@@ -8522,28 +9008,28 @@
                   <a:srgbClr val="000000"/>
                 </a:solidFill>
               </a:rPr>
-              <a:t>2. Map channel spend and exposure columns explicitly.</a:t>
-            </a:r>
-          </a:p>
-        </p:txBody>
-      </p:sp>
-      <p:sp>
-        <p:nvSpPr>
-          <p:cNvPr id="9" name="">
-            <a:extLst xmlns:a="http://schemas.openxmlformats.org/drawingml/2006/main">
-              <a:ext uri="{FF2B5EF4-FFF2-40B4-BE49-F238E27FC236}">
-                <a16:creationId xmlns:a16="http://schemas.microsoft.com/office/drawing/2014/main" id="{68FB5C54-149E-4DF8-83A1-7C7F31866D5C}"/>
-              </a:ext>
-            </a:extLst>
-          </p:cNvPr>
-          <p:cNvSpPr>
-            <a:spLocks xmlns:a="http://schemas.openxmlformats.org/drawingml/2006/main" noGrp="1"/>
-          </p:cNvSpPr>
-          <p:nvPr/>
-        </p:nvSpPr>
-        <p:spPr>
-          <a:xfrm xmlns:a="http://schemas.openxmlformats.org/drawingml/2006/main">
-            <a:off x="762000" y="3771900"/>
+              <a:t>marginal_contributions(fit): counterfactual lift for economics</a:t>
+            </a:r>
+          </a:p>
+        </p:txBody>
+      </p:sp>
+      <p:sp>
+        <p:nvSpPr>
+          <p:cNvPr id="12" name="">
+            <a:extLst xmlns:a="http://schemas.openxmlformats.org/drawingml/2006/main">
+              <a:ext uri="{FF2B5EF4-FFF2-40B4-BE49-F238E27FC236}">
+                <a16:creationId xmlns:a16="http://schemas.microsoft.com/office/drawing/2014/main" id="{9570CCA9-4161-45E5-B3DF-C0E37BA8CF76}"/>
+              </a:ext>
+            </a:extLst>
+          </p:cNvPr>
+          <p:cNvSpPr>
+            <a:spLocks xmlns:a="http://schemas.openxmlformats.org/drawingml/2006/main" noGrp="1"/>
+          </p:cNvSpPr>
+          <p:nvPr/>
+        </p:nvSpPr>
+        <p:spPr>
+          <a:xfrm xmlns:a="http://schemas.openxmlformats.org/drawingml/2006/main">
+            <a:off x="6191250" y="4076700"/>
             <a:ext cx="76200" cy="76200"/>
           </a:xfrm>
           <a:prstGeom xmlns:a="http://schemas.openxmlformats.org/drawingml/2006/main" prst="rect">
@@ -8557,25 +9043,29 @@
             <a:prstDash val="solid"/>
           </a:ln>
         </p:spPr>
-      </p:sp>
-      <p:sp>
-        <p:nvSpPr>
-          <p:cNvPr id="10" name="">
-            <a:extLst xmlns:a="http://schemas.openxmlformats.org/drawingml/2006/main">
-              <a:ext uri="{FF2B5EF4-FFF2-40B4-BE49-F238E27FC236}">
-                <a16:creationId xmlns:a16="http://schemas.microsoft.com/office/drawing/2014/main" id="{89127532-E267-47CD-90A6-B6C1FF395003}"/>
-              </a:ext>
-            </a:extLst>
-          </p:cNvPr>
-          <p:cNvSpPr>
-            <a:spLocks xmlns:a="http://schemas.openxmlformats.org/drawingml/2006/main" noGrp="1"/>
-          </p:cNvSpPr>
-          <p:nvPr/>
-        </p:nvSpPr>
-        <p:spPr>
-          <a:xfrm xmlns:a="http://schemas.openxmlformats.org/drawingml/2006/main">
-            <a:off x="971550" y="3695700"/>
-            <a:ext cx="9791700" cy="457200"/>
+        <p:txBody xmlns:a="http://schemas.openxmlformats.org/drawingml/2006/main">
+          <a:bodyPr/>
+          <a:p/>
+        </p:txBody>
+      </p:sp>
+      <p:sp>
+        <p:nvSpPr>
+          <p:cNvPr id="13" name="">
+            <a:extLst xmlns:a="http://schemas.openxmlformats.org/drawingml/2006/main">
+              <a:ext uri="{FF2B5EF4-FFF2-40B4-BE49-F238E27FC236}">
+                <a16:creationId xmlns:a16="http://schemas.microsoft.com/office/drawing/2014/main" id="{E2651854-3D73-454A-BECB-E7FE0E6CA5E0}"/>
+              </a:ext>
+            </a:extLst>
+          </p:cNvPr>
+          <p:cNvSpPr>
+            <a:spLocks xmlns:a="http://schemas.openxmlformats.org/drawingml/2006/main" noGrp="1"/>
+          </p:cNvSpPr>
+          <p:nvPr/>
+        </p:nvSpPr>
+        <p:spPr>
+          <a:xfrm xmlns:a="http://schemas.openxmlformats.org/drawingml/2006/main">
+            <a:off x="6400800" y="4000500"/>
+            <a:ext cx="4743450" cy="428625"/>
           </a:xfrm>
           <a:prstGeom xmlns:a="http://schemas.openxmlformats.org/drawingml/2006/main" prst="rect">
             <a:avLst/>
@@ -8603,28 +9093,28 @@
                   <a:srgbClr val="000000"/>
                 </a:solidFill>
               </a:rPr>
-              <a:t>3. Add lift tests with channel, KPI, geos, window, lift, and SE.</a:t>
-            </a:r>
-          </a:p>
-        </p:txBody>
-      </p:sp>
-      <p:sp>
-        <p:nvSpPr>
-          <p:cNvPr id="11" name="">
-            <a:extLst xmlns:a="http://schemas.openxmlformats.org/drawingml/2006/main">
-              <a:ext uri="{FF2B5EF4-FFF2-40B4-BE49-F238E27FC236}">
-                <a16:creationId xmlns:a16="http://schemas.microsoft.com/office/drawing/2014/main" id="{86017D4A-1381-4ADB-BA59-E30E11237061}"/>
-              </a:ext>
-            </a:extLst>
-          </p:cNvPr>
-          <p:cNvSpPr>
-            <a:spLocks xmlns:a="http://schemas.openxmlformats.org/drawingml/2006/main" noGrp="1"/>
-          </p:cNvSpPr>
-          <p:nvPr/>
-        </p:nvSpPr>
-        <p:spPr>
-          <a:xfrm xmlns:a="http://schemas.openxmlformats.org/drawingml/2006/main">
-            <a:off x="762000" y="4229100"/>
+              <a:t>compute_roi(fit): incremental outcome divided by spend</a:t>
+            </a:r>
+          </a:p>
+        </p:txBody>
+      </p:sp>
+      <p:sp>
+        <p:nvSpPr>
+          <p:cNvPr id="14" name="">
+            <a:extLst xmlns:a="http://schemas.openxmlformats.org/drawingml/2006/main">
+              <a:ext uri="{FF2B5EF4-FFF2-40B4-BE49-F238E27FC236}">
+                <a16:creationId xmlns:a16="http://schemas.microsoft.com/office/drawing/2014/main" id="{E273F19C-13A9-4932-974B-25A82C1B6FE2}"/>
+              </a:ext>
+            </a:extLst>
+          </p:cNvPr>
+          <p:cNvSpPr>
+            <a:spLocks xmlns:a="http://schemas.openxmlformats.org/drawingml/2006/main" noGrp="1"/>
+          </p:cNvSpPr>
+          <p:nvPr/>
+        </p:nvSpPr>
+        <p:spPr>
+          <a:xfrm xmlns:a="http://schemas.openxmlformats.org/drawingml/2006/main">
+            <a:off x="6191250" y="4505325"/>
             <a:ext cx="76200" cy="76200"/>
           </a:xfrm>
           <a:prstGeom xmlns:a="http://schemas.openxmlformats.org/drawingml/2006/main" prst="rect">
@@ -8638,24 +9128,379 @@
             <a:prstDash val="solid"/>
           </a:ln>
         </p:spPr>
-      </p:sp>
-      <p:sp>
-        <p:nvSpPr>
-          <p:cNvPr id="12" name="">
-            <a:extLst xmlns:a="http://schemas.openxmlformats.org/drawingml/2006/main">
-              <a:ext uri="{FF2B5EF4-FFF2-40B4-BE49-F238E27FC236}">
-                <a16:creationId xmlns:a16="http://schemas.microsoft.com/office/drawing/2014/main" id="{C6323F01-1832-4221-A391-988A84C51A24}"/>
-              </a:ext>
-            </a:extLst>
-          </p:cNvPr>
-          <p:cNvSpPr>
-            <a:spLocks xmlns:a="http://schemas.openxmlformats.org/drawingml/2006/main" noGrp="1"/>
-          </p:cNvSpPr>
-          <p:nvPr/>
-        </p:nvSpPr>
-        <p:spPr>
-          <a:xfrm xmlns:a="http://schemas.openxmlformats.org/drawingml/2006/main">
-            <a:off x="971550" y="4152900"/>
+        <p:txBody xmlns:a="http://schemas.openxmlformats.org/drawingml/2006/main">
+          <a:bodyPr/>
+          <a:p/>
+        </p:txBody>
+      </p:sp>
+      <p:sp>
+        <p:nvSpPr>
+          <p:cNvPr id="15" name="">
+            <a:extLst xmlns:a="http://schemas.openxmlformats.org/drawingml/2006/main">
+              <a:ext uri="{FF2B5EF4-FFF2-40B4-BE49-F238E27FC236}">
+                <a16:creationId xmlns:a16="http://schemas.microsoft.com/office/drawing/2014/main" id="{5D071911-3567-4736-901C-3F7CAFAA9E45}"/>
+              </a:ext>
+            </a:extLst>
+          </p:cNvPr>
+          <p:cNvSpPr>
+            <a:spLocks xmlns:a="http://schemas.openxmlformats.org/drawingml/2006/main" noGrp="1"/>
+          </p:cNvSpPr>
+          <p:nvPr/>
+        </p:nvSpPr>
+        <p:spPr>
+          <a:xfrm xmlns:a="http://schemas.openxmlformats.org/drawingml/2006/main">
+            <a:off x="6400800" y="4429125"/>
+            <a:ext cx="4743450" cy="428625"/>
+          </a:xfrm>
+          <a:prstGeom xmlns:a="http://schemas.openxmlformats.org/drawingml/2006/main" prst="rect">
+            <a:avLst/>
+          </a:prstGeom>
+          <a:noFill xmlns:a="http://schemas.openxmlformats.org/drawingml/2006/main"/>
+          <a:ln xmlns:a="http://schemas.openxmlformats.org/drawingml/2006/main" w="0">
+            <a:noFill/>
+            <a:prstDash val="solid"/>
+          </a:ln>
+        </p:spPr>
+        <p:txBody>
+          <a:bodyPr xmlns:a="http://schemas.openxmlformats.org/drawingml/2006/main"/>
+          <a:lstStyle xmlns:a="http://schemas.openxmlformats.org/drawingml/2006/main"/>
+          <a:p xmlns:a="http://schemas.openxmlformats.org/drawingml/2006/main">
+            <a:pPr>
+              <a:defRPr sz="1350">
+                <a:solidFill>
+                  <a:srgbClr val="000000"/>
+                </a:solidFill>
+              </a:defRPr>
+            </a:pPr>
+            <a:r>
+              <a:rPr sz="1350">
+                <a:solidFill>
+                  <a:srgbClr val="000000"/>
+                </a:solidFill>
+              </a:rPr>
+              <a:t>saturation_curve(fit, channel): diminishing returns view</a:t>
+            </a:r>
+          </a:p>
+        </p:txBody>
+      </p:sp>
+      <p:sp>
+        <p:nvSpPr>
+          <p:cNvPr id="16" name="">
+            <a:extLst xmlns:a="http://schemas.openxmlformats.org/drawingml/2006/main">
+              <a:ext uri="{FF2B5EF4-FFF2-40B4-BE49-F238E27FC236}">
+                <a16:creationId xmlns:a16="http://schemas.microsoft.com/office/drawing/2014/main" id="{1360F165-6689-4E94-874D-F8C2FE76C758}"/>
+              </a:ext>
+            </a:extLst>
+          </p:cNvPr>
+          <p:cNvSpPr>
+            <a:spLocks xmlns:a="http://schemas.openxmlformats.org/drawingml/2006/main" noGrp="1"/>
+          </p:cNvSpPr>
+          <p:nvPr/>
+        </p:nvSpPr>
+        <p:spPr>
+          <a:xfrm xmlns:a="http://schemas.openxmlformats.org/drawingml/2006/main">
+            <a:off x="10096500" y="6419850"/>
+            <a:ext cx="1695450" cy="228600"/>
+          </a:xfrm>
+          <a:prstGeom xmlns:a="http://schemas.openxmlformats.org/drawingml/2006/main" prst="rect">
+            <a:avLst/>
+          </a:prstGeom>
+          <a:noFill xmlns:a="http://schemas.openxmlformats.org/drawingml/2006/main"/>
+          <a:ln xmlns:a="http://schemas.openxmlformats.org/drawingml/2006/main" w="0">
+            <a:noFill/>
+            <a:prstDash val="solid"/>
+          </a:ln>
+        </p:spPr>
+        <p:txBody>
+          <a:bodyPr xmlns:a="http://schemas.openxmlformats.org/drawingml/2006/main"/>
+          <a:lstStyle xmlns:a="http://schemas.openxmlformats.org/drawingml/2006/main"/>
+          <a:p xmlns:a="http://schemas.openxmlformats.org/drawingml/2006/main">
+            <a:pPr algn="r">
+              <a:defRPr sz="900">
+                <a:solidFill>
+                  <a:srgbClr val="555555"/>
+                </a:solidFill>
+              </a:defRPr>
+            </a:pPr>
+            <a:r>
+              <a:rPr sz="900">
+                <a:solidFill>
+                  <a:srgbClr val="555555"/>
+                </a:solidFill>
+              </a:rPr>
+              <a:t>calmmm demo package / 7</a:t>
+            </a:r>
+          </a:p>
+        </p:txBody>
+      </p:sp>
+    </p:spTree>
+    <p:extLst>
+      <p:ext uri="{BB962C8B-B14F-4D97-AF65-F5344CB8AC3E}">
+        <p14:creationId xmlns:p14="http://schemas.microsoft.com/office/powerpoint/2010/main" val="1583208939"/>
+      </p:ext>
+    </p:extLst>
+  </p:cSld>
+</p:sld>
+</file>
+
+<file path=ppt/slides/slide8.xml><?xml version="1.0" encoding="utf-8"?>
+<p:sld xmlns:p="http://schemas.openxmlformats.org/presentationml/2006/main">
+  <p:cSld>
+    <p:bg>
+      <p:bgPr>
+        <a:solidFill xmlns:a="http://schemas.openxmlformats.org/drawingml/2006/main">
+          <a:srgbClr val="FFFFFF"/>
+        </a:solidFill>
+      </p:bgPr>
+    </p:bg>
+    <p:spTree>
+      <p:nvGrpSpPr>
+        <p:cNvPr id="1" name=""/>
+        <p:cNvGrpSpPr/>
+        <p:nvPr/>
+      </p:nvGrpSpPr>
+      <p:grpSpPr>
+        <a:xfrm xmlns:a="http://schemas.openxmlformats.org/drawingml/2006/main"/>
+      </p:grpSpPr>
+      <p:sp>
+        <p:nvSpPr>
+          <p:cNvPr id="1" name="">
+            <a:extLst xmlns:a="http://schemas.openxmlformats.org/drawingml/2006/main">
+              <a:ext uri="{FF2B5EF4-FFF2-40B4-BE49-F238E27FC236}">
+                <a16:creationId xmlns:a16="http://schemas.microsoft.com/office/drawing/2014/main" id="{5EC4BFE9-F746-4ACC-9D1A-278C52725355}"/>
+              </a:ext>
+            </a:extLst>
+          </p:cNvPr>
+          <p:cNvSpPr>
+            <a:spLocks xmlns:a="http://schemas.openxmlformats.org/drawingml/2006/main" noGrp="1"/>
+          </p:cNvSpPr>
+          <p:nvPr/>
+        </p:nvSpPr>
+        <p:spPr>
+          <a:xfrm xmlns:a="http://schemas.openxmlformats.org/drawingml/2006/main">
+            <a:off x="400050" y="361950"/>
+            <a:ext cx="4000500" cy="247650"/>
+          </a:xfrm>
+          <a:prstGeom xmlns:a="http://schemas.openxmlformats.org/drawingml/2006/main" prst="rect">
+            <a:avLst/>
+          </a:prstGeom>
+          <a:noFill xmlns:a="http://schemas.openxmlformats.org/drawingml/2006/main"/>
+          <a:ln xmlns:a="http://schemas.openxmlformats.org/drawingml/2006/main" w="0">
+            <a:noFill/>
+            <a:prstDash val="solid"/>
+          </a:ln>
+        </p:spPr>
+        <p:txBody>
+          <a:bodyPr xmlns:a="http://schemas.openxmlformats.org/drawingml/2006/main"/>
+          <a:lstStyle xmlns:a="http://schemas.openxmlformats.org/drawingml/2006/main"/>
+          <a:p xmlns:a="http://schemas.openxmlformats.org/drawingml/2006/main">
+            <a:pPr>
+              <a:defRPr sz="1050" b="1">
+                <a:solidFill>
+                  <a:srgbClr val="555555"/>
+                </a:solidFill>
+              </a:defRPr>
+            </a:pPr>
+            <a:r>
+              <a:rPr sz="1050" b="1">
+                <a:solidFill>
+                  <a:srgbClr val="555555"/>
+                </a:solidFill>
+              </a:rPr>
+              <a:t>RUNBOOK</a:t>
+            </a:r>
+          </a:p>
+        </p:txBody>
+      </p:sp>
+      <p:sp>
+        <p:nvSpPr>
+          <p:cNvPr id="2" name="">
+            <a:extLst xmlns:a="http://schemas.openxmlformats.org/drawingml/2006/main">
+              <a:ext uri="{FF2B5EF4-FFF2-40B4-BE49-F238E27FC236}">
+                <a16:creationId xmlns:a16="http://schemas.microsoft.com/office/drawing/2014/main" id="{D76EC6F5-DBF0-4956-BFF0-3EDA0B82E384}"/>
+              </a:ext>
+            </a:extLst>
+          </p:cNvPr>
+          <p:cNvSpPr>
+            <a:spLocks xmlns:a="http://schemas.openxmlformats.org/drawingml/2006/main" noGrp="1"/>
+          </p:cNvSpPr>
+          <p:nvPr/>
+        </p:nvSpPr>
+        <p:spPr>
+          <a:xfrm xmlns:a="http://schemas.openxmlformats.org/drawingml/2006/main">
+            <a:off x="400050" y="781050"/>
+            <a:ext cx="8096250" cy="1009650"/>
+          </a:xfrm>
+          <a:prstGeom xmlns:a="http://schemas.openxmlformats.org/drawingml/2006/main" prst="rect">
+            <a:avLst/>
+          </a:prstGeom>
+          <a:noFill xmlns:a="http://schemas.openxmlformats.org/drawingml/2006/main"/>
+          <a:ln xmlns:a="http://schemas.openxmlformats.org/drawingml/2006/main" w="0">
+            <a:noFill/>
+            <a:prstDash val="solid"/>
+          </a:ln>
+        </p:spPr>
+        <p:txBody>
+          <a:bodyPr xmlns:a="http://schemas.openxmlformats.org/drawingml/2006/main"/>
+          <a:lstStyle xmlns:a="http://schemas.openxmlformats.org/drawingml/2006/main"/>
+          <a:p xmlns:a="http://schemas.openxmlformats.org/drawingml/2006/main">
+            <a:pPr>
+              <a:defRPr sz="3150" b="1">
+                <a:solidFill>
+                  <a:srgbClr val="000000"/>
+                </a:solidFill>
+              </a:defRPr>
+            </a:pPr>
+            <a:r>
+              <a:rPr sz="3150" b="1">
+                <a:solidFill>
+                  <a:srgbClr val="000000"/>
+                </a:solidFill>
+              </a:rPr>
+              <a:t>Swap synthetic inputs for production data</a:t>
+            </a:r>
+          </a:p>
+        </p:txBody>
+      </p:sp>
+      <p:sp>
+        <p:nvSpPr>
+          <p:cNvPr id="3" name="">
+            <a:extLst xmlns:a="http://schemas.openxmlformats.org/drawingml/2006/main">
+              <a:ext uri="{FF2B5EF4-FFF2-40B4-BE49-F238E27FC236}">
+                <a16:creationId xmlns:a16="http://schemas.microsoft.com/office/drawing/2014/main" id="{D006137E-58A5-4469-9A71-B8E7DB0D0F04}"/>
+              </a:ext>
+            </a:extLst>
+          </p:cNvPr>
+          <p:cNvSpPr>
+            <a:spLocks xmlns:a="http://schemas.openxmlformats.org/drawingml/2006/main" noGrp="1"/>
+          </p:cNvSpPr>
+          <p:nvPr/>
+        </p:nvSpPr>
+        <p:spPr>
+          <a:xfrm xmlns:a="http://schemas.openxmlformats.org/drawingml/2006/main">
+            <a:off x="400050" y="1885950"/>
+            <a:ext cx="7429500" cy="590550"/>
+          </a:xfrm>
+          <a:prstGeom xmlns:a="http://schemas.openxmlformats.org/drawingml/2006/main" prst="rect">
+            <a:avLst/>
+          </a:prstGeom>
+          <a:noFill xmlns:a="http://schemas.openxmlformats.org/drawingml/2006/main"/>
+          <a:ln xmlns:a="http://schemas.openxmlformats.org/drawingml/2006/main" w="0">
+            <a:noFill/>
+            <a:prstDash val="solid"/>
+          </a:ln>
+        </p:spPr>
+        <p:txBody>
+          <a:bodyPr xmlns:a="http://schemas.openxmlformats.org/drawingml/2006/main"/>
+          <a:lstStyle xmlns:a="http://schemas.openxmlformats.org/drawingml/2006/main"/>
+          <a:p xmlns:a="http://schemas.openxmlformats.org/drawingml/2006/main">
+            <a:pPr>
+              <a:defRPr sz="1500">
+                <a:solidFill>
+                  <a:srgbClr val="555555"/>
+                </a:solidFill>
+              </a:defRPr>
+            </a:pPr>
+            <a:r>
+              <a:rPr sz="1500">
+                <a:solidFill>
+                  <a:srgbClr val="555555"/>
+                </a:solidFill>
+              </a:rPr>
+              <a:t>The same package path works once your weekly panel and experiment metadata conform to the schema.</a:t>
+            </a:r>
+          </a:p>
+        </p:txBody>
+      </p:sp>
+      <p:sp>
+        <p:nvSpPr>
+          <p:cNvPr id="4" name="">
+            <a:extLst xmlns:a="http://schemas.openxmlformats.org/drawingml/2006/main">
+              <a:ext uri="{FF2B5EF4-FFF2-40B4-BE49-F238E27FC236}">
+                <a16:creationId xmlns:a16="http://schemas.microsoft.com/office/drawing/2014/main" id="{E0C2D191-CB1F-4563-B50A-072FCF04919D}"/>
+              </a:ext>
+            </a:extLst>
+          </p:cNvPr>
+          <p:cNvSpPr>
+            <a:spLocks xmlns:a="http://schemas.openxmlformats.org/drawingml/2006/main" noGrp="1"/>
+          </p:cNvSpPr>
+          <p:nvPr/>
+        </p:nvSpPr>
+        <p:spPr>
+          <a:xfrm xmlns:a="http://schemas.openxmlformats.org/drawingml/2006/main">
+            <a:off x="400050" y="6286500"/>
+            <a:ext cx="11391900" cy="9525"/>
+          </a:xfrm>
+          <a:prstGeom xmlns:a="http://schemas.openxmlformats.org/drawingml/2006/main" prst="rect">
+            <a:avLst/>
+          </a:prstGeom>
+          <a:solidFill xmlns:a="http://schemas.openxmlformats.org/drawingml/2006/main">
+            <a:srgbClr val="B8BCC4"/>
+          </a:solidFill>
+          <a:ln xmlns:a="http://schemas.openxmlformats.org/drawingml/2006/main" w="0">
+            <a:solidFill>
+              <a:srgbClr val="B8BCC4"/>
+            </a:solidFill>
+            <a:prstDash val="solid"/>
+          </a:ln>
+        </p:spPr>
+        <p:txBody xmlns:a="http://schemas.openxmlformats.org/drawingml/2006/main">
+          <a:bodyPr/>
+          <a:p/>
+        </p:txBody>
+      </p:sp>
+      <p:sp>
+        <p:nvSpPr>
+          <p:cNvPr id="5" name="">
+            <a:extLst xmlns:a="http://schemas.openxmlformats.org/drawingml/2006/main">
+              <a:ext uri="{FF2B5EF4-FFF2-40B4-BE49-F238E27FC236}">
+                <a16:creationId xmlns:a16="http://schemas.microsoft.com/office/drawing/2014/main" id="{248641E5-56C9-43DC-BA6A-7E28B1E6753D}"/>
+              </a:ext>
+            </a:extLst>
+          </p:cNvPr>
+          <p:cNvSpPr>
+            <a:spLocks xmlns:a="http://schemas.openxmlformats.org/drawingml/2006/main" noGrp="1"/>
+          </p:cNvSpPr>
+          <p:nvPr/>
+        </p:nvSpPr>
+        <p:spPr>
+          <a:xfrm xmlns:a="http://schemas.openxmlformats.org/drawingml/2006/main">
+            <a:off x="762000" y="2857500"/>
+            <a:ext cx="76200" cy="76200"/>
+          </a:xfrm>
+          <a:prstGeom xmlns:a="http://schemas.openxmlformats.org/drawingml/2006/main" prst="rect">
+            <a:avLst/>
+          </a:prstGeom>
+          <a:solidFill xmlns:a="http://schemas.openxmlformats.org/drawingml/2006/main">
+            <a:srgbClr val="FF6B35"/>
+          </a:solidFill>
+          <a:ln xmlns:a="http://schemas.openxmlformats.org/drawingml/2006/main" w="0">
+            <a:noFill/>
+            <a:prstDash val="solid"/>
+          </a:ln>
+        </p:spPr>
+        <p:txBody xmlns:a="http://schemas.openxmlformats.org/drawingml/2006/main">
+          <a:bodyPr/>
+          <a:p/>
+        </p:txBody>
+      </p:sp>
+      <p:sp>
+        <p:nvSpPr>
+          <p:cNvPr id="6" name="">
+            <a:extLst xmlns:a="http://schemas.openxmlformats.org/drawingml/2006/main">
+              <a:ext uri="{FF2B5EF4-FFF2-40B4-BE49-F238E27FC236}">
+                <a16:creationId xmlns:a16="http://schemas.microsoft.com/office/drawing/2014/main" id="{D94D2B57-FAEA-4FE9-8F61-7F65A0EC7DA4}"/>
+              </a:ext>
+            </a:extLst>
+          </p:cNvPr>
+          <p:cNvSpPr>
+            <a:spLocks xmlns:a="http://schemas.openxmlformats.org/drawingml/2006/main" noGrp="1"/>
+          </p:cNvSpPr>
+          <p:nvPr/>
+        </p:nvSpPr>
+        <p:spPr>
+          <a:xfrm xmlns:a="http://schemas.openxmlformats.org/drawingml/2006/main">
+            <a:off x="971550" y="2781300"/>
             <a:ext cx="9791700" cy="457200"/>
           </a:xfrm>
           <a:prstGeom xmlns:a="http://schemas.openxmlformats.org/drawingml/2006/main" prst="rect">
@@ -8684,28 +9529,28 @@
                   <a:srgbClr val="000000"/>
                 </a:solidFill>
               </a:rPr>
-              <a:t>4. Start with MAP for smoke tests; use MCMC for production decisions.</a:t>
-            </a:r>
-          </a:p>
-        </p:txBody>
-      </p:sp>
-      <p:sp>
-        <p:nvSpPr>
-          <p:cNvPr id="13" name="">
-            <a:extLst xmlns:a="http://schemas.openxmlformats.org/drawingml/2006/main">
-              <a:ext uri="{FF2B5EF4-FFF2-40B4-BE49-F238E27FC236}">
-                <a16:creationId xmlns:a16="http://schemas.microsoft.com/office/drawing/2014/main" id="{21B6014A-F20A-47C8-AA65-7B5FE9E2816E}"/>
-              </a:ext>
-            </a:extLst>
-          </p:cNvPr>
-          <p:cNvSpPr>
-            <a:spLocks xmlns:a="http://schemas.openxmlformats.org/drawingml/2006/main" noGrp="1"/>
-          </p:cNvSpPr>
-          <p:nvPr/>
-        </p:nvSpPr>
-        <p:spPr>
-          <a:xfrm xmlns:a="http://schemas.openxmlformats.org/drawingml/2006/main">
-            <a:off x="762000" y="4686300"/>
+              <a:t>1. Validate one row per week x geo and stable KPI definitions.</a:t>
+            </a:r>
+          </a:p>
+        </p:txBody>
+      </p:sp>
+      <p:sp>
+        <p:nvSpPr>
+          <p:cNvPr id="7" name="">
+            <a:extLst xmlns:a="http://schemas.openxmlformats.org/drawingml/2006/main">
+              <a:ext uri="{FF2B5EF4-FFF2-40B4-BE49-F238E27FC236}">
+                <a16:creationId xmlns:a16="http://schemas.microsoft.com/office/drawing/2014/main" id="{DBE59FF7-1921-475F-B8D7-4FB1EA1D7FF5}"/>
+              </a:ext>
+            </a:extLst>
+          </p:cNvPr>
+          <p:cNvSpPr>
+            <a:spLocks xmlns:a="http://schemas.openxmlformats.org/drawingml/2006/main" noGrp="1"/>
+          </p:cNvSpPr>
+          <p:nvPr/>
+        </p:nvSpPr>
+        <p:spPr>
+          <a:xfrm xmlns:a="http://schemas.openxmlformats.org/drawingml/2006/main">
+            <a:off x="762000" y="3314700"/>
             <a:ext cx="76200" cy="76200"/>
           </a:xfrm>
           <a:prstGeom xmlns:a="http://schemas.openxmlformats.org/drawingml/2006/main" prst="rect">
@@ -8719,6 +9564,265 @@
             <a:prstDash val="solid"/>
           </a:ln>
         </p:spPr>
+        <p:txBody xmlns:a="http://schemas.openxmlformats.org/drawingml/2006/main">
+          <a:bodyPr/>
+          <a:p/>
+        </p:txBody>
+      </p:sp>
+      <p:sp>
+        <p:nvSpPr>
+          <p:cNvPr id="8" name="">
+            <a:extLst xmlns:a="http://schemas.openxmlformats.org/drawingml/2006/main">
+              <a:ext uri="{FF2B5EF4-FFF2-40B4-BE49-F238E27FC236}">
+                <a16:creationId xmlns:a16="http://schemas.microsoft.com/office/drawing/2014/main" id="{123CB052-AFD7-487F-A323-AAB380969306}"/>
+              </a:ext>
+            </a:extLst>
+          </p:cNvPr>
+          <p:cNvSpPr>
+            <a:spLocks xmlns:a="http://schemas.openxmlformats.org/drawingml/2006/main" noGrp="1"/>
+          </p:cNvSpPr>
+          <p:nvPr/>
+        </p:nvSpPr>
+        <p:spPr>
+          <a:xfrm xmlns:a="http://schemas.openxmlformats.org/drawingml/2006/main">
+            <a:off x="971550" y="3238500"/>
+            <a:ext cx="9791700" cy="457200"/>
+          </a:xfrm>
+          <a:prstGeom xmlns:a="http://schemas.openxmlformats.org/drawingml/2006/main" prst="rect">
+            <a:avLst/>
+          </a:prstGeom>
+          <a:noFill xmlns:a="http://schemas.openxmlformats.org/drawingml/2006/main"/>
+          <a:ln xmlns:a="http://schemas.openxmlformats.org/drawingml/2006/main" w="0">
+            <a:noFill/>
+            <a:prstDash val="solid"/>
+          </a:ln>
+        </p:spPr>
+        <p:txBody>
+          <a:bodyPr xmlns:a="http://schemas.openxmlformats.org/drawingml/2006/main"/>
+          <a:lstStyle xmlns:a="http://schemas.openxmlformats.org/drawingml/2006/main"/>
+          <a:p xmlns:a="http://schemas.openxmlformats.org/drawingml/2006/main">
+            <a:pPr>
+              <a:defRPr sz="1350">
+                <a:solidFill>
+                  <a:srgbClr val="000000"/>
+                </a:solidFill>
+              </a:defRPr>
+            </a:pPr>
+            <a:r>
+              <a:rPr sz="1350">
+                <a:solidFill>
+                  <a:srgbClr val="000000"/>
+                </a:solidFill>
+              </a:rPr>
+              <a:t>2. Map channel spend and exposure columns explicitly.</a:t>
+            </a:r>
+          </a:p>
+        </p:txBody>
+      </p:sp>
+      <p:sp>
+        <p:nvSpPr>
+          <p:cNvPr id="9" name="">
+            <a:extLst xmlns:a="http://schemas.openxmlformats.org/drawingml/2006/main">
+              <a:ext uri="{FF2B5EF4-FFF2-40B4-BE49-F238E27FC236}">
+                <a16:creationId xmlns:a16="http://schemas.microsoft.com/office/drawing/2014/main" id="{68FB5C54-149E-4DF8-83A1-7C7F31866D5C}"/>
+              </a:ext>
+            </a:extLst>
+          </p:cNvPr>
+          <p:cNvSpPr>
+            <a:spLocks xmlns:a="http://schemas.openxmlformats.org/drawingml/2006/main" noGrp="1"/>
+          </p:cNvSpPr>
+          <p:nvPr/>
+        </p:nvSpPr>
+        <p:spPr>
+          <a:xfrm xmlns:a="http://schemas.openxmlformats.org/drawingml/2006/main">
+            <a:off x="762000" y="3771900"/>
+            <a:ext cx="76200" cy="76200"/>
+          </a:xfrm>
+          <a:prstGeom xmlns:a="http://schemas.openxmlformats.org/drawingml/2006/main" prst="rect">
+            <a:avLst/>
+          </a:prstGeom>
+          <a:solidFill xmlns:a="http://schemas.openxmlformats.org/drawingml/2006/main">
+            <a:srgbClr val="000000"/>
+          </a:solidFill>
+          <a:ln xmlns:a="http://schemas.openxmlformats.org/drawingml/2006/main" w="0">
+            <a:noFill/>
+            <a:prstDash val="solid"/>
+          </a:ln>
+        </p:spPr>
+        <p:txBody xmlns:a="http://schemas.openxmlformats.org/drawingml/2006/main">
+          <a:bodyPr/>
+          <a:p/>
+        </p:txBody>
+      </p:sp>
+      <p:sp>
+        <p:nvSpPr>
+          <p:cNvPr id="10" name="">
+            <a:extLst xmlns:a="http://schemas.openxmlformats.org/drawingml/2006/main">
+              <a:ext uri="{FF2B5EF4-FFF2-40B4-BE49-F238E27FC236}">
+                <a16:creationId xmlns:a16="http://schemas.microsoft.com/office/drawing/2014/main" id="{89127532-E267-47CD-90A6-B6C1FF395003}"/>
+              </a:ext>
+            </a:extLst>
+          </p:cNvPr>
+          <p:cNvSpPr>
+            <a:spLocks xmlns:a="http://schemas.openxmlformats.org/drawingml/2006/main" noGrp="1"/>
+          </p:cNvSpPr>
+          <p:nvPr/>
+        </p:nvSpPr>
+        <p:spPr>
+          <a:xfrm xmlns:a="http://schemas.openxmlformats.org/drawingml/2006/main">
+            <a:off x="971550" y="3695700"/>
+            <a:ext cx="9791700" cy="457200"/>
+          </a:xfrm>
+          <a:prstGeom xmlns:a="http://schemas.openxmlformats.org/drawingml/2006/main" prst="rect">
+            <a:avLst/>
+          </a:prstGeom>
+          <a:noFill xmlns:a="http://schemas.openxmlformats.org/drawingml/2006/main"/>
+          <a:ln xmlns:a="http://schemas.openxmlformats.org/drawingml/2006/main" w="0">
+            <a:noFill/>
+            <a:prstDash val="solid"/>
+          </a:ln>
+        </p:spPr>
+        <p:txBody>
+          <a:bodyPr xmlns:a="http://schemas.openxmlformats.org/drawingml/2006/main"/>
+          <a:lstStyle xmlns:a="http://schemas.openxmlformats.org/drawingml/2006/main"/>
+          <a:p xmlns:a="http://schemas.openxmlformats.org/drawingml/2006/main">
+            <a:pPr>
+              <a:defRPr sz="1350">
+                <a:solidFill>
+                  <a:srgbClr val="000000"/>
+                </a:solidFill>
+              </a:defRPr>
+            </a:pPr>
+            <a:r>
+              <a:rPr sz="1350">
+                <a:solidFill>
+                  <a:srgbClr val="000000"/>
+                </a:solidFill>
+              </a:rPr>
+              <a:t>3. Add lift tests with channel, KPI, geos, window, lift, and SE.</a:t>
+            </a:r>
+          </a:p>
+        </p:txBody>
+      </p:sp>
+      <p:sp>
+        <p:nvSpPr>
+          <p:cNvPr id="11" name="">
+            <a:extLst xmlns:a="http://schemas.openxmlformats.org/drawingml/2006/main">
+              <a:ext uri="{FF2B5EF4-FFF2-40B4-BE49-F238E27FC236}">
+                <a16:creationId xmlns:a16="http://schemas.microsoft.com/office/drawing/2014/main" id="{86017D4A-1381-4ADB-BA59-E30E11237061}"/>
+              </a:ext>
+            </a:extLst>
+          </p:cNvPr>
+          <p:cNvSpPr>
+            <a:spLocks xmlns:a="http://schemas.openxmlformats.org/drawingml/2006/main" noGrp="1"/>
+          </p:cNvSpPr>
+          <p:nvPr/>
+        </p:nvSpPr>
+        <p:spPr>
+          <a:xfrm xmlns:a="http://schemas.openxmlformats.org/drawingml/2006/main">
+            <a:off x="762000" y="4229100"/>
+            <a:ext cx="76200" cy="76200"/>
+          </a:xfrm>
+          <a:prstGeom xmlns:a="http://schemas.openxmlformats.org/drawingml/2006/main" prst="rect">
+            <a:avLst/>
+          </a:prstGeom>
+          <a:solidFill xmlns:a="http://schemas.openxmlformats.org/drawingml/2006/main">
+            <a:srgbClr val="000000"/>
+          </a:solidFill>
+          <a:ln xmlns:a="http://schemas.openxmlformats.org/drawingml/2006/main" w="0">
+            <a:noFill/>
+            <a:prstDash val="solid"/>
+          </a:ln>
+        </p:spPr>
+        <p:txBody xmlns:a="http://schemas.openxmlformats.org/drawingml/2006/main">
+          <a:bodyPr/>
+          <a:p/>
+        </p:txBody>
+      </p:sp>
+      <p:sp>
+        <p:nvSpPr>
+          <p:cNvPr id="12" name="">
+            <a:extLst xmlns:a="http://schemas.openxmlformats.org/drawingml/2006/main">
+              <a:ext uri="{FF2B5EF4-FFF2-40B4-BE49-F238E27FC236}">
+                <a16:creationId xmlns:a16="http://schemas.microsoft.com/office/drawing/2014/main" id="{C6323F01-1832-4221-A391-988A84C51A24}"/>
+              </a:ext>
+            </a:extLst>
+          </p:cNvPr>
+          <p:cNvSpPr>
+            <a:spLocks xmlns:a="http://schemas.openxmlformats.org/drawingml/2006/main" noGrp="1"/>
+          </p:cNvSpPr>
+          <p:nvPr/>
+        </p:nvSpPr>
+        <p:spPr>
+          <a:xfrm xmlns:a="http://schemas.openxmlformats.org/drawingml/2006/main">
+            <a:off x="971550" y="4152900"/>
+            <a:ext cx="9791700" cy="457200"/>
+          </a:xfrm>
+          <a:prstGeom xmlns:a="http://schemas.openxmlformats.org/drawingml/2006/main" prst="rect">
+            <a:avLst/>
+          </a:prstGeom>
+          <a:noFill xmlns:a="http://schemas.openxmlformats.org/drawingml/2006/main"/>
+          <a:ln xmlns:a="http://schemas.openxmlformats.org/drawingml/2006/main" w="0">
+            <a:noFill/>
+            <a:prstDash val="solid"/>
+          </a:ln>
+        </p:spPr>
+        <p:txBody>
+          <a:bodyPr xmlns:a="http://schemas.openxmlformats.org/drawingml/2006/main"/>
+          <a:lstStyle xmlns:a="http://schemas.openxmlformats.org/drawingml/2006/main"/>
+          <a:p xmlns:a="http://schemas.openxmlformats.org/drawingml/2006/main">
+            <a:pPr>
+              <a:defRPr sz="1350">
+                <a:solidFill>
+                  <a:srgbClr val="000000"/>
+                </a:solidFill>
+              </a:defRPr>
+            </a:pPr>
+            <a:r>
+              <a:rPr sz="1350">
+                <a:solidFill>
+                  <a:srgbClr val="000000"/>
+                </a:solidFill>
+              </a:rPr>
+              <a:t>4. Start with MAP for smoke tests; use MCMC for production decisions.</a:t>
+            </a:r>
+          </a:p>
+        </p:txBody>
+      </p:sp>
+      <p:sp>
+        <p:nvSpPr>
+          <p:cNvPr id="13" name="">
+            <a:extLst xmlns:a="http://schemas.openxmlformats.org/drawingml/2006/main">
+              <a:ext uri="{FF2B5EF4-FFF2-40B4-BE49-F238E27FC236}">
+                <a16:creationId xmlns:a16="http://schemas.microsoft.com/office/drawing/2014/main" id="{21B6014A-F20A-47C8-AA65-7B5FE9E2816E}"/>
+              </a:ext>
+            </a:extLst>
+          </p:cNvPr>
+          <p:cNvSpPr>
+            <a:spLocks xmlns:a="http://schemas.openxmlformats.org/drawingml/2006/main" noGrp="1"/>
+          </p:cNvSpPr>
+          <p:nvPr/>
+        </p:nvSpPr>
+        <p:spPr>
+          <a:xfrm xmlns:a="http://schemas.openxmlformats.org/drawingml/2006/main">
+            <a:off x="762000" y="4686300"/>
+            <a:ext cx="76200" cy="76200"/>
+          </a:xfrm>
+          <a:prstGeom xmlns:a="http://schemas.openxmlformats.org/drawingml/2006/main" prst="rect">
+            <a:avLst/>
+          </a:prstGeom>
+          <a:solidFill xmlns:a="http://schemas.openxmlformats.org/drawingml/2006/main">
+            <a:srgbClr val="000000"/>
+          </a:solidFill>
+          <a:ln xmlns:a="http://schemas.openxmlformats.org/drawingml/2006/main" w="0">
+            <a:noFill/>
+            <a:prstDash val="solid"/>
+          </a:ln>
+        </p:spPr>
+        <p:txBody xmlns:a="http://schemas.openxmlformats.org/drawingml/2006/main">
+          <a:bodyPr/>
+          <a:p/>
+        </p:txBody>
       </p:sp>
       <p:sp>
         <p:nvSpPr>
@@ -8915,7 +10019,7 @@
                   <a:srgbClr val="555555"/>
                 </a:solidFill>
               </a:rPr>
-              <a:t>calmmm demo package / 7</a:t>
+              <a:t>calmmm demo package / 8</a:t>
             </a:r>
           </a:p>
         </p:txBody>

--- a/outputs/calmmm_demo_walkthrough.pptx
+++ b/outputs/calmmm_demo_walkthrough.pptx
@@ -11,6 +11,7 @@
     <p:sldId id="259" r:id="rId10"/>
     <p:sldId id="260" r:id="rId11"/>
     <p:sldId id="261" r:id="rId12"/>
+    <p:sldId id="262" r:id="rId13"/>
   </p:sldIdLst>
   <p:sldSz cx="12192000" cy="6858000" type="screen4x3"/>
   <p:notesSz cx="6858000" cy="9144000"/>
@@ -5537,495 +5538,57 @@
           </a:p>
         </p:txBody>
       </p:sp>
-      <p:sp>
-        <p:nvSpPr>
-          <p:cNvPr id="5" name="Rectangle 4"/>
-          <p:cNvSpPr/>
-          <p:nvPr/>
-        </p:nvSpPr>
+      <p:pic>
+        <p:nvPicPr>
+          <p:cNvPr id="5" name="Picture 4" descr="calibration_search.png"/>
+          <p:cNvPicPr>
+            <a:picLocks noChangeAspect="1"/>
+          </p:cNvPicPr>
+          <p:nvPr/>
+        </p:nvPicPr>
+        <p:blipFill>
+          <a:blip r:embed="rId2"/>
+          <a:stretch>
+            <a:fillRect/>
+          </a:stretch>
+        </p:blipFill>
         <p:spPr>
           <a:xfrm>
             <a:off x="400050" y="2971800"/>
-            <a:ext cx="5495000" cy="2600000"/>
-          </a:xfrm>
-          <a:prstGeom prst="rect">
-            <a:avLst/>
-          </a:prstGeom>
-          <a:solidFill>
-            <a:srgbClr val="EDEDED"/>
-          </a:solidFill>
-          <a:ln>
-            <a:noFill/>
-          </a:ln>
-        </p:spPr>
-        <p:style>
-          <a:lnRef idx="1">
-            <a:schemeClr val="accent1"/>
-          </a:lnRef>
-          <a:fillRef idx="3">
-            <a:schemeClr val="accent1"/>
-          </a:fillRef>
-          <a:effectRef idx="2">
-            <a:schemeClr val="accent1"/>
-          </a:effectRef>
-          <a:fontRef idx="minor">
-            <a:schemeClr val="lt1"/>
-          </a:fontRef>
-        </p:style>
-        <p:txBody>
-          <a:bodyPr rtlCol="0" anchor="ctr"/>
-          <a:lstStyle/>
-          <a:p>
-            <a:pPr algn="ctr"/>
-          </a:p>
-        </p:txBody>
-      </p:sp>
-      <p:sp>
-        <p:nvSpPr>
-          <p:cNvPr id="6" name="Rectangle 5"/>
-          <p:cNvSpPr/>
-          <p:nvPr/>
-        </p:nvSpPr>
-        <p:spPr>
-          <a:xfrm>
-            <a:off x="571500" y="3171800"/>
-            <a:ext cx="5152100" cy="300000"/>
-          </a:xfrm>
-          <a:prstGeom prst="rect">
-            <a:avLst/>
-          </a:prstGeom>
-          <a:noFill/>
-          <a:ln>
-            <a:noFill/>
-          </a:ln>
-        </p:spPr>
-        <p:style>
-          <a:lnRef idx="1">
-            <a:schemeClr val="accent1"/>
-          </a:lnRef>
-          <a:fillRef idx="3">
-            <a:schemeClr val="accent1"/>
-          </a:fillRef>
-          <a:effectRef idx="2">
-            <a:schemeClr val="accent1"/>
-          </a:effectRef>
-          <a:fontRef idx="minor">
-            <a:schemeClr val="lt1"/>
-          </a:fontRef>
-        </p:style>
-        <p:txBody>
-          <a:bodyPr rtlCol="0" anchor="ctr" wrap="square"/>
-          <a:lstStyle/>
-          <a:p>
-            <a:pPr algn="l"/>
-            <a:r>
-              <a:rPr sz="1350" b="1">
-                <a:solidFill>
-                  <a:srgbClr val="000000"/>
-                </a:solidFill>
-                <a:latin typeface="Calibri"/>
-              </a:rPr>
-              <a:t>SEARCH EXPERIMENT</a:t>
-            </a:r>
-          </a:p>
-        </p:txBody>
-      </p:sp>
+            <a:ext cx="5495000" cy="2077787"/>
+          </a:xfrm>
+          <a:prstGeom prst="rect">
+            <a:avLst/>
+          </a:prstGeom>
+        </p:spPr>
+      </p:pic>
+      <p:pic>
+        <p:nvPicPr>
+          <p:cNvPr id="6" name="Picture 5" descr="calibration_direct_mail.png"/>
+          <p:cNvPicPr>
+            <a:picLocks noChangeAspect="1"/>
+          </p:cNvPicPr>
+          <p:nvPr/>
+        </p:nvPicPr>
+        <p:blipFill>
+          <a:blip r:embed="rId3"/>
+          <a:stretch>
+            <a:fillRect/>
+          </a:stretch>
+        </p:blipFill>
+        <p:spPr>
+          <a:xfrm>
+            <a:off x="6195050" y="2971800"/>
+            <a:ext cx="5495000" cy="2077787"/>
+          </a:xfrm>
+          <a:prstGeom prst="rect">
+            <a:avLst/>
+          </a:prstGeom>
+        </p:spPr>
+      </p:pic>
       <p:sp>
         <p:nvSpPr>
           <p:cNvPr id="7" name="Rectangle 6"/>
-          <p:cNvSpPr/>
-          <p:nvPr/>
-        </p:nvSpPr>
-        <p:spPr>
-          <a:xfrm>
-            <a:off x="571500" y="3571800"/>
-            <a:ext cx="5152100" cy="300000"/>
-          </a:xfrm>
-          <a:prstGeom prst="rect">
-            <a:avLst/>
-          </a:prstGeom>
-          <a:noFill/>
-          <a:ln>
-            <a:noFill/>
-          </a:ln>
-        </p:spPr>
-        <p:style>
-          <a:lnRef idx="1">
-            <a:schemeClr val="accent1"/>
-          </a:lnRef>
-          <a:fillRef idx="3">
-            <a:schemeClr val="accent1"/>
-          </a:fillRef>
-          <a:effectRef idx="2">
-            <a:schemeClr val="accent1"/>
-          </a:effectRef>
-          <a:fontRef idx="minor">
-            <a:schemeClr val="lt1"/>
-          </a:fontRef>
-        </p:style>
-        <p:txBody>
-          <a:bodyPr rtlCol="0" anchor="ctr" wrap="square"/>
-          <a:lstStyle/>
-          <a:p>
-            <a:pPr algn="l"/>
-            <a:r>
-              <a:rPr sz="1100" b="0">
-                <a:solidFill>
-                  <a:srgbClr val="555555"/>
-                </a:solidFill>
-                <a:latin typeface="Calibri"/>
-              </a:rPr>
-              <a:t>Northeast &amp; West · April 2024</a:t>
-            </a:r>
-          </a:p>
-        </p:txBody>
-      </p:sp>
-      <p:sp>
-        <p:nvSpPr>
-          <p:cNvPr id="8" name="Rectangle 7"/>
-          <p:cNvSpPr/>
-          <p:nvPr/>
-        </p:nvSpPr>
-        <p:spPr>
-          <a:xfrm>
-            <a:off x="571500" y="3971800"/>
-            <a:ext cx="5152100" cy="700000"/>
-          </a:xfrm>
-          <a:prstGeom prst="rect">
-            <a:avLst/>
-          </a:prstGeom>
-          <a:noFill/>
-          <a:ln>
-            <a:noFill/>
-          </a:ln>
-        </p:spPr>
-        <p:style>
-          <a:lnRef idx="1">
-            <a:schemeClr val="accent1"/>
-          </a:lnRef>
-          <a:fillRef idx="3">
-            <a:schemeClr val="accent1"/>
-          </a:fillRef>
-          <a:effectRef idx="2">
-            <a:schemeClr val="accent1"/>
-          </a:effectRef>
-          <a:fontRef idx="minor">
-            <a:schemeClr val="lt1"/>
-          </a:fontRef>
-        </p:style>
-        <p:txBody>
-          <a:bodyPr rtlCol="0" anchor="ctr" wrap="square"/>
-          <a:lstStyle/>
-          <a:p>
-            <a:pPr algn="l"/>
-            <a:r>
-              <a:rPr sz="1250" b="0">
-                <a:solidFill>
-                  <a:srgbClr val="000000"/>
-                </a:solidFill>
-                <a:latin typeface="Calibri"/>
-              </a:rPr>
-              <a:t>Search spend was held back in two regions for four weeks, and we measured the real change in applications.</a:t>
-            </a:r>
-          </a:p>
-        </p:txBody>
-      </p:sp>
-      <p:sp>
-        <p:nvSpPr>
-          <p:cNvPr id="9" name="Rectangle 8"/>
-          <p:cNvSpPr/>
-          <p:nvPr/>
-        </p:nvSpPr>
-        <p:spPr>
-          <a:xfrm>
-            <a:off x="571500" y="4871800"/>
-            <a:ext cx="5152100" cy="500000"/>
-          </a:xfrm>
-          <a:prstGeom prst="rect">
-            <a:avLst/>
-          </a:prstGeom>
-          <a:noFill/>
-          <a:ln>
-            <a:noFill/>
-          </a:ln>
-        </p:spPr>
-        <p:style>
-          <a:lnRef idx="1">
-            <a:schemeClr val="accent1"/>
-          </a:lnRef>
-          <a:fillRef idx="3">
-            <a:schemeClr val="accent1"/>
-          </a:fillRef>
-          <a:effectRef idx="2">
-            <a:schemeClr val="accent1"/>
-          </a:effectRef>
-          <a:fontRef idx="minor">
-            <a:schemeClr val="lt1"/>
-          </a:fontRef>
-        </p:style>
-        <p:txBody>
-          <a:bodyPr rtlCol="0" anchor="ctr" wrap="square"/>
-          <a:lstStyle/>
-          <a:p>
-            <a:pPr algn="l"/>
-            <a:r>
-              <a:rPr sz="1250" b="1">
-                <a:solidFill>
-                  <a:srgbClr val="000000"/>
-                </a:solidFill>
-                <a:latin typeface="Calibri"/>
-              </a:rPr>
-              <a:t>Result: the model's prediction now closely matches the real-world outcome.</a:t>
-            </a:r>
-          </a:p>
-        </p:txBody>
-      </p:sp>
-      <p:sp>
-        <p:nvSpPr>
-          <p:cNvPr id="10" name="Rectangle 9"/>
-          <p:cNvSpPr/>
-          <p:nvPr/>
-        </p:nvSpPr>
-        <p:spPr>
-          <a:xfrm>
-            <a:off x="6195050" y="2971800"/>
-            <a:ext cx="5495000" cy="2600000"/>
-          </a:xfrm>
-          <a:prstGeom prst="rect">
-            <a:avLst/>
-          </a:prstGeom>
-          <a:solidFill>
-            <a:srgbClr val="FFE7DD"/>
-          </a:solidFill>
-          <a:ln>
-            <a:noFill/>
-          </a:ln>
-        </p:spPr>
-        <p:style>
-          <a:lnRef idx="1">
-            <a:schemeClr val="accent1"/>
-          </a:lnRef>
-          <a:fillRef idx="3">
-            <a:schemeClr val="accent1"/>
-          </a:fillRef>
-          <a:effectRef idx="2">
-            <a:schemeClr val="accent1"/>
-          </a:effectRef>
-          <a:fontRef idx="minor">
-            <a:schemeClr val="lt1"/>
-          </a:fontRef>
-        </p:style>
-        <p:txBody>
-          <a:bodyPr rtlCol="0" anchor="ctr"/>
-          <a:lstStyle/>
-          <a:p>
-            <a:pPr algn="ctr"/>
-          </a:p>
-        </p:txBody>
-      </p:sp>
-      <p:sp>
-        <p:nvSpPr>
-          <p:cNvPr id="11" name="Rectangle 10"/>
-          <p:cNvSpPr/>
-          <p:nvPr/>
-        </p:nvSpPr>
-        <p:spPr>
-          <a:xfrm>
-            <a:off x="6366500" y="3171800"/>
-            <a:ext cx="5152100" cy="300000"/>
-          </a:xfrm>
-          <a:prstGeom prst="rect">
-            <a:avLst/>
-          </a:prstGeom>
-          <a:noFill/>
-          <a:ln>
-            <a:noFill/>
-          </a:ln>
-        </p:spPr>
-        <p:style>
-          <a:lnRef idx="1">
-            <a:schemeClr val="accent1"/>
-          </a:lnRef>
-          <a:fillRef idx="3">
-            <a:schemeClr val="accent1"/>
-          </a:fillRef>
-          <a:effectRef idx="2">
-            <a:schemeClr val="accent1"/>
-          </a:effectRef>
-          <a:fontRef idx="minor">
-            <a:schemeClr val="lt1"/>
-          </a:fontRef>
-        </p:style>
-        <p:txBody>
-          <a:bodyPr rtlCol="0" anchor="ctr" wrap="square"/>
-          <a:lstStyle/>
-          <a:p>
-            <a:pPr algn="l"/>
-            <a:r>
-              <a:rPr sz="1350" b="1">
-                <a:solidFill>
-                  <a:srgbClr val="000000"/>
-                </a:solidFill>
-                <a:latin typeface="Calibri"/>
-              </a:rPr>
-              <a:t>DIRECT MAIL EXPERIMENT</a:t>
-            </a:r>
-          </a:p>
-        </p:txBody>
-      </p:sp>
-      <p:sp>
-        <p:nvSpPr>
-          <p:cNvPr id="12" name="Rectangle 11"/>
-          <p:cNvSpPr/>
-          <p:nvPr/>
-        </p:nvSpPr>
-        <p:spPr>
-          <a:xfrm>
-            <a:off x="6366500" y="3571800"/>
-            <a:ext cx="5152100" cy="300000"/>
-          </a:xfrm>
-          <a:prstGeom prst="rect">
-            <a:avLst/>
-          </a:prstGeom>
-          <a:noFill/>
-          <a:ln>
-            <a:noFill/>
-          </a:ln>
-        </p:spPr>
-        <p:style>
-          <a:lnRef idx="1">
-            <a:schemeClr val="accent1"/>
-          </a:lnRef>
-          <a:fillRef idx="3">
-            <a:schemeClr val="accent1"/>
-          </a:fillRef>
-          <a:effectRef idx="2">
-            <a:schemeClr val="accent1"/>
-          </a:effectRef>
-          <a:fontRef idx="minor">
-            <a:schemeClr val="lt1"/>
-          </a:fontRef>
-        </p:style>
-        <p:txBody>
-          <a:bodyPr rtlCol="0" anchor="ctr" wrap="square"/>
-          <a:lstStyle/>
-          <a:p>
-            <a:pPr algn="l"/>
-            <a:r>
-              <a:rPr sz="1100" b="0">
-                <a:solidFill>
-                  <a:srgbClr val="555555"/>
-                </a:solidFill>
-                <a:latin typeface="Calibri"/>
-              </a:rPr>
-              <a:t>Southeast &amp; Midwest · Aug 2024</a:t>
-            </a:r>
-          </a:p>
-        </p:txBody>
-      </p:sp>
-      <p:sp>
-        <p:nvSpPr>
-          <p:cNvPr id="13" name="Rectangle 12"/>
-          <p:cNvSpPr/>
-          <p:nvPr/>
-        </p:nvSpPr>
-        <p:spPr>
-          <a:xfrm>
-            <a:off x="6366500" y="3971800"/>
-            <a:ext cx="5152100" cy="700000"/>
-          </a:xfrm>
-          <a:prstGeom prst="rect">
-            <a:avLst/>
-          </a:prstGeom>
-          <a:noFill/>
-          <a:ln>
-            <a:noFill/>
-          </a:ln>
-        </p:spPr>
-        <p:style>
-          <a:lnRef idx="1">
-            <a:schemeClr val="accent1"/>
-          </a:lnRef>
-          <a:fillRef idx="3">
-            <a:schemeClr val="accent1"/>
-          </a:fillRef>
-          <a:effectRef idx="2">
-            <a:schemeClr val="accent1"/>
-          </a:effectRef>
-          <a:fontRef idx="minor">
-            <a:schemeClr val="lt1"/>
-          </a:fontRef>
-        </p:style>
-        <p:txBody>
-          <a:bodyPr rtlCol="0" anchor="ctr" wrap="square"/>
-          <a:lstStyle/>
-          <a:p>
-            <a:pPr algn="l"/>
-            <a:r>
-              <a:rPr sz="1250" b="0">
-                <a:solidFill>
-                  <a:srgbClr val="000000"/>
-                </a:solidFill>
-                <a:latin typeface="Calibri"/>
-              </a:rPr>
-              <a:t>Matched markets with and without direct mail were compared to measure the real change in funded revenue.</a:t>
-            </a:r>
-          </a:p>
-        </p:txBody>
-      </p:sp>
-      <p:sp>
-        <p:nvSpPr>
-          <p:cNvPr id="14" name="Rectangle 13"/>
-          <p:cNvSpPr/>
-          <p:nvPr/>
-        </p:nvSpPr>
-        <p:spPr>
-          <a:xfrm>
-            <a:off x="6366500" y="4871800"/>
-            <a:ext cx="5152100" cy="500000"/>
-          </a:xfrm>
-          <a:prstGeom prst="rect">
-            <a:avLst/>
-          </a:prstGeom>
-          <a:noFill/>
-          <a:ln>
-            <a:noFill/>
-          </a:ln>
-        </p:spPr>
-        <p:style>
-          <a:lnRef idx="1">
-            <a:schemeClr val="accent1"/>
-          </a:lnRef>
-          <a:fillRef idx="3">
-            <a:schemeClr val="accent1"/>
-          </a:fillRef>
-          <a:effectRef idx="2">
-            <a:schemeClr val="accent1"/>
-          </a:effectRef>
-          <a:fontRef idx="minor">
-            <a:schemeClr val="lt1"/>
-          </a:fontRef>
-        </p:style>
-        <p:txBody>
-          <a:bodyPr rtlCol="0" anchor="ctr" wrap="square"/>
-          <a:lstStyle/>
-          <a:p>
-            <a:pPr algn="l"/>
-            <a:r>
-              <a:rPr sz="1250" b="1">
-                <a:solidFill>
-                  <a:srgbClr val="000000"/>
-                </a:solidFill>
-                <a:latin typeface="Calibri"/>
-              </a:rPr>
-              <a:t>Result: closer than before, but not yet fully aligned — still under review.</a:t>
-            </a:r>
-          </a:p>
-        </p:txBody>
-      </p:sp>
-      <p:sp>
-        <p:nvSpPr>
-          <p:cNvPr id="15" name="Rectangle 14"/>
           <p:cNvSpPr/>
           <p:nvPr/>
         </p:nvSpPr>
@@ -6068,7 +5631,7 @@
       </p:sp>
       <p:sp>
         <p:nvSpPr>
-          <p:cNvPr id="16" name="Rectangle 15"/>
+          <p:cNvPr id="8" name="Rectangle 7"/>
           <p:cNvSpPr/>
           <p:nvPr/>
         </p:nvSpPr>
@@ -6921,6 +6484,56 @@
         </p:nvSpPr>
         <p:spPr>
           <a:xfrm>
+            <a:off x="3900050" y="5000000"/>
+            <a:ext cx="7700000" cy="1200000"/>
+          </a:xfrm>
+          <a:prstGeom prst="rect">
+            <a:avLst/>
+          </a:prstGeom>
+          <a:noFill/>
+          <a:ln>
+            <a:noFill/>
+          </a:ln>
+        </p:spPr>
+        <p:style>
+          <a:lnRef idx="1">
+            <a:schemeClr val="accent1"/>
+          </a:lnRef>
+          <a:fillRef idx="3">
+            <a:schemeClr val="accent1"/>
+          </a:fillRef>
+          <a:effectRef idx="2">
+            <a:schemeClr val="accent1"/>
+          </a:effectRef>
+          <a:fontRef idx="minor">
+            <a:schemeClr val="lt1"/>
+          </a:fontRef>
+        </p:style>
+        <p:txBody>
+          <a:bodyPr rtlCol="0" anchor="ctr" wrap="square"/>
+          <a:lstStyle/>
+          <a:p>
+            <a:pPr algn="l"/>
+            <a:r>
+              <a:rPr sz="1400" b="0">
+                <a:solidFill>
+                  <a:srgbClr val="555555"/>
+                </a:solidFill>
+                <a:latin typeface="Calibri"/>
+              </a:rPr>
+              <a:t>See the next page for what this improvement looks like week by week.</a:t>
+            </a:r>
+          </a:p>
+        </p:txBody>
+      </p:sp>
+      <p:sp>
+        <p:nvSpPr>
+          <p:cNvPr id="19" name="Rectangle 18"/>
+          <p:cNvSpPr/>
+          <p:nvPr/>
+        </p:nvSpPr>
+        <p:spPr>
+          <a:xfrm>
             <a:off x="400050" y="6286500"/>
             <a:ext cx="11391900" cy="9525"/>
           </a:xfrm>
@@ -6958,7 +6571,7 @@
       </p:sp>
       <p:sp>
         <p:nvSpPr>
-          <p:cNvPr id="19" name="Rectangle 18"/>
+          <p:cNvPr id="20" name="Rectangle 19"/>
           <p:cNvSpPr/>
           <p:nvPr/>
         </p:nvSpPr>
@@ -7069,7 +6682,7 @@
                 </a:solidFill>
                 <a:latin typeface="Calibri"/>
               </a:rPr>
-              <a:t>CHANNEL ROI</a:t>
+              <a:t>SEE IT WORK</a:t>
             </a:r>
           </a:p>
         </p:txBody>
@@ -7119,7 +6732,7 @@
                 </a:solidFill>
                 <a:latin typeface="Calibri Light"/>
               </a:rPr>
-              <a:t>Search and Social show the strongest validated return</a:t>
+              <a:t>The model's fitted line tracks real application volume</a:t>
             </a:r>
           </a:p>
         </p:txBody>
@@ -7169,61 +6782,35 @@
                 </a:solidFill>
                 <a:latin typeface="Calibri"/>
               </a:rPr>
-              <a:t>Revenue return per dollar spent, with confidence based on how well each channel's results match independent evidence.</a:t>
-            </a:r>
-          </a:p>
-        </p:txBody>
-      </p:sp>
-      <p:sp>
-        <p:nvSpPr>
-          <p:cNvPr id="5" name="Rectangle 4"/>
-          <p:cNvSpPr/>
-          <p:nvPr/>
-        </p:nvSpPr>
-        <p:spPr>
-          <a:xfrm>
-            <a:off x="400050" y="2971800"/>
-            <a:ext cx="2400000" cy="300000"/>
-          </a:xfrm>
-          <a:prstGeom prst="rect">
-            <a:avLst/>
-          </a:prstGeom>
-          <a:noFill/>
-          <a:ln>
-            <a:noFill/>
-          </a:ln>
-        </p:spPr>
-        <p:style>
-          <a:lnRef idx="1">
-            <a:schemeClr val="accent1"/>
-          </a:lnRef>
-          <a:fillRef idx="3">
-            <a:schemeClr val="accent1"/>
-          </a:fillRef>
-          <a:effectRef idx="2">
-            <a:schemeClr val="accent1"/>
-          </a:effectRef>
-          <a:fontRef idx="minor">
-            <a:schemeClr val="lt1"/>
-          </a:fontRef>
-        </p:style>
-        <p:txBody>
-          <a:bodyPr rtlCol="0" anchor="ctr" wrap="square"/>
-          <a:lstStyle/>
-          <a:p>
-            <a:pPr algn="l"/>
-            <a:r>
-              <a:rPr sz="1100" b="1">
-                <a:solidFill>
-                  <a:srgbClr val="555555"/>
-                </a:solidFill>
-                <a:latin typeface="Calibri"/>
-              </a:rPr>
-              <a:t>CHANNEL</a:t>
-            </a:r>
-          </a:p>
-        </p:txBody>
-      </p:sp>
+              <a:t>Every week, every region, summed to a national view — this is what a 96% accuracy score looks like in practice.</a:t>
+            </a:r>
+          </a:p>
+        </p:txBody>
+      </p:sp>
+      <p:pic>
+        <p:nvPicPr>
+          <p:cNvPr id="5" name="Picture 4" descr="fit_line_applications.png"/>
+          <p:cNvPicPr>
+            <a:picLocks noChangeAspect="1"/>
+          </p:cNvPicPr>
+          <p:nvPr/>
+        </p:nvPicPr>
+        <p:blipFill>
+          <a:blip r:embed="rId2"/>
+          <a:stretch>
+            <a:fillRect/>
+          </a:stretch>
+        </p:blipFill>
+        <p:spPr>
+          <a:xfrm>
+            <a:off x="2254419" y="2650000"/>
+            <a:ext cx="7683161" cy="3586475"/>
+          </a:xfrm>
+          <a:prstGeom prst="rect">
+            <a:avLst/>
+          </a:prstGeom>
+        </p:spPr>
+      </p:pic>
       <p:sp>
         <p:nvSpPr>
           <p:cNvPr id="6" name="Rectangle 5"/>
@@ -7232,107 +6819,7 @@
         </p:nvSpPr>
         <p:spPr>
           <a:xfrm>
-            <a:off x="2971800" y="2971800"/>
-            <a:ext cx="1900000" cy="300000"/>
-          </a:xfrm>
-          <a:prstGeom prst="rect">
-            <a:avLst/>
-          </a:prstGeom>
-          <a:noFill/>
-          <a:ln>
-            <a:noFill/>
-          </a:ln>
-        </p:spPr>
-        <p:style>
-          <a:lnRef idx="1">
-            <a:schemeClr val="accent1"/>
-          </a:lnRef>
-          <a:fillRef idx="3">
-            <a:schemeClr val="accent1"/>
-          </a:fillRef>
-          <a:effectRef idx="2">
-            <a:schemeClr val="accent1"/>
-          </a:effectRef>
-          <a:fontRef idx="minor">
-            <a:schemeClr val="lt1"/>
-          </a:fontRef>
-        </p:style>
-        <p:txBody>
-          <a:bodyPr rtlCol="0" anchor="ctr" wrap="square"/>
-          <a:lstStyle/>
-          <a:p>
-            <a:pPr algn="l"/>
-            <a:r>
-              <a:rPr sz="1100" b="1">
-                <a:solidFill>
-                  <a:srgbClr val="555555"/>
-                </a:solidFill>
-                <a:latin typeface="Calibri"/>
-              </a:rPr>
-              <a:t>REVENUE ROI</a:t>
-            </a:r>
-          </a:p>
-        </p:txBody>
-      </p:sp>
-      <p:sp>
-        <p:nvSpPr>
-          <p:cNvPr id="7" name="Rectangle 6"/>
-          <p:cNvSpPr/>
-          <p:nvPr/>
-        </p:nvSpPr>
-        <p:spPr>
-          <a:xfrm>
-            <a:off x="5000000" y="2971800"/>
-            <a:ext cx="6391900" cy="300000"/>
-          </a:xfrm>
-          <a:prstGeom prst="rect">
-            <a:avLst/>
-          </a:prstGeom>
-          <a:noFill/>
-          <a:ln>
-            <a:noFill/>
-          </a:ln>
-        </p:spPr>
-        <p:style>
-          <a:lnRef idx="1">
-            <a:schemeClr val="accent1"/>
-          </a:lnRef>
-          <a:fillRef idx="3">
-            <a:schemeClr val="accent1"/>
-          </a:fillRef>
-          <a:effectRef idx="2">
-            <a:schemeClr val="accent1"/>
-          </a:effectRef>
-          <a:fontRef idx="minor">
-            <a:schemeClr val="lt1"/>
-          </a:fontRef>
-        </p:style>
-        <p:txBody>
-          <a:bodyPr rtlCol="0" anchor="ctr" wrap="square"/>
-          <a:lstStyle/>
-          <a:p>
-            <a:pPr algn="l"/>
-            <a:r>
-              <a:rPr sz="1100" b="1">
-                <a:solidFill>
-                  <a:srgbClr val="555555"/>
-                </a:solidFill>
-                <a:latin typeface="Calibri"/>
-              </a:rPr>
-              <a:t>CONFIDENCE</a:t>
-            </a:r>
-          </a:p>
-        </p:txBody>
-      </p:sp>
-      <p:sp>
-        <p:nvSpPr>
-          <p:cNvPr id="8" name="Rectangle 7"/>
-          <p:cNvSpPr/>
-          <p:nvPr/>
-        </p:nvSpPr>
-        <p:spPr>
-          <a:xfrm>
-            <a:off x="400050" y="3351800"/>
+            <a:off x="400050" y="6286500"/>
             <a:ext cx="11391900" cy="9525"/>
           </a:xfrm>
           <a:prstGeom prst="rect">
@@ -7369,994 +6856,7 @@
       </p:sp>
       <p:sp>
         <p:nvSpPr>
-          <p:cNvPr id="9" name="Rectangle 8"/>
-          <p:cNvSpPr/>
-          <p:nvPr/>
-        </p:nvSpPr>
-        <p:spPr>
-          <a:xfrm>
-            <a:off x="400050" y="3471800"/>
-            <a:ext cx="2400000" cy="500000"/>
-          </a:xfrm>
-          <a:prstGeom prst="rect">
-            <a:avLst/>
-          </a:prstGeom>
-          <a:noFill/>
-          <a:ln>
-            <a:noFill/>
-          </a:ln>
-        </p:spPr>
-        <p:style>
-          <a:lnRef idx="1">
-            <a:schemeClr val="accent1"/>
-          </a:lnRef>
-          <a:fillRef idx="3">
-            <a:schemeClr val="accent1"/>
-          </a:fillRef>
-          <a:effectRef idx="2">
-            <a:schemeClr val="accent1"/>
-          </a:effectRef>
-          <a:fontRef idx="minor">
-            <a:schemeClr val="lt1"/>
-          </a:fontRef>
-        </p:style>
-        <p:txBody>
-          <a:bodyPr rtlCol="0" anchor="ctr" wrap="square"/>
-          <a:lstStyle/>
-          <a:p>
-            <a:pPr algn="l"/>
-            <a:r>
-              <a:rPr sz="1500" b="1">
-                <a:solidFill>
-                  <a:srgbClr val="000000"/>
-                </a:solidFill>
-                <a:latin typeface="Calibri"/>
-              </a:rPr>
-              <a:t>Search</a:t>
-            </a:r>
-          </a:p>
-        </p:txBody>
-      </p:sp>
-      <p:sp>
-        <p:nvSpPr>
-          <p:cNvPr id="10" name="Rectangle 9"/>
-          <p:cNvSpPr/>
-          <p:nvPr/>
-        </p:nvSpPr>
-        <p:spPr>
-          <a:xfrm>
-            <a:off x="2971800" y="3471800"/>
-            <a:ext cx="1900000" cy="500000"/>
-          </a:xfrm>
-          <a:prstGeom prst="rect">
-            <a:avLst/>
-          </a:prstGeom>
-          <a:noFill/>
-          <a:ln>
-            <a:noFill/>
-          </a:ln>
-        </p:spPr>
-        <p:style>
-          <a:lnRef idx="1">
-            <a:schemeClr val="accent1"/>
-          </a:lnRef>
-          <a:fillRef idx="3">
-            <a:schemeClr val="accent1"/>
-          </a:fillRef>
-          <a:effectRef idx="2">
-            <a:schemeClr val="accent1"/>
-          </a:effectRef>
-          <a:fontRef idx="minor">
-            <a:schemeClr val="lt1"/>
-          </a:fontRef>
-        </p:style>
-        <p:txBody>
-          <a:bodyPr rtlCol="0" anchor="ctr" wrap="square"/>
-          <a:lstStyle/>
-          <a:p>
-            <a:pPr algn="l"/>
-            <a:r>
-              <a:rPr sz="1500" b="1">
-                <a:solidFill>
-                  <a:srgbClr val="000000"/>
-                </a:solidFill>
-                <a:latin typeface="Calibri"/>
-              </a:rPr>
-              <a:t>$3.95 per $1</a:t>
-            </a:r>
-          </a:p>
-        </p:txBody>
-      </p:sp>
-      <p:sp>
-        <p:nvSpPr>
-          <p:cNvPr id="11" name="Rectangle 10"/>
-          <p:cNvSpPr/>
-          <p:nvPr/>
-        </p:nvSpPr>
-        <p:spPr>
-          <a:xfrm>
-            <a:off x="5000000" y="3501800"/>
-            <a:ext cx="76200" cy="76200"/>
-          </a:xfrm>
-          <a:prstGeom prst="rect">
-            <a:avLst/>
-          </a:prstGeom>
-          <a:solidFill>
-            <a:srgbClr val="000000"/>
-          </a:solidFill>
-          <a:ln>
-            <a:noFill/>
-          </a:ln>
-        </p:spPr>
-        <p:style>
-          <a:lnRef idx="1">
-            <a:schemeClr val="accent1"/>
-          </a:lnRef>
-          <a:fillRef idx="3">
-            <a:schemeClr val="accent1"/>
-          </a:fillRef>
-          <a:effectRef idx="2">
-            <a:schemeClr val="accent1"/>
-          </a:effectRef>
-          <a:fontRef idx="minor">
-            <a:schemeClr val="lt1"/>
-          </a:fontRef>
-        </p:style>
-        <p:txBody>
-          <a:bodyPr rtlCol="0" anchor="ctr"/>
-          <a:lstStyle/>
-          <a:p>
-            <a:pPr algn="ctr"/>
-          </a:p>
-        </p:txBody>
-      </p:sp>
-      <p:sp>
-        <p:nvSpPr>
-          <p:cNvPr id="12" name="Rectangle 11"/>
-          <p:cNvSpPr/>
-          <p:nvPr/>
-        </p:nvSpPr>
-        <p:spPr>
-          <a:xfrm>
-            <a:off x="5209550" y="3441800"/>
-            <a:ext cx="6182350" cy="600000"/>
-          </a:xfrm>
-          <a:prstGeom prst="rect">
-            <a:avLst/>
-          </a:prstGeom>
-          <a:noFill/>
-          <a:ln>
-            <a:noFill/>
-          </a:ln>
-        </p:spPr>
-        <p:style>
-          <a:lnRef idx="1">
-            <a:schemeClr val="accent1"/>
-          </a:lnRef>
-          <a:fillRef idx="3">
-            <a:schemeClr val="accent1"/>
-          </a:fillRef>
-          <a:effectRef idx="2">
-            <a:schemeClr val="accent1"/>
-          </a:effectRef>
-          <a:fontRef idx="minor">
-            <a:schemeClr val="lt1"/>
-          </a:fontRef>
-        </p:style>
-        <p:txBody>
-          <a:bodyPr rtlCol="0" anchor="ctr" wrap="square"/>
-          <a:lstStyle/>
-          <a:p>
-            <a:pPr algn="l"/>
-            <a:r>
-              <a:rPr sz="1200" b="0">
-                <a:solidFill>
-                  <a:srgbClr val="555555"/>
-                </a:solidFill>
-                <a:latin typeface="Calibri"/>
-              </a:rPr>
-              <a:t>High — confirmed by live experiment</a:t>
-            </a:r>
-          </a:p>
-        </p:txBody>
-      </p:sp>
-      <p:sp>
-        <p:nvSpPr>
-          <p:cNvPr id="13" name="Rectangle 12"/>
-          <p:cNvSpPr/>
-          <p:nvPr/>
-        </p:nvSpPr>
-        <p:spPr>
-          <a:xfrm>
-            <a:off x="400050" y="4071800"/>
-            <a:ext cx="11391900" cy="9525"/>
-          </a:xfrm>
-          <a:prstGeom prst="rect">
-            <a:avLst/>
-          </a:prstGeom>
-          <a:solidFill>
-            <a:srgbClr val="E5E5E5"/>
-          </a:solidFill>
-          <a:ln>
-            <a:noFill/>
-          </a:ln>
-        </p:spPr>
-        <p:style>
-          <a:lnRef idx="1">
-            <a:schemeClr val="accent1"/>
-          </a:lnRef>
-          <a:fillRef idx="3">
-            <a:schemeClr val="accent1"/>
-          </a:fillRef>
-          <a:effectRef idx="2">
-            <a:schemeClr val="accent1"/>
-          </a:effectRef>
-          <a:fontRef idx="minor">
-            <a:schemeClr val="lt1"/>
-          </a:fontRef>
-        </p:style>
-        <p:txBody>
-          <a:bodyPr rtlCol="0" anchor="ctr"/>
-          <a:lstStyle/>
-          <a:p>
-            <a:pPr algn="ctr"/>
-          </a:p>
-        </p:txBody>
-      </p:sp>
-      <p:sp>
-        <p:nvSpPr>
-          <p:cNvPr id="14" name="Rectangle 13"/>
-          <p:cNvSpPr/>
-          <p:nvPr/>
-        </p:nvSpPr>
-        <p:spPr>
-          <a:xfrm>
-            <a:off x="400050" y="4271800"/>
-            <a:ext cx="2400000" cy="500000"/>
-          </a:xfrm>
-          <a:prstGeom prst="rect">
-            <a:avLst/>
-          </a:prstGeom>
-          <a:noFill/>
-          <a:ln>
-            <a:noFill/>
-          </a:ln>
-        </p:spPr>
-        <p:style>
-          <a:lnRef idx="1">
-            <a:schemeClr val="accent1"/>
-          </a:lnRef>
-          <a:fillRef idx="3">
-            <a:schemeClr val="accent1"/>
-          </a:fillRef>
-          <a:effectRef idx="2">
-            <a:schemeClr val="accent1"/>
-          </a:effectRef>
-          <a:fontRef idx="minor">
-            <a:schemeClr val="lt1"/>
-          </a:fontRef>
-        </p:style>
-        <p:txBody>
-          <a:bodyPr rtlCol="0" anchor="ctr" wrap="square"/>
-          <a:lstStyle/>
-          <a:p>
-            <a:pPr algn="l"/>
-            <a:r>
-              <a:rPr sz="1500" b="1">
-                <a:solidFill>
-                  <a:srgbClr val="000000"/>
-                </a:solidFill>
-                <a:latin typeface="Calibri"/>
-              </a:rPr>
-              <a:t>Social</a:t>
-            </a:r>
-          </a:p>
-        </p:txBody>
-      </p:sp>
-      <p:sp>
-        <p:nvSpPr>
-          <p:cNvPr id="15" name="Rectangle 14"/>
-          <p:cNvSpPr/>
-          <p:nvPr/>
-        </p:nvSpPr>
-        <p:spPr>
-          <a:xfrm>
-            <a:off x="2971800" y="4271800"/>
-            <a:ext cx="1900000" cy="500000"/>
-          </a:xfrm>
-          <a:prstGeom prst="rect">
-            <a:avLst/>
-          </a:prstGeom>
-          <a:noFill/>
-          <a:ln>
-            <a:noFill/>
-          </a:ln>
-        </p:spPr>
-        <p:style>
-          <a:lnRef idx="1">
-            <a:schemeClr val="accent1"/>
-          </a:lnRef>
-          <a:fillRef idx="3">
-            <a:schemeClr val="accent1"/>
-          </a:fillRef>
-          <a:effectRef idx="2">
-            <a:schemeClr val="accent1"/>
-          </a:effectRef>
-          <a:fontRef idx="minor">
-            <a:schemeClr val="lt1"/>
-          </a:fontRef>
-        </p:style>
-        <p:txBody>
-          <a:bodyPr rtlCol="0" anchor="ctr" wrap="square"/>
-          <a:lstStyle/>
-          <a:p>
-            <a:pPr algn="l"/>
-            <a:r>
-              <a:rPr sz="1500" b="1">
-                <a:solidFill>
-                  <a:srgbClr val="000000"/>
-                </a:solidFill>
-                <a:latin typeface="Calibri"/>
-              </a:rPr>
-              <a:t>$3.02 per $1</a:t>
-            </a:r>
-          </a:p>
-        </p:txBody>
-      </p:sp>
-      <p:sp>
-        <p:nvSpPr>
-          <p:cNvPr id="16" name="Rectangle 15"/>
-          <p:cNvSpPr/>
-          <p:nvPr/>
-        </p:nvSpPr>
-        <p:spPr>
-          <a:xfrm>
-            <a:off x="5000000" y="4301800"/>
-            <a:ext cx="76200" cy="76200"/>
-          </a:xfrm>
-          <a:prstGeom prst="rect">
-            <a:avLst/>
-          </a:prstGeom>
-          <a:solidFill>
-            <a:srgbClr val="000000"/>
-          </a:solidFill>
-          <a:ln>
-            <a:noFill/>
-          </a:ln>
-        </p:spPr>
-        <p:style>
-          <a:lnRef idx="1">
-            <a:schemeClr val="accent1"/>
-          </a:lnRef>
-          <a:fillRef idx="3">
-            <a:schemeClr val="accent1"/>
-          </a:fillRef>
-          <a:effectRef idx="2">
-            <a:schemeClr val="accent1"/>
-          </a:effectRef>
-          <a:fontRef idx="minor">
-            <a:schemeClr val="lt1"/>
-          </a:fontRef>
-        </p:style>
-        <p:txBody>
-          <a:bodyPr rtlCol="0" anchor="ctr"/>
-          <a:lstStyle/>
-          <a:p>
-            <a:pPr algn="ctr"/>
-          </a:p>
-        </p:txBody>
-      </p:sp>
-      <p:sp>
-        <p:nvSpPr>
-          <p:cNvPr id="17" name="Rectangle 16"/>
-          <p:cNvSpPr/>
-          <p:nvPr/>
-        </p:nvSpPr>
-        <p:spPr>
-          <a:xfrm>
-            <a:off x="5209550" y="4241800"/>
-            <a:ext cx="6182350" cy="600000"/>
-          </a:xfrm>
-          <a:prstGeom prst="rect">
-            <a:avLst/>
-          </a:prstGeom>
-          <a:noFill/>
-          <a:ln>
-            <a:noFill/>
-          </a:ln>
-        </p:spPr>
-        <p:style>
-          <a:lnRef idx="1">
-            <a:schemeClr val="accent1"/>
-          </a:lnRef>
-          <a:fillRef idx="3">
-            <a:schemeClr val="accent1"/>
-          </a:fillRef>
-          <a:effectRef idx="2">
-            <a:schemeClr val="accent1"/>
-          </a:effectRef>
-          <a:fontRef idx="minor">
-            <a:schemeClr val="lt1"/>
-          </a:fontRef>
-        </p:style>
-        <p:txBody>
-          <a:bodyPr rtlCol="0" anchor="ctr" wrap="square"/>
-          <a:lstStyle/>
-          <a:p>
-            <a:pPr algn="l"/>
-            <a:r>
-              <a:rPr sz="1200" b="0">
-                <a:solidFill>
-                  <a:srgbClr val="555555"/>
-                </a:solidFill>
-                <a:latin typeface="Calibri"/>
-              </a:rPr>
-              <a:t>High — stable across the full model</a:t>
-            </a:r>
-          </a:p>
-        </p:txBody>
-      </p:sp>
-      <p:sp>
-        <p:nvSpPr>
-          <p:cNvPr id="18" name="Rectangle 17"/>
-          <p:cNvSpPr/>
-          <p:nvPr/>
-        </p:nvSpPr>
-        <p:spPr>
-          <a:xfrm>
-            <a:off x="400050" y="4871800"/>
-            <a:ext cx="11391900" cy="9525"/>
-          </a:xfrm>
-          <a:prstGeom prst="rect">
-            <a:avLst/>
-          </a:prstGeom>
-          <a:solidFill>
-            <a:srgbClr val="E5E5E5"/>
-          </a:solidFill>
-          <a:ln>
-            <a:noFill/>
-          </a:ln>
-        </p:spPr>
-        <p:style>
-          <a:lnRef idx="1">
-            <a:schemeClr val="accent1"/>
-          </a:lnRef>
-          <a:fillRef idx="3">
-            <a:schemeClr val="accent1"/>
-          </a:fillRef>
-          <a:effectRef idx="2">
-            <a:schemeClr val="accent1"/>
-          </a:effectRef>
-          <a:fontRef idx="minor">
-            <a:schemeClr val="lt1"/>
-          </a:fontRef>
-        </p:style>
-        <p:txBody>
-          <a:bodyPr rtlCol="0" anchor="ctr"/>
-          <a:lstStyle/>
-          <a:p>
-            <a:pPr algn="ctr"/>
-          </a:p>
-        </p:txBody>
-      </p:sp>
-      <p:sp>
-        <p:nvSpPr>
-          <p:cNvPr id="19" name="Rectangle 18"/>
-          <p:cNvSpPr/>
-          <p:nvPr/>
-        </p:nvSpPr>
-        <p:spPr>
-          <a:xfrm>
-            <a:off x="400050" y="5071800"/>
-            <a:ext cx="2400000" cy="500000"/>
-          </a:xfrm>
-          <a:prstGeom prst="rect">
-            <a:avLst/>
-          </a:prstGeom>
-          <a:noFill/>
-          <a:ln>
-            <a:noFill/>
-          </a:ln>
-        </p:spPr>
-        <p:style>
-          <a:lnRef idx="1">
-            <a:schemeClr val="accent1"/>
-          </a:lnRef>
-          <a:fillRef idx="3">
-            <a:schemeClr val="accent1"/>
-          </a:fillRef>
-          <a:effectRef idx="2">
-            <a:schemeClr val="accent1"/>
-          </a:effectRef>
-          <a:fontRef idx="minor">
-            <a:schemeClr val="lt1"/>
-          </a:fontRef>
-        </p:style>
-        <p:txBody>
-          <a:bodyPr rtlCol="0" anchor="ctr" wrap="square"/>
-          <a:lstStyle/>
-          <a:p>
-            <a:pPr algn="l"/>
-            <a:r>
-              <a:rPr sz="1500" b="1">
-                <a:solidFill>
-                  <a:srgbClr val="000000"/>
-                </a:solidFill>
-                <a:latin typeface="Calibri"/>
-              </a:rPr>
-              <a:t>Direct Mail</a:t>
-            </a:r>
-          </a:p>
-        </p:txBody>
-      </p:sp>
-      <p:sp>
-        <p:nvSpPr>
-          <p:cNvPr id="20" name="Rectangle 19"/>
-          <p:cNvSpPr/>
-          <p:nvPr/>
-        </p:nvSpPr>
-        <p:spPr>
-          <a:xfrm>
-            <a:off x="2971800" y="5071800"/>
-            <a:ext cx="1900000" cy="500000"/>
-          </a:xfrm>
-          <a:prstGeom prst="rect">
-            <a:avLst/>
-          </a:prstGeom>
-          <a:noFill/>
-          <a:ln>
-            <a:noFill/>
-          </a:ln>
-        </p:spPr>
-        <p:style>
-          <a:lnRef idx="1">
-            <a:schemeClr val="accent1"/>
-          </a:lnRef>
-          <a:fillRef idx="3">
-            <a:schemeClr val="accent1"/>
-          </a:fillRef>
-          <a:effectRef idx="2">
-            <a:schemeClr val="accent1"/>
-          </a:effectRef>
-          <a:fontRef idx="minor">
-            <a:schemeClr val="lt1"/>
-          </a:fontRef>
-        </p:style>
-        <p:txBody>
-          <a:bodyPr rtlCol="0" anchor="ctr" wrap="square"/>
-          <a:lstStyle/>
-          <a:p>
-            <a:pPr algn="l"/>
-            <a:r>
-              <a:rPr sz="1500" b="1">
-                <a:solidFill>
-                  <a:srgbClr val="000000"/>
-                </a:solidFill>
-                <a:latin typeface="Calibri"/>
-              </a:rPr>
-              <a:t>$2.68 per $1</a:t>
-            </a:r>
-          </a:p>
-        </p:txBody>
-      </p:sp>
-      <p:sp>
-        <p:nvSpPr>
-          <p:cNvPr id="21" name="Rectangle 20"/>
-          <p:cNvSpPr/>
-          <p:nvPr/>
-        </p:nvSpPr>
-        <p:spPr>
-          <a:xfrm>
-            <a:off x="5000000" y="5101800"/>
-            <a:ext cx="76200" cy="76200"/>
-          </a:xfrm>
-          <a:prstGeom prst="rect">
-            <a:avLst/>
-          </a:prstGeom>
-          <a:solidFill>
-            <a:srgbClr val="FF6B35"/>
-          </a:solidFill>
-          <a:ln>
-            <a:noFill/>
-          </a:ln>
-        </p:spPr>
-        <p:style>
-          <a:lnRef idx="1">
-            <a:schemeClr val="accent1"/>
-          </a:lnRef>
-          <a:fillRef idx="3">
-            <a:schemeClr val="accent1"/>
-          </a:fillRef>
-          <a:effectRef idx="2">
-            <a:schemeClr val="accent1"/>
-          </a:effectRef>
-          <a:fontRef idx="minor">
-            <a:schemeClr val="lt1"/>
-          </a:fontRef>
-        </p:style>
-        <p:txBody>
-          <a:bodyPr rtlCol="0" anchor="ctr"/>
-          <a:lstStyle/>
-          <a:p>
-            <a:pPr algn="ctr"/>
-          </a:p>
-        </p:txBody>
-      </p:sp>
-      <p:sp>
-        <p:nvSpPr>
-          <p:cNvPr id="22" name="Rectangle 21"/>
-          <p:cNvSpPr/>
-          <p:nvPr/>
-        </p:nvSpPr>
-        <p:spPr>
-          <a:xfrm>
-            <a:off x="5209550" y="5041800"/>
-            <a:ext cx="6182350" cy="600000"/>
-          </a:xfrm>
-          <a:prstGeom prst="rect">
-            <a:avLst/>
-          </a:prstGeom>
-          <a:noFill/>
-          <a:ln>
-            <a:noFill/>
-          </a:ln>
-        </p:spPr>
-        <p:style>
-          <a:lnRef idx="1">
-            <a:schemeClr val="accent1"/>
-          </a:lnRef>
-          <a:fillRef idx="3">
-            <a:schemeClr val="accent1"/>
-          </a:fillRef>
-          <a:effectRef idx="2">
-            <a:schemeClr val="accent1"/>
-          </a:effectRef>
-          <a:fontRef idx="minor">
-            <a:schemeClr val="lt1"/>
-          </a:fontRef>
-        </p:style>
-        <p:txBody>
-          <a:bodyPr rtlCol="0" anchor="ctr" wrap="square"/>
-          <a:lstStyle/>
-          <a:p>
-            <a:pPr algn="l"/>
-            <a:r>
-              <a:rPr sz="1200" b="0">
-                <a:solidFill>
-                  <a:srgbClr val="555555"/>
-                </a:solidFill>
-                <a:latin typeface="Calibri"/>
-              </a:rPr>
-              <a:t>Medium — directionally consistent, still reconciling with experiment</a:t>
-            </a:r>
-          </a:p>
-        </p:txBody>
-      </p:sp>
-      <p:sp>
-        <p:nvSpPr>
-          <p:cNvPr id="23" name="Rectangle 22"/>
-          <p:cNvSpPr/>
-          <p:nvPr/>
-        </p:nvSpPr>
-        <p:spPr>
-          <a:xfrm>
-            <a:off x="400050" y="5671800"/>
-            <a:ext cx="11391900" cy="9525"/>
-          </a:xfrm>
-          <a:prstGeom prst="rect">
-            <a:avLst/>
-          </a:prstGeom>
-          <a:solidFill>
-            <a:srgbClr val="E5E5E5"/>
-          </a:solidFill>
-          <a:ln>
-            <a:noFill/>
-          </a:ln>
-        </p:spPr>
-        <p:style>
-          <a:lnRef idx="1">
-            <a:schemeClr val="accent1"/>
-          </a:lnRef>
-          <a:fillRef idx="3">
-            <a:schemeClr val="accent1"/>
-          </a:fillRef>
-          <a:effectRef idx="2">
-            <a:schemeClr val="accent1"/>
-          </a:effectRef>
-          <a:fontRef idx="minor">
-            <a:schemeClr val="lt1"/>
-          </a:fontRef>
-        </p:style>
-        <p:txBody>
-          <a:bodyPr rtlCol="0" anchor="ctr"/>
-          <a:lstStyle/>
-          <a:p>
-            <a:pPr algn="ctr"/>
-          </a:p>
-        </p:txBody>
-      </p:sp>
-      <p:sp>
-        <p:nvSpPr>
-          <p:cNvPr id="24" name="Rectangle 23"/>
-          <p:cNvSpPr/>
-          <p:nvPr/>
-        </p:nvSpPr>
-        <p:spPr>
-          <a:xfrm>
-            <a:off x="400050" y="5871800"/>
-            <a:ext cx="2400000" cy="500000"/>
-          </a:xfrm>
-          <a:prstGeom prst="rect">
-            <a:avLst/>
-          </a:prstGeom>
-          <a:noFill/>
-          <a:ln>
-            <a:noFill/>
-          </a:ln>
-        </p:spPr>
-        <p:style>
-          <a:lnRef idx="1">
-            <a:schemeClr val="accent1"/>
-          </a:lnRef>
-          <a:fillRef idx="3">
-            <a:schemeClr val="accent1"/>
-          </a:fillRef>
-          <a:effectRef idx="2">
-            <a:schemeClr val="accent1"/>
-          </a:effectRef>
-          <a:fontRef idx="minor">
-            <a:schemeClr val="lt1"/>
-          </a:fontRef>
-        </p:style>
-        <p:txBody>
-          <a:bodyPr rtlCol="0" anchor="ctr" wrap="square"/>
-          <a:lstStyle/>
-          <a:p>
-            <a:pPr algn="l"/>
-            <a:r>
-              <a:rPr sz="1500" b="1">
-                <a:solidFill>
-                  <a:srgbClr val="000000"/>
-                </a:solidFill>
-                <a:latin typeface="Calibri"/>
-              </a:rPr>
-              <a:t>Affiliate</a:t>
-            </a:r>
-          </a:p>
-        </p:txBody>
-      </p:sp>
-      <p:sp>
-        <p:nvSpPr>
-          <p:cNvPr id="25" name="Rectangle 24"/>
-          <p:cNvSpPr/>
-          <p:nvPr/>
-        </p:nvSpPr>
-        <p:spPr>
-          <a:xfrm>
-            <a:off x="2971800" y="5871800"/>
-            <a:ext cx="1900000" cy="500000"/>
-          </a:xfrm>
-          <a:prstGeom prst="rect">
-            <a:avLst/>
-          </a:prstGeom>
-          <a:noFill/>
-          <a:ln>
-            <a:noFill/>
-          </a:ln>
-        </p:spPr>
-        <p:style>
-          <a:lnRef idx="1">
-            <a:schemeClr val="accent1"/>
-          </a:lnRef>
-          <a:fillRef idx="3">
-            <a:schemeClr val="accent1"/>
-          </a:fillRef>
-          <a:effectRef idx="2">
-            <a:schemeClr val="accent1"/>
-          </a:effectRef>
-          <a:fontRef idx="minor">
-            <a:schemeClr val="lt1"/>
-          </a:fontRef>
-        </p:style>
-        <p:txBody>
-          <a:bodyPr rtlCol="0" anchor="ctr" wrap="square"/>
-          <a:lstStyle/>
-          <a:p>
-            <a:pPr algn="l"/>
-            <a:r>
-              <a:rPr sz="1500" b="1">
-                <a:solidFill>
-                  <a:srgbClr val="000000"/>
-                </a:solidFill>
-                <a:latin typeface="Calibri"/>
-              </a:rPr>
-              <a:t>Negative / unstable</a:t>
-            </a:r>
-          </a:p>
-        </p:txBody>
-      </p:sp>
-      <p:sp>
-        <p:nvSpPr>
-          <p:cNvPr id="26" name="Rectangle 25"/>
-          <p:cNvSpPr/>
-          <p:nvPr/>
-        </p:nvSpPr>
-        <p:spPr>
-          <a:xfrm>
-            <a:off x="5000000" y="5901800"/>
-            <a:ext cx="76200" cy="76200"/>
-          </a:xfrm>
-          <a:prstGeom prst="rect">
-            <a:avLst/>
-          </a:prstGeom>
-          <a:solidFill>
-            <a:srgbClr val="555555"/>
-          </a:solidFill>
-          <a:ln>
-            <a:noFill/>
-          </a:ln>
-        </p:spPr>
-        <p:style>
-          <a:lnRef idx="1">
-            <a:schemeClr val="accent1"/>
-          </a:lnRef>
-          <a:fillRef idx="3">
-            <a:schemeClr val="accent1"/>
-          </a:fillRef>
-          <a:effectRef idx="2">
-            <a:schemeClr val="accent1"/>
-          </a:effectRef>
-          <a:fontRef idx="minor">
-            <a:schemeClr val="lt1"/>
-          </a:fontRef>
-        </p:style>
-        <p:txBody>
-          <a:bodyPr rtlCol="0" anchor="ctr"/>
-          <a:lstStyle/>
-          <a:p>
-            <a:pPr algn="ctr"/>
-          </a:p>
-        </p:txBody>
-      </p:sp>
-      <p:sp>
-        <p:nvSpPr>
-          <p:cNvPr id="27" name="Rectangle 26"/>
-          <p:cNvSpPr/>
-          <p:nvPr/>
-        </p:nvSpPr>
-        <p:spPr>
-          <a:xfrm>
-            <a:off x="5209550" y="5841800"/>
-            <a:ext cx="6182350" cy="600000"/>
-          </a:xfrm>
-          <a:prstGeom prst="rect">
-            <a:avLst/>
-          </a:prstGeom>
-          <a:noFill/>
-          <a:ln>
-            <a:noFill/>
-          </a:ln>
-        </p:spPr>
-        <p:style>
-          <a:lnRef idx="1">
-            <a:schemeClr val="accent1"/>
-          </a:lnRef>
-          <a:fillRef idx="3">
-            <a:schemeClr val="accent1"/>
-          </a:fillRef>
-          <a:effectRef idx="2">
-            <a:schemeClr val="accent1"/>
-          </a:effectRef>
-          <a:fontRef idx="minor">
-            <a:schemeClr val="lt1"/>
-          </a:fontRef>
-        </p:style>
-        <p:txBody>
-          <a:bodyPr rtlCol="0" anchor="ctr" wrap="square"/>
-          <a:lstStyle/>
-          <a:p>
-            <a:pPr algn="l"/>
-            <a:r>
-              <a:rPr sz="1200" b="0">
-                <a:solidFill>
-                  <a:srgbClr val="555555"/>
-                </a:solidFill>
-                <a:latin typeface="Calibri"/>
-              </a:rPr>
-              <a:t>Low — small spend share, noisy estimate, needs more data</a:t>
-            </a:r>
-          </a:p>
-        </p:txBody>
-      </p:sp>
-      <p:sp>
-        <p:nvSpPr>
-          <p:cNvPr id="28" name="Rectangle 27"/>
-          <p:cNvSpPr/>
-          <p:nvPr/>
-        </p:nvSpPr>
-        <p:spPr>
-          <a:xfrm>
-            <a:off x="400050" y="6471800"/>
-            <a:ext cx="11391900" cy="9525"/>
-          </a:xfrm>
-          <a:prstGeom prst="rect">
-            <a:avLst/>
-          </a:prstGeom>
-          <a:solidFill>
-            <a:srgbClr val="E5E5E5"/>
-          </a:solidFill>
-          <a:ln>
-            <a:noFill/>
-          </a:ln>
-        </p:spPr>
-        <p:style>
-          <a:lnRef idx="1">
-            <a:schemeClr val="accent1"/>
-          </a:lnRef>
-          <a:fillRef idx="3">
-            <a:schemeClr val="accent1"/>
-          </a:fillRef>
-          <a:effectRef idx="2">
-            <a:schemeClr val="accent1"/>
-          </a:effectRef>
-          <a:fontRef idx="minor">
-            <a:schemeClr val="lt1"/>
-          </a:fontRef>
-        </p:style>
-        <p:txBody>
-          <a:bodyPr rtlCol="0" anchor="ctr"/>
-          <a:lstStyle/>
-          <a:p>
-            <a:pPr algn="ctr"/>
-          </a:p>
-        </p:txBody>
-      </p:sp>
-      <p:sp>
-        <p:nvSpPr>
-          <p:cNvPr id="29" name="Rectangle 28"/>
-          <p:cNvSpPr/>
-          <p:nvPr/>
-        </p:nvSpPr>
-        <p:spPr>
-          <a:xfrm>
-            <a:off x="400050" y="6286500"/>
-            <a:ext cx="11391900" cy="9525"/>
-          </a:xfrm>
-          <a:prstGeom prst="rect">
-            <a:avLst/>
-          </a:prstGeom>
-          <a:solidFill>
-            <a:srgbClr val="B8BCC4"/>
-          </a:solidFill>
-          <a:ln>
-            <a:noFill/>
-          </a:ln>
-        </p:spPr>
-        <p:style>
-          <a:lnRef idx="1">
-            <a:schemeClr val="accent1"/>
-          </a:lnRef>
-          <a:fillRef idx="3">
-            <a:schemeClr val="accent1"/>
-          </a:fillRef>
-          <a:effectRef idx="2">
-            <a:schemeClr val="accent1"/>
-          </a:effectRef>
-          <a:fontRef idx="minor">
-            <a:schemeClr val="lt1"/>
-          </a:fontRef>
-        </p:style>
-        <p:txBody>
-          <a:bodyPr rtlCol="0" anchor="ctr"/>
-          <a:lstStyle/>
-          <a:p>
-            <a:pPr algn="ctr"/>
-          </a:p>
-        </p:txBody>
-      </p:sp>
-      <p:sp>
-        <p:nvSpPr>
-          <p:cNvPr id="30" name="Rectangle 29"/>
+          <p:cNvPr id="7" name="Rectangle 6"/>
           <p:cNvSpPr/>
           <p:nvPr/>
         </p:nvSpPr>
@@ -8467,6 +6967,570 @@
                 </a:solidFill>
                 <a:latin typeface="Calibri"/>
               </a:rPr>
+              <a:t>CHANNEL ROI</a:t>
+            </a:r>
+          </a:p>
+        </p:txBody>
+      </p:sp>
+      <p:sp>
+        <p:nvSpPr>
+          <p:cNvPr id="3" name="Rectangle 2"/>
+          <p:cNvSpPr/>
+          <p:nvPr/>
+        </p:nvSpPr>
+        <p:spPr>
+          <a:xfrm>
+            <a:off x="400050" y="781050"/>
+            <a:ext cx="10000000" cy="900000"/>
+          </a:xfrm>
+          <a:prstGeom prst="rect">
+            <a:avLst/>
+          </a:prstGeom>
+          <a:noFill/>
+          <a:ln>
+            <a:noFill/>
+          </a:ln>
+        </p:spPr>
+        <p:style>
+          <a:lnRef idx="1">
+            <a:schemeClr val="accent1"/>
+          </a:lnRef>
+          <a:fillRef idx="3">
+            <a:schemeClr val="accent1"/>
+          </a:fillRef>
+          <a:effectRef idx="2">
+            <a:schemeClr val="accent1"/>
+          </a:effectRef>
+          <a:fontRef idx="minor">
+            <a:schemeClr val="lt1"/>
+          </a:fontRef>
+        </p:style>
+        <p:txBody>
+          <a:bodyPr rtlCol="0" anchor="ctr" wrap="square"/>
+          <a:lstStyle/>
+          <a:p>
+            <a:pPr algn="l"/>
+            <a:r>
+              <a:rPr sz="3150" b="1">
+                <a:solidFill>
+                  <a:srgbClr val="000000"/>
+                </a:solidFill>
+                <a:latin typeface="Calibri Light"/>
+              </a:rPr>
+              <a:t>Search and Social show the strongest validated return</a:t>
+            </a:r>
+          </a:p>
+        </p:txBody>
+      </p:sp>
+      <p:sp>
+        <p:nvSpPr>
+          <p:cNvPr id="4" name="Rectangle 3"/>
+          <p:cNvSpPr/>
+          <p:nvPr/>
+        </p:nvSpPr>
+        <p:spPr>
+          <a:xfrm>
+            <a:off x="400050" y="1700000"/>
+            <a:ext cx="10500000" cy="590550"/>
+          </a:xfrm>
+          <a:prstGeom prst="rect">
+            <a:avLst/>
+          </a:prstGeom>
+          <a:noFill/>
+          <a:ln>
+            <a:noFill/>
+          </a:ln>
+        </p:spPr>
+        <p:style>
+          <a:lnRef idx="1">
+            <a:schemeClr val="accent1"/>
+          </a:lnRef>
+          <a:fillRef idx="3">
+            <a:schemeClr val="accent1"/>
+          </a:fillRef>
+          <a:effectRef idx="2">
+            <a:schemeClr val="accent1"/>
+          </a:effectRef>
+          <a:fontRef idx="minor">
+            <a:schemeClr val="lt1"/>
+          </a:fontRef>
+        </p:style>
+        <p:txBody>
+          <a:bodyPr rtlCol="0" anchor="ctr" wrap="square"/>
+          <a:lstStyle/>
+          <a:p>
+            <a:pPr algn="l"/>
+            <a:r>
+              <a:rPr sz="1500" b="0">
+                <a:solidFill>
+                  <a:srgbClr val="555555"/>
+                </a:solidFill>
+                <a:latin typeface="Calibri"/>
+              </a:rPr>
+              <a:t>Revenue return per dollar spent, with confidence based on how well each channel's results match independent evidence.</a:t>
+            </a:r>
+          </a:p>
+        </p:txBody>
+      </p:sp>
+      <p:pic>
+        <p:nvPicPr>
+          <p:cNvPr id="5" name="Picture 4" descr="revenue_roi.png"/>
+          <p:cNvPicPr>
+            <a:picLocks noChangeAspect="1"/>
+          </p:cNvPicPr>
+          <p:nvPr/>
+        </p:nvPicPr>
+        <p:blipFill>
+          <a:blip r:embed="rId2"/>
+          <a:stretch>
+            <a:fillRect/>
+          </a:stretch>
+        </p:blipFill>
+        <p:spPr>
+          <a:xfrm>
+            <a:off x="400050" y="2650000"/>
+            <a:ext cx="4600000" cy="2300000"/>
+          </a:xfrm>
+          <a:prstGeom prst="rect">
+            <a:avLst/>
+          </a:prstGeom>
+        </p:spPr>
+      </p:pic>
+      <p:sp>
+        <p:nvSpPr>
+          <p:cNvPr id="6" name="Rectangle 5"/>
+          <p:cNvSpPr/>
+          <p:nvPr/>
+        </p:nvSpPr>
+        <p:spPr>
+          <a:xfrm>
+            <a:off x="400050" y="5190000"/>
+            <a:ext cx="66675" cy="66675"/>
+          </a:xfrm>
+          <a:prstGeom prst="rect">
+            <a:avLst/>
+          </a:prstGeom>
+          <a:solidFill>
+            <a:srgbClr val="000000"/>
+          </a:solidFill>
+          <a:ln>
+            <a:noFill/>
+          </a:ln>
+        </p:spPr>
+        <p:style>
+          <a:lnRef idx="1">
+            <a:schemeClr val="accent1"/>
+          </a:lnRef>
+          <a:fillRef idx="3">
+            <a:schemeClr val="accent1"/>
+          </a:fillRef>
+          <a:effectRef idx="2">
+            <a:schemeClr val="accent1"/>
+          </a:effectRef>
+          <a:fontRef idx="minor">
+            <a:schemeClr val="lt1"/>
+          </a:fontRef>
+        </p:style>
+        <p:txBody>
+          <a:bodyPr rtlCol="0" anchor="ctr"/>
+          <a:lstStyle/>
+          <a:p>
+            <a:pPr algn="ctr"/>
+          </a:p>
+        </p:txBody>
+      </p:sp>
+      <p:sp>
+        <p:nvSpPr>
+          <p:cNvPr id="7" name="Rectangle 6"/>
+          <p:cNvSpPr/>
+          <p:nvPr/>
+        </p:nvSpPr>
+        <p:spPr>
+          <a:xfrm>
+            <a:off x="590550" y="5150000"/>
+            <a:ext cx="10800000" cy="260000"/>
+          </a:xfrm>
+          <a:prstGeom prst="rect">
+            <a:avLst/>
+          </a:prstGeom>
+          <a:noFill/>
+          <a:ln>
+            <a:noFill/>
+          </a:ln>
+        </p:spPr>
+        <p:style>
+          <a:lnRef idx="1">
+            <a:schemeClr val="accent1"/>
+          </a:lnRef>
+          <a:fillRef idx="3">
+            <a:schemeClr val="accent1"/>
+          </a:fillRef>
+          <a:effectRef idx="2">
+            <a:schemeClr val="accent1"/>
+          </a:effectRef>
+          <a:fontRef idx="minor">
+            <a:schemeClr val="lt1"/>
+          </a:fontRef>
+        </p:style>
+        <p:txBody>
+          <a:bodyPr rtlCol="0" anchor="ctr" wrap="square"/>
+          <a:lstStyle/>
+          <a:p>
+            <a:pPr algn="l"/>
+            <a:r>
+              <a:rPr sz="1200" b="0">
+                <a:solidFill>
+                  <a:srgbClr val="000000"/>
+                </a:solidFill>
+                <a:latin typeface="Calibri"/>
+              </a:rPr>
+              <a:t>Search &amp; Social: high confidence — confirmed by experiment, stable across the model.</a:t>
+            </a:r>
+          </a:p>
+        </p:txBody>
+      </p:sp>
+      <p:sp>
+        <p:nvSpPr>
+          <p:cNvPr id="8" name="Rectangle 7"/>
+          <p:cNvSpPr/>
+          <p:nvPr/>
+        </p:nvSpPr>
+        <p:spPr>
+          <a:xfrm>
+            <a:off x="400050" y="5530000"/>
+            <a:ext cx="66675" cy="66675"/>
+          </a:xfrm>
+          <a:prstGeom prst="rect">
+            <a:avLst/>
+          </a:prstGeom>
+          <a:solidFill>
+            <a:srgbClr val="FF6B35"/>
+          </a:solidFill>
+          <a:ln>
+            <a:noFill/>
+          </a:ln>
+        </p:spPr>
+        <p:style>
+          <a:lnRef idx="1">
+            <a:schemeClr val="accent1"/>
+          </a:lnRef>
+          <a:fillRef idx="3">
+            <a:schemeClr val="accent1"/>
+          </a:fillRef>
+          <a:effectRef idx="2">
+            <a:schemeClr val="accent1"/>
+          </a:effectRef>
+          <a:fontRef idx="minor">
+            <a:schemeClr val="lt1"/>
+          </a:fontRef>
+        </p:style>
+        <p:txBody>
+          <a:bodyPr rtlCol="0" anchor="ctr"/>
+          <a:lstStyle/>
+          <a:p>
+            <a:pPr algn="ctr"/>
+          </a:p>
+        </p:txBody>
+      </p:sp>
+      <p:sp>
+        <p:nvSpPr>
+          <p:cNvPr id="9" name="Rectangle 8"/>
+          <p:cNvSpPr/>
+          <p:nvPr/>
+        </p:nvSpPr>
+        <p:spPr>
+          <a:xfrm>
+            <a:off x="590550" y="5490000"/>
+            <a:ext cx="10800000" cy="260000"/>
+          </a:xfrm>
+          <a:prstGeom prst="rect">
+            <a:avLst/>
+          </a:prstGeom>
+          <a:noFill/>
+          <a:ln>
+            <a:noFill/>
+          </a:ln>
+        </p:spPr>
+        <p:style>
+          <a:lnRef idx="1">
+            <a:schemeClr val="accent1"/>
+          </a:lnRef>
+          <a:fillRef idx="3">
+            <a:schemeClr val="accent1"/>
+          </a:fillRef>
+          <a:effectRef idx="2">
+            <a:schemeClr val="accent1"/>
+          </a:effectRef>
+          <a:fontRef idx="minor">
+            <a:schemeClr val="lt1"/>
+          </a:fontRef>
+        </p:style>
+        <p:txBody>
+          <a:bodyPr rtlCol="0" anchor="ctr" wrap="square"/>
+          <a:lstStyle/>
+          <a:p>
+            <a:pPr algn="l"/>
+            <a:r>
+              <a:rPr sz="1200" b="0">
+                <a:solidFill>
+                  <a:srgbClr val="000000"/>
+                </a:solidFill>
+                <a:latin typeface="Calibri"/>
+              </a:rPr>
+              <a:t>Direct Mail: medium confidence — directionally consistent, still reconciling with its experiment.</a:t>
+            </a:r>
+          </a:p>
+        </p:txBody>
+      </p:sp>
+      <p:sp>
+        <p:nvSpPr>
+          <p:cNvPr id="10" name="Rectangle 9"/>
+          <p:cNvSpPr/>
+          <p:nvPr/>
+        </p:nvSpPr>
+        <p:spPr>
+          <a:xfrm>
+            <a:off x="400050" y="5870000"/>
+            <a:ext cx="66675" cy="66675"/>
+          </a:xfrm>
+          <a:prstGeom prst="rect">
+            <a:avLst/>
+          </a:prstGeom>
+          <a:solidFill>
+            <a:srgbClr val="555555"/>
+          </a:solidFill>
+          <a:ln>
+            <a:noFill/>
+          </a:ln>
+        </p:spPr>
+        <p:style>
+          <a:lnRef idx="1">
+            <a:schemeClr val="accent1"/>
+          </a:lnRef>
+          <a:fillRef idx="3">
+            <a:schemeClr val="accent1"/>
+          </a:fillRef>
+          <a:effectRef idx="2">
+            <a:schemeClr val="accent1"/>
+          </a:effectRef>
+          <a:fontRef idx="minor">
+            <a:schemeClr val="lt1"/>
+          </a:fontRef>
+        </p:style>
+        <p:txBody>
+          <a:bodyPr rtlCol="0" anchor="ctr"/>
+          <a:lstStyle/>
+          <a:p>
+            <a:pPr algn="ctr"/>
+          </a:p>
+        </p:txBody>
+      </p:sp>
+      <p:sp>
+        <p:nvSpPr>
+          <p:cNvPr id="11" name="Rectangle 10"/>
+          <p:cNvSpPr/>
+          <p:nvPr/>
+        </p:nvSpPr>
+        <p:spPr>
+          <a:xfrm>
+            <a:off x="590550" y="5830000"/>
+            <a:ext cx="10800000" cy="260000"/>
+          </a:xfrm>
+          <a:prstGeom prst="rect">
+            <a:avLst/>
+          </a:prstGeom>
+          <a:noFill/>
+          <a:ln>
+            <a:noFill/>
+          </a:ln>
+        </p:spPr>
+        <p:style>
+          <a:lnRef idx="1">
+            <a:schemeClr val="accent1"/>
+          </a:lnRef>
+          <a:fillRef idx="3">
+            <a:schemeClr val="accent1"/>
+          </a:fillRef>
+          <a:effectRef idx="2">
+            <a:schemeClr val="accent1"/>
+          </a:effectRef>
+          <a:fontRef idx="minor">
+            <a:schemeClr val="lt1"/>
+          </a:fontRef>
+        </p:style>
+        <p:txBody>
+          <a:bodyPr rtlCol="0" anchor="ctr" wrap="square"/>
+          <a:lstStyle/>
+          <a:p>
+            <a:pPr algn="l"/>
+            <a:r>
+              <a:rPr sz="1200" b="0">
+                <a:solidFill>
+                  <a:srgbClr val="000000"/>
+                </a:solidFill>
+                <a:latin typeface="Calibri"/>
+              </a:rPr>
+              <a:t>Affiliate: excluded — spend share too small for a reliable estimate yet.</a:t>
+            </a:r>
+          </a:p>
+        </p:txBody>
+      </p:sp>
+      <p:sp>
+        <p:nvSpPr>
+          <p:cNvPr id="12" name="Rectangle 11"/>
+          <p:cNvSpPr/>
+          <p:nvPr/>
+        </p:nvSpPr>
+        <p:spPr>
+          <a:xfrm>
+            <a:off x="400050" y="6286500"/>
+            <a:ext cx="11391900" cy="9525"/>
+          </a:xfrm>
+          <a:prstGeom prst="rect">
+            <a:avLst/>
+          </a:prstGeom>
+          <a:solidFill>
+            <a:srgbClr val="B8BCC4"/>
+          </a:solidFill>
+          <a:ln>
+            <a:noFill/>
+          </a:ln>
+        </p:spPr>
+        <p:style>
+          <a:lnRef idx="1">
+            <a:schemeClr val="accent1"/>
+          </a:lnRef>
+          <a:fillRef idx="3">
+            <a:schemeClr val="accent1"/>
+          </a:fillRef>
+          <a:effectRef idx="2">
+            <a:schemeClr val="accent1"/>
+          </a:effectRef>
+          <a:fontRef idx="minor">
+            <a:schemeClr val="lt1"/>
+          </a:fontRef>
+        </p:style>
+        <p:txBody>
+          <a:bodyPr rtlCol="0" anchor="ctr"/>
+          <a:lstStyle/>
+          <a:p>
+            <a:pPr algn="ctr"/>
+          </a:p>
+        </p:txBody>
+      </p:sp>
+      <p:sp>
+        <p:nvSpPr>
+          <p:cNvPr id="13" name="Rectangle 12"/>
+          <p:cNvSpPr/>
+          <p:nvPr/>
+        </p:nvSpPr>
+        <p:spPr>
+          <a:xfrm>
+            <a:off x="10096500" y="6419850"/>
+            <a:ext cx="1695450" cy="228600"/>
+          </a:xfrm>
+          <a:prstGeom prst="rect">
+            <a:avLst/>
+          </a:prstGeom>
+          <a:noFill/>
+          <a:ln>
+            <a:noFill/>
+          </a:ln>
+        </p:spPr>
+        <p:style>
+          <a:lnRef idx="1">
+            <a:schemeClr val="accent1"/>
+          </a:lnRef>
+          <a:fillRef idx="3">
+            <a:schemeClr val="accent1"/>
+          </a:fillRef>
+          <a:effectRef idx="2">
+            <a:schemeClr val="accent1"/>
+          </a:effectRef>
+          <a:fontRef idx="minor">
+            <a:schemeClr val="lt1"/>
+          </a:fontRef>
+        </p:style>
+        <p:txBody>
+          <a:bodyPr rtlCol="0" anchor="ctr" wrap="square"/>
+          <a:lstStyle/>
+          <a:p>
+            <a:pPr algn="r"/>
+            <a:r>
+              <a:rPr sz="900" b="0">
+                <a:solidFill>
+                  <a:srgbClr val="555555"/>
+                </a:solidFill>
+                <a:latin typeface="Calibri"/>
+              </a:rPr>
+              <a:t>calmmm executive briefing / 6</a:t>
+            </a:r>
+          </a:p>
+        </p:txBody>
+      </p:sp>
+    </p:spTree>
+  </p:cSld>
+  <p:clrMapOvr>
+    <a:masterClrMapping/>
+  </p:clrMapOvr>
+</p:sld>
+</file>
+
+<file path=ppt/slides/slide7.xml><?xml version="1.0" encoding="utf-8"?>
+<p:sld xmlns:a="http://schemas.openxmlformats.org/drawingml/2006/main" xmlns:p="http://schemas.openxmlformats.org/presentationml/2006/main" xmlns:r="http://schemas.openxmlformats.org/officeDocument/2006/relationships">
+  <p:cSld>
+    <p:spTree>
+      <p:nvGrpSpPr>
+        <p:cNvPr id="1" name=""/>
+        <p:cNvGrpSpPr/>
+        <p:nvPr/>
+      </p:nvGrpSpPr>
+      <p:grpSpPr/>
+      <p:sp>
+        <p:nvSpPr>
+          <p:cNvPr id="2" name="Rectangle 1"/>
+          <p:cNvSpPr/>
+          <p:nvPr/>
+        </p:nvSpPr>
+        <p:spPr>
+          <a:xfrm>
+            <a:off x="400050" y="361950"/>
+            <a:ext cx="6000000" cy="247650"/>
+          </a:xfrm>
+          <a:prstGeom prst="rect">
+            <a:avLst/>
+          </a:prstGeom>
+          <a:noFill/>
+          <a:ln>
+            <a:noFill/>
+          </a:ln>
+        </p:spPr>
+        <p:style>
+          <a:lnRef idx="1">
+            <a:schemeClr val="accent1"/>
+          </a:lnRef>
+          <a:fillRef idx="3">
+            <a:schemeClr val="accent1"/>
+          </a:fillRef>
+          <a:effectRef idx="2">
+            <a:schemeClr val="accent1"/>
+          </a:effectRef>
+          <a:fontRef idx="minor">
+            <a:schemeClr val="lt1"/>
+          </a:fontRef>
+        </p:style>
+        <p:txBody>
+          <a:bodyPr rtlCol="0" anchor="ctr" wrap="square"/>
+          <a:lstStyle/>
+          <a:p>
+            <a:pPr algn="l"/>
+            <a:r>
+              <a:rPr sz="1050" b="1">
+                <a:solidFill>
+                  <a:srgbClr val="555555"/>
+                </a:solidFill>
+                <a:latin typeface="Calibri"/>
+              </a:rPr>
               <a:t>RECOMMENDATION</a:t>
             </a:r>
           </a:p>
@@ -9032,7 +8096,7 @@
                 </a:solidFill>
                 <a:latin typeface="Calibri"/>
               </a:rPr>
-              <a:t>calmmm executive briefing / 6</a:t>
+              <a:t>calmmm executive briefing / 7</a:t>
             </a:r>
           </a:p>
         </p:txBody>
